--- a/成果発表会資料_テンプレート.pptx
+++ b/成果発表会資料_テンプレート.pptx
@@ -120,17 +120,17 @@
   <p:extLst>
     <p:ext uri="{521415D9-36F7-43E2-AB2F-B90AF26B5E84}">
       <p14:sectionLst xmlns:p14="http://schemas.microsoft.com/office/powerpoint/2010/main">
-        <p14:section name="表紙" id="{0f3b6ad4-4b45-ff92-e05b-3620ce0518ab}">
+        <p14:section name="表紙" id="{aae36df6-19bb-00f2-88a0-71df1efae4e1}">
           <p14:sldIdLst>
             <p14:sldId id="256"/>
           </p14:sldIdLst>
         </p14:section>
-        <p14:section name="導入" id="{18040cd0-ef61-aba1-aaf5-7daa430bae12}">
+        <p14:section name="導入" id="{abed1b82-59f4-0a40-d7bb-24c7ab53ac0b}">
           <p14:sldIdLst>
             <p14:sldId id="257"/>
           </p14:sldIdLst>
         </p14:section>
-        <p14:section name="システム概要" id="{53245876-03bf-5fde-557c-6729a6cd1392}">
+        <p14:section name="システム概要" id="{1cb1e6c6-d59c-0c57-d6ed-20099c49a07d}">
           <p14:sldIdLst>
             <p14:sldId id="258"/>
             <p14:sldId id="259"/>
@@ -138,13 +138,13 @@
             <p14:sldId id="261"/>
           </p14:sldIdLst>
         </p14:section>
-        <p14:section name="デモンストレーション" id="{e32fe686-ae9e-dcac-6303-3fa324f94901}">
+        <p14:section name="デモンストレーション" id="{cb6b1752-f13e-706d-d779-a080c12d873d}">
           <p14:sldIdLst>
             <p14:sldId id="262"/>
             <p14:sldId id="263"/>
           </p14:sldIdLst>
         </p14:section>
-        <p14:section name="振り返り" id="{46e85a91-4abb-3e2b-8ffb-2b0192ed1bb2}">
+        <p14:section name="振り返り" id="{a229b44d-bbfd-af79-8747-d3fcbc4ba1cd}">
           <p14:sldIdLst>
             <p14:sldId id="264"/>
             <p14:sldId id="265"/>
@@ -152,7 +152,7 @@
             <p14:sldId id="267"/>
           </p14:sldIdLst>
         </p14:section>
-        <p14:section name="要望・まとめ" id="{af963649-0e0e-1e88-1c57-35832dcefa1a}">
+        <p14:section name="要望・まとめ" id="{91365e61-ce2e-696b-153c-81f395c2c049}">
           <p14:sldIdLst>
             <p14:sldId id="268"/>
             <p14:sldId id="269"/>
@@ -563,11 +563,7 @@
             <a:r>
               <a:rPr lang="en-US" dirty="0"/>
               <a:t>【担当：リーダー／目安 0.5分】
-チーム名とメンバーを紹介する。全員がホワイトボード前に並び、一人ずつ名乗る。
-【テンプレートの使い方】
-・橙色の斜体文字は記入欄。書き換えたら色を通常の文字色に戻す。
-・各スライド右上のタグに担当者名を入れる。
-・不要なスライド（追加課題を実装していない場合など）は削除してよい。</a:t>
+チーム名とメンバーを紹介する。全員がホワイトボード前に並び、一人ずつ名乗る。</a:t>
             </a:r>
             <a:endParaRPr lang="en-US" dirty="0"/>
           </a:p>
@@ -655,8 +651,7 @@
           <a:p>
             <a:r>
               <a:rPr lang="en-US" dirty="0"/>
-              <a:t>【担当：○○／目安 1分】
-・3件はテスト仕様書兼結果報告書（04.テスト）の備考欄から拾った下書き。チームの実感と違えば差し替える。
+              <a:t>【目安 1分】
 ・チーム運営面（分担、スケジュール、マージ時の衝突など）の苦労があれば1件入れるとバランスがよい。</a:t>
             </a:r>
             <a:endParaRPr lang="en-US" dirty="0"/>
@@ -745,9 +740,9 @@
           <a:p>
             <a:r>
               <a:rPr lang="en-US" dirty="0"/>
-              <a:t>【担当：○○／目安 1分】
-・数字はテスト仕様書兼結果報告書の集計欄（試験項目総数49、実施数50、OK48、NG0、実施不要2）から。総数と実施数が一致していないので、最終版の数字を確認して直すこと。
-・3つ目は必ずチーム独自の内容に書き換える。デモで見せた画面と結びつけると印象に残る。</a:t>
+              <a:t>【目安 1分】
+・数字はテスト仕様書兼結果報告書の最終版に合わせる。
+・チーム独自の工夫は、デモで見せた画面と結びつけると印象に残る。</a:t>
             </a:r>
             <a:endParaRPr lang="en-US" dirty="0"/>
           </a:p>
@@ -836,8 +831,6 @@
             <a:r>
               <a:rPr lang="en-US" dirty="0"/>
               <a:t>【担当：全員／目安 2分（1人30秒）】
-・3人チームの場合は4枠目を削除し、残りを広げる。
-・要件定義書の「振り返り」の観点（良かった点・問題点・反省点・工夫した点、改善策）を意識して書く。
 ・スライドには要点だけ書き、詳しくは口頭で話す。</a:t>
             </a:r>
             <a:endParaRPr lang="en-US" dirty="0"/>
@@ -926,9 +919,8 @@
           <a:p>
             <a:r>
               <a:rPr lang="en-US" dirty="0"/>
-              <a:t>【担当：○○／目安 1分】
-・不満ではなく「こうなると良い」という提案の形で書く。
-・例の2つ目（文字数上限）は、テストで仕様書と実装の上限が違っていた件から考えた下書き。</a:t>
+              <a:t>【目安 1分】
+・不満ではなく「こうなると良い」という提案の形で伝える。</a:t>
             </a:r>
             <a:endParaRPr lang="en-US" dirty="0"/>
           </a:p>
@@ -1017,7 +1009,7 @@
             <a:r>
               <a:rPr lang="en-US" dirty="0"/>
               <a:t>【担当：リーダー／目安 0.5分】
-全員で礼をして締める。質疑応答の時間があれば、質問を受けた人が答え、必要なら担当者に引き継ぐ。</a:t>
+全員で礼をして締める。</a:t>
             </a:r>
             <a:endParaRPr lang="en-US" dirty="0"/>
           </a:p>
@@ -1106,9 +1098,8 @@
             <a:r>
               <a:rPr lang="en-US" dirty="0"/>
               <a:t>【担当：司会／目安 0.5分】
-発表の流れを簡単に紹介する。
 時間配分は目安。リハーサルで計測し、8〜12分に収まるよう調整すること。
-システム概要は最初のチームだけが発表する。2チーム目以降はこのスライドで「概要は省略します」と伝えて次へ進む。</a:t>
+2チーム目以降は「システム概要は省略します」と伝えて次へ進む。</a:t>
             </a:r>
             <a:endParaRPr lang="en-US" dirty="0"/>
           </a:p>
@@ -1196,10 +1187,9 @@
           <a:p>
             <a:r>
               <a:rPr lang="en-US" dirty="0"/>
-              <a:t>【担当：○○／目安 1.5分】※最初のチームのみ発表
-・誰が（総務部の社員）、何のために（入退社時の従業員情報管理）使うシステムかを最初に伝える。
-・構成図を指しながら「ブラウザ→Tomcat上のServlet/JSP→MySQL」の流れを説明する。
-・データは従業員・所属・ユーザの3テーブル。従業員は所属コードで所属マスタを参照している。</a:t>
+              <a:t>【目安 1.5分】※最初のチームのみ発表
+・誰が何のために使うシステムかを最初に伝える。
+・構成図を指しながら「ブラウザ→Tomcat上のServlet/JSP→MySQL」の流れを説明する。</a:t>
             </a:r>
             <a:endParaRPr lang="en-US" dirty="0"/>
           </a:p>
@@ -1287,10 +1277,9 @@
           <a:p>
             <a:r>
               <a:rPr lang="en-US" dirty="0"/>
-              <a:t>【担当：○○／目安 含む1.5分】
-・番号1〜5が必須機能、6・7が追加課題（要件定義書の「余力があれば」「追加システム要件」）。
-・実装しなかった追加課題の行は削除すること。ほかに独自に追加した機能があれば行を足す。
-・画面遷移図（02.設計書／画面遷移図_演習.xlsx）の画像を貼りたい場合は、このスライドの次に1枚追加する。</a:t>
+              <a:t>【目安 含む1.5分】
+・番号1〜5が必須機能、それ以降が追加課題。
+・追加課題の表示は記入シートの「追加課題 &gt; 実装した」で切り替わる。</a:t>
             </a:r>
             <a:endParaRPr lang="en-US" dirty="0"/>
           </a:p>
@@ -1378,10 +1367,8 @@
           <a:p>
             <a:r>
               <a:rPr lang="en-US" dirty="0"/>
-              <a:t>【担当：○○／目安 含む1.5分】
-・クラス図（02.設計書／クラス図.png）の構成に沿って説明する。
-・servlet→model（Logic）→dao の順に呼び出され、結果をJSPで表示する流れを伝える。
-・環境のバージョンは自分たちのPCの実際の値と異なる場合は修正すること。</a:t>
+              <a:t>【目安 含む1.5分】
+・クラス図の構成に沿って、servlet→model（Logic）→dao の順に呼び出される流れを伝える。</a:t>
             </a:r>
             <a:endParaRPr lang="en-US" dirty="0"/>
           </a:p>
@@ -1469,9 +1456,8 @@
           <a:p>
             <a:r>
               <a:rPr lang="en-US" dirty="0"/>
-              <a:t>【担当：○○／目安 含む1.5分】
-・工程の区切りはWBS（05.プロジェクト管理／WBS_プロジェクト型演習.xlsx）の予定コマ。実績が大きくずれた工程があれば一言触れる。
-・役割分担は実際の分担に書き換える（例は仮の割り当て）。</a:t>
+              <a:t>【目安 含む1.5分】
+・工程の区切りはWBSの予定コマ。実績が大きくずれた工程があれば一言触れる。</a:t>
             </a:r>
             <a:endParaRPr lang="en-US" dirty="0"/>
           </a:p>
@@ -1559,12 +1545,10 @@
           <a:p>
             <a:r>
               <a:rPr lang="en-US" dirty="0"/>
-              <a:t>【操作担当：○○／説明担当：○○／目安 2.5分】
-・操作する人と説明する人を分けるとスムーズ。
-・事前準備：Tomcat・MySQLを起動し、ブラウザでログイン画面を開いておく。登録に使う従業員データ（例：コード 9001）を決めておく。
-・ログインでは、まずエラー画面を見せてから正しくログインすると、入力チェックの説明になる。
-・登録した従業員をそのまま削除すると、デモ後にデータが元に戻る。
-・万一動かない場合に備え、各画面のスクリーンショットを予備スライドに用意しておくと安心。</a:t>
+              <a:t>【目安 2.5分】
+・事前にTomcat・MySQLを起動し、ログイン画面を開いておく。
+・まずエラー画面を見せてから正しくログインすると、入力チェックの説明になる。
+・登録した従業員をそのまま削除すると、デモ後にデータが元に戻る。</a:t>
             </a:r>
             <a:endParaRPr lang="en-US" dirty="0"/>
           </a:p>
@@ -1652,8 +1636,7 @@
           <a:p>
             <a:r>
               <a:rPr lang="en-US" dirty="0"/>
-              <a:t>【操作担当：○○／目安 1.5分】
-・実装していない追加課題のカードは削除する。両方未実装ならこのスライドごと削除し、発表の流れの時間を調整する。
+              <a:t>【目安 1.5分】
 ・独自に追加した機能（入力チェックの強化、画面デザインなど）があれば、ここで見せる。</a:t>
             </a:r>
             <a:endParaRPr lang="en-US" dirty="0"/>
@@ -1742,8 +1725,7 @@
           <a:p>
             <a:r>
               <a:rPr lang="en-US" dirty="0"/>
-              <a:t>【担当：○○／目安 1分】
-・3つの観点は例。チームで話し合って入れ替えてよい。
+              <a:t>【目安 1分】
 ・「何を学んだか」に加えて「どの場面でそう感じたか」を一言添えると伝わりやすい。</a:t>
             </a:r>
             <a:endParaRPr lang="en-US" dirty="0"/>
@@ -1866,7 +1848,7 @@
               <a:buNone/>
               <a:defRPr lang="en-US" sz="3600" b="1" dirty="0">
                 <a:solidFill>
-                  <a:schemeClr val="bg1"/>
+                  <a:srgbClr val="FFFFFF"/>
                 </a:solidFill>
               </a:defRPr>
             </a:lvl1pPr>
@@ -1937,7 +1919,7 @@
               <a:buNone/>
               <a:defRPr lang="en-US" sz="2400" b="1" dirty="0">
                 <a:solidFill>
-                  <a:schemeClr val="tx2"/>
+                  <a:srgbClr val="0B3C49"/>
                 </a:solidFill>
               </a:defRPr>
             </a:lvl1pPr>
@@ -1977,7 +1959,7 @@
             <a:r>
               <a:rPr lang="en-US" sz="900" dirty="0">
                 <a:solidFill>
-                  <a:schemeClr val="accent6"/>
+                  <a:srgbClr val="64748B"/>
                 </a:solidFill>
               </a:rPr>
               <a:t>プロジェクト型演習（JavaWeb）成果発表会　｜　従業員情報管理システム empsys</a:t>
@@ -2445,7 +2427,7 @@
             <a:r>
               <a:rPr lang="en-US" sz="3600" b="1" dirty="0">
                 <a:solidFill>
-                  <a:schemeClr val="bg1"/>
+                  <a:srgbClr val="FFFFFF"/>
                 </a:solidFill>
               </a:rPr>
               <a:t>従業員情報管理システム empsys</a:t>
@@ -2472,7 +2454,7 @@
           <a:ln/>
         </p:spPr>
         <p:txBody>
-          <a:bodyPr wrap="square" lIns="0" tIns="0" rIns="0" bIns="0" rtlCol="0" anchor="ctr"/>
+          <a:bodyPr wrap="square" lIns="0" tIns="0" rIns="0" bIns="0" rtlCol="0" anchor="t"/>
           <a:lstStyle/>
           <a:p>
             <a:pPr indent="0" marL="0">
@@ -2481,7 +2463,7 @@
             <a:r>
               <a:rPr lang="en-US" sz="1600" b="1" dirty="0">
                 <a:solidFill>
-                  <a:schemeClr val="bg1"/>
+                  <a:srgbClr val="FFFFFF"/>
                 </a:solidFill>
               </a:rPr>
               <a:t>チーム名：</a:t>
@@ -2492,7 +2474,7 @@
             <a:r>
               <a:rPr lang="en-US" sz="1600" dirty="0">
                 <a:solidFill>
-                  <a:schemeClr val="bg1"/>
+                  <a:srgbClr val="FFFFFF"/>
                 </a:solidFill>
               </a:rPr>
               <a:t>F班</a:t>
@@ -2510,6 +2492,130 @@
         <p:spPr>
           <a:xfrm>
             <a:off x="548640" y="3154680"/>
+            <a:ext cx="8046720" cy="685800"/>
+          </a:xfrm>
+          <a:prstGeom prst="rect">
+            <a:avLst/>
+          </a:prstGeom>
+          <a:noFill/>
+          <a:ln/>
+        </p:spPr>
+        <p:txBody>
+          <a:bodyPr wrap="square" lIns="0" tIns="0" rIns="0" bIns="0" rtlCol="0" anchor="t"/>
+          <a:lstStyle/>
+          <a:p>
+            <a:pPr indent="0" marL="0">
+              <a:buNone/>
+            </a:pPr>
+            <a:r>
+              <a:rPr lang="en-US" sz="1600" b="1" dirty="0">
+                <a:solidFill>
+                  <a:srgbClr val="FFFFFF"/>
+                </a:solidFill>
+              </a:rPr>
+              <a:t>メンバー：</a:t>
+            </a:r>
+            <a:pPr indent="0" marL="0">
+              <a:buNone/>
+            </a:pPr>
+            <a:r>
+              <a:rPr lang="en-US" sz="1600" i="1" dirty="0">
+                <a:solidFill>
+                  <a:srgbClr val="FDBA74"/>
+                </a:solidFill>
+              </a:rPr>
+              <a:t>【記入】氏名1</a:t>
+            </a:r>
+            <a:pPr indent="0" marL="0">
+              <a:buNone/>
+            </a:pPr>
+            <a:r>
+              <a:rPr lang="en-US" sz="1600" dirty="0">
+                <a:solidFill>
+                  <a:srgbClr val="FFFFFF"/>
+                </a:solidFill>
+              </a:rPr>
+              <a:t>（リーダー）</a:t>
+            </a:r>
+            <a:pPr indent="0" marL="0">
+              <a:buNone/>
+            </a:pPr>
+            <a:r>
+              <a:rPr lang="en-US" sz="1600" dirty="0">
+                <a:solidFill>
+                  <a:srgbClr val="FFFFFF"/>
+                </a:solidFill>
+              </a:rPr>
+              <a:t>／</a:t>
+            </a:r>
+            <a:pPr indent="0" marL="0">
+              <a:buNone/>
+            </a:pPr>
+            <a:r>
+              <a:rPr lang="en-US" sz="1600" i="1" dirty="0">
+                <a:solidFill>
+                  <a:srgbClr val="FDBA74"/>
+                </a:solidFill>
+              </a:rPr>
+              <a:t>【記入】氏名2</a:t>
+            </a:r>
+            <a:pPr indent="0" marL="0">
+              <a:buNone/>
+            </a:pPr>
+            <a:r>
+              <a:rPr lang="en-US" sz="1600" dirty="0">
+                <a:solidFill>
+                  <a:srgbClr val="FFFFFF"/>
+                </a:solidFill>
+              </a:rPr>
+              <a:t>／</a:t>
+            </a:r>
+            <a:pPr indent="0" marL="0">
+              <a:buNone/>
+            </a:pPr>
+            <a:r>
+              <a:rPr lang="en-US" sz="1600" i="1" dirty="0">
+                <a:solidFill>
+                  <a:srgbClr val="FDBA74"/>
+                </a:solidFill>
+              </a:rPr>
+              <a:t>【記入】氏名3</a:t>
+            </a:r>
+            <a:pPr indent="0" marL="0">
+              <a:buNone/>
+            </a:pPr>
+            <a:r>
+              <a:rPr lang="en-US" sz="1600" dirty="0">
+                <a:solidFill>
+                  <a:srgbClr val="FFFFFF"/>
+                </a:solidFill>
+              </a:rPr>
+              <a:t>／</a:t>
+            </a:r>
+            <a:pPr indent="0" marL="0">
+              <a:buNone/>
+            </a:pPr>
+            <a:r>
+              <a:rPr lang="en-US" sz="1600" i="1" dirty="0">
+                <a:solidFill>
+                  <a:srgbClr val="FDBA74"/>
+                </a:solidFill>
+              </a:rPr>
+              <a:t>【記入】氏名4</a:t>
+            </a:r>
+            <a:endParaRPr lang="en-US" sz="1600" dirty="0"/>
+          </a:p>
+        </p:txBody>
+      </p:sp>
+      <p:sp>
+        <p:nvSpPr>
+          <p:cNvPr id="6" name="発表日"/>
+          <p:cNvSpPr txBox="1"/>
+          <p:nvPr/>
+        </p:nvSpPr>
+        <p:spPr>
+          <a:xfrm>
+            <a:off x="548640" y="3886200"/>
             <a:ext cx="8046720" cy="365760"/>
           </a:xfrm>
           <a:prstGeom prst="rect">
@@ -2519,7 +2625,7 @@
           <a:ln/>
         </p:spPr>
         <p:txBody>
-          <a:bodyPr wrap="square" lIns="0" tIns="0" rIns="0" bIns="0" rtlCol="0" anchor="ctr"/>
+          <a:bodyPr wrap="square" lIns="0" tIns="0" rIns="0" bIns="0" rtlCol="0" anchor="t"/>
           <a:lstStyle/>
           <a:p>
             <a:pPr indent="0" marL="0">
@@ -2528,10 +2634,10 @@
             <a:r>
               <a:rPr lang="en-US" sz="1600" b="1" dirty="0">
                 <a:solidFill>
-                  <a:schemeClr val="bg1"/>
-                </a:solidFill>
-              </a:rPr>
-              <a:t>メンバー：</a:t>
+                  <a:srgbClr val="FFFFFF"/>
+                </a:solidFill>
+              </a:rPr>
+              <a:t>発表日：</a:t>
             </a:r>
             <a:pPr indent="0" marL="0">
               <a:buNone/>
@@ -2542,7 +2648,7 @@
                   <a:srgbClr val="FDBA74"/>
                 </a:solidFill>
               </a:rPr>
-              <a:t>【記入】氏名1（リーダー）／氏名2／氏名3／氏名4</a:t>
+              <a:t>【記入】2026年○月○日</a:t>
             </a:r>
             <a:endParaRPr lang="en-US" sz="1600" dirty="0"/>
           </a:p>
@@ -2550,54 +2656,7 @@
       </p:sp>
       <p:sp>
         <p:nvSpPr>
-          <p:cNvPr id="6" name="発表日"/>
-          <p:cNvSpPr txBox="1"/>
-          <p:nvPr/>
-        </p:nvSpPr>
-        <p:spPr>
-          <a:xfrm>
-            <a:off x="548640" y="3566160"/>
-            <a:ext cx="8046720" cy="365760"/>
-          </a:xfrm>
-          <a:prstGeom prst="rect">
-            <a:avLst/>
-          </a:prstGeom>
-          <a:noFill/>
-          <a:ln/>
-        </p:spPr>
-        <p:txBody>
-          <a:bodyPr wrap="square" lIns="0" tIns="0" rIns="0" bIns="0" rtlCol="0" anchor="ctr"/>
-          <a:lstStyle/>
-          <a:p>
-            <a:pPr indent="0" marL="0">
-              <a:buNone/>
-            </a:pPr>
-            <a:r>
-              <a:rPr lang="en-US" sz="1600" b="1" dirty="0">
-                <a:solidFill>
-                  <a:schemeClr val="bg1"/>
-                </a:solidFill>
-              </a:rPr>
-              <a:t>発表日：</a:t>
-            </a:r>
-            <a:pPr indent="0" marL="0">
-              <a:buNone/>
-            </a:pPr>
-            <a:r>
-              <a:rPr lang="en-US" sz="1600" i="1" dirty="0">
-                <a:solidFill>
-                  <a:srgbClr val="FDBA74"/>
-                </a:solidFill>
-              </a:rPr>
-              <a:t>【記入】2026年○月○日</a:t>
-            </a:r>
-            <a:endParaRPr lang="en-US" sz="1600" dirty="0"/>
-          </a:p>
-        </p:txBody>
-      </p:sp>
-      <p:sp>
-        <p:nvSpPr>
-          <p:cNvPr id="7" name="記入の注意"/>
+          <p:cNvPr id="7" name="注意"/>
           <p:cNvSpPr txBox="1"/>
           <p:nvPr/>
         </p:nvSpPr>
@@ -2625,7 +2684,7 @@
                   <a:srgbClr val="9FC3C9"/>
                 </a:solidFill>
               </a:rPr>
-              <a:t>橙色の斜体文字は記入欄です。発表前にすべて書き換えてください。</a:t>
+              <a:t>この資料は記入シート.yml から自動で作られています。内容の修正は記入シートで行ってください。</a:t>
             </a:r>
             <a:endParaRPr lang="en-US" sz="1000" dirty="0"/>
           </a:p>
@@ -2685,7 +2744,7 @@
             <a:r>
               <a:rPr lang="en-US" sz="2400" b="1" dirty="0">
                 <a:solidFill>
-                  <a:schemeClr val="tx2"/>
+                  <a:srgbClr val="0B3C49"/>
                 </a:solidFill>
               </a:rPr>
               <a:t>苦労したこと・難しかったこと</a:t>
@@ -2696,7 +2755,7 @@
       </p:sp>
       <p:sp>
         <p:nvSpPr>
-          <p:cNvPr id="3" name="時間・担当タグ"/>
+          <p:cNvPr id="3" name="担当タグ"/>
           <p:cNvSpPr txBox="1"/>
           <p:nvPr/>
         </p:nvSpPr>
@@ -2729,10 +2788,21 @@
             <a:r>
               <a:rPr lang="en-US" sz="1100" b="1" dirty="0">
                 <a:solidFill>
-                  <a:schemeClr val="accent2"/>
-                </a:solidFill>
-              </a:rPr>
-              <a:t>担当：【記入】</a:t>
+                  <a:srgbClr val="C2410C"/>
+                </a:solidFill>
+              </a:rPr>
+              <a:t>担当：</a:t>
+            </a:r>
+            <a:pPr algn="ctr" indent="0" marL="0">
+              <a:buNone/>
+            </a:pPr>
+            <a:r>
+              <a:rPr lang="en-US" sz="1100" b="1" i="1" dirty="0">
+                <a:solidFill>
+                  <a:srgbClr val="C2410C"/>
+                </a:solidFill>
+              </a:rPr>
+              <a:t>【記入】</a:t>
             </a:r>
             <a:endParaRPr lang="en-US" sz="1100" dirty="0"/>
           </a:p>
@@ -2765,10 +2835,10 @@
             <a:r>
               <a:rPr lang="en-US" sz="1300" dirty="0">
                 <a:solidFill>
-                  <a:schemeClr val="accent6"/>
-                </a:solidFill>
-              </a:rPr>
-              <a:t>「何が起きたか → どう解決したか」の形でまとめます（下は資料から拾った下書き例）</a:t>
+                  <a:srgbClr val="64748B"/>
+                </a:solidFill>
+              </a:rPr>
+              <a:t>「何が起きたか → どう解決したか」の形でまとめました</a:t>
             </a:r>
             <a:endParaRPr lang="en-US" sz="1300" dirty="0"/>
           </a:p>
@@ -2801,7 +2871,7 @@
             <a:r>
               <a:rPr lang="en-US" sz="1200" b="1" dirty="0">
                 <a:solidFill>
-                  <a:schemeClr val="accent6"/>
+                  <a:srgbClr val="64748B"/>
                 </a:solidFill>
               </a:rPr>
               <a:t>何が起きたか</a:t>
@@ -2837,7 +2907,7 @@
             <a:r>
               <a:rPr lang="en-US" sz="1200" b="1" dirty="0">
                 <a:solidFill>
-                  <a:schemeClr val="accent6"/>
+                  <a:srgbClr val="64748B"/>
                 </a:solidFill>
               </a:rPr>
               <a:t>どう解決したか</a:t>
@@ -2902,7 +2972,7 @@
             <a:r>
               <a:rPr lang="en-US" sz="1300" b="1" dirty="0">
                 <a:solidFill>
-                  <a:schemeClr val="bg1"/>
+                  <a:srgbClr val="FFFFFF"/>
                 </a:solidFill>
               </a:rPr>
               <a:t>1</a:t>
@@ -2938,7 +3008,7 @@
             <a:r>
               <a:rPr lang="en-US" sz="1300" b="1" dirty="0">
                 <a:solidFill>
-                  <a:schemeClr val="tx2"/>
+                  <a:srgbClr val="0B3C49"/>
                 </a:solidFill>
               </a:rPr>
               <a:t>仕様書と実装の食い違い</a:t>
@@ -2974,7 +3044,7 @@
             <a:r>
               <a:rPr lang="en-US" sz="1100" dirty="0">
                 <a:solidFill>
-                  <a:schemeClr val="tx1"/>
+                  <a:srgbClr val="1F2933"/>
                 </a:solidFill>
               </a:rPr>
               <a:t>URLのコンテキストルート（/emp_sys/ と /empsys/）や、氏名・フリガナの文字数上限が設計書と実装で違っていた</a:t>
@@ -3035,7 +3105,7 @@
             <a:r>
               <a:rPr lang="en-US" sz="1100" dirty="0">
                 <a:solidFill>
-                  <a:schemeClr val="tx1"/>
+                  <a:srgbClr val="1F2933"/>
                 </a:solidFill>
               </a:rPr>
               <a:t>テスト結果の備考に差異を記録し、どちらを正とするかチームで決めた</a:t>
@@ -3100,7 +3170,7 @@
             <a:r>
               <a:rPr lang="en-US" sz="1300" b="1" dirty="0">
                 <a:solidFill>
-                  <a:schemeClr val="bg1"/>
+                  <a:srgbClr val="FFFFFF"/>
                 </a:solidFill>
               </a:rPr>
               <a:t>2</a:t>
@@ -3136,7 +3206,7 @@
             <a:r>
               <a:rPr lang="en-US" sz="1300" b="1" dirty="0">
                 <a:solidFill>
-                  <a:schemeClr val="tx2"/>
+                  <a:srgbClr val="0B3C49"/>
                 </a:solidFill>
               </a:rPr>
               <a:t>削除確認ダイアログの不具合</a:t>
@@ -3172,7 +3242,7 @@
             <a:r>
               <a:rPr lang="en-US" sz="1100" dirty="0">
                 <a:solidFill>
-                  <a:schemeClr val="tx1"/>
+                  <a:srgbClr val="1F2933"/>
                 </a:solidFill>
               </a:rPr>
               <a:t>キャンセルを押してもフォームが送信され、選択が外れてしまっていた</a:t>
@@ -3233,7 +3303,7 @@
             <a:r>
               <a:rPr lang="en-US" sz="1100" dirty="0">
                 <a:solidFill>
-                  <a:schemeClr val="tx1"/>
+                  <a:srgbClr val="1F2933"/>
                 </a:solidFill>
               </a:rPr>
               <a:t>onClick を return operation('delete') に変え、関数の最後で false を返すよう修正</a:t>
@@ -3298,7 +3368,7 @@
             <a:r>
               <a:rPr lang="en-US" sz="1300" b="1" dirty="0">
                 <a:solidFill>
-                  <a:schemeClr val="bg1"/>
+                  <a:srgbClr val="FFFFFF"/>
                 </a:solidFill>
               </a:rPr>
               <a:t>3</a:t>
@@ -3334,7 +3404,7 @@
             <a:r>
               <a:rPr lang="en-US" sz="1300" b="1" dirty="0">
                 <a:solidFill>
-                  <a:schemeClr val="tx2"/>
+                  <a:srgbClr val="0B3C49"/>
                 </a:solidFill>
               </a:rPr>
               <a:t>仕様のあいまいさ</a:t>
@@ -3370,7 +3440,7 @@
             <a:r>
               <a:rPr lang="en-US" sz="1100" dirty="0">
                 <a:solidFill>
-                  <a:schemeClr val="tx1"/>
+                  <a:srgbClr val="1F2933"/>
                 </a:solidFill>
               </a:rPr>
               <a:t>所属を未選択のまま登録できるか、全角と半角の従業員コードを同じとみなすかが決まっていなかった</a:t>
@@ -3431,7 +3501,7 @@
             <a:r>
               <a:rPr lang="en-US" sz="1100" dirty="0">
                 <a:solidFill>
-                  <a:schemeClr val="tx1"/>
+                  <a:srgbClr val="1F2933"/>
                 </a:solidFill>
               </a:rPr>
               <a:t>所属は任意項目、全角と半角は別のコードとして扱う方針に決め、テスト仕様書に反映</a:t>
@@ -3539,7 +3609,7 @@
             <a:r>
               <a:rPr lang="en-US" sz="2400" b="1" dirty="0">
                 <a:solidFill>
-                  <a:schemeClr val="tx2"/>
+                  <a:srgbClr val="0B3C49"/>
                 </a:solidFill>
               </a:rPr>
               <a:t>工夫点（アピールしたい点）</a:t>
@@ -3550,7 +3620,7 @@
       </p:sp>
       <p:sp>
         <p:nvSpPr>
-          <p:cNvPr id="3" name="時間・担当タグ"/>
+          <p:cNvPr id="3" name="担当タグ"/>
           <p:cNvSpPr txBox="1"/>
           <p:nvPr/>
         </p:nvSpPr>
@@ -3583,10 +3653,21 @@
             <a:r>
               <a:rPr lang="en-US" sz="1100" b="1" dirty="0">
                 <a:solidFill>
-                  <a:schemeClr val="accent2"/>
-                </a:solidFill>
-              </a:rPr>
-              <a:t>担当：【記入】</a:t>
+                  <a:srgbClr val="C2410C"/>
+                </a:solidFill>
+              </a:rPr>
+              <a:t>担当：</a:t>
+            </a:r>
+            <a:pPr algn="ctr" indent="0" marL="0">
+              <a:buNone/>
+            </a:pPr>
+            <a:r>
+              <a:rPr lang="en-US" sz="1100" b="1" i="1" dirty="0">
+                <a:solidFill>
+                  <a:srgbClr val="C2410C"/>
+                </a:solidFill>
+              </a:rPr>
+              <a:t>【記入】</a:t>
             </a:r>
             <a:endParaRPr lang="en-US" sz="1100" dirty="0"/>
           </a:p>
@@ -3619,7 +3700,7 @@
             <a:r>
               <a:rPr lang="en-US" sz="1300" dirty="0">
                 <a:solidFill>
-                  <a:schemeClr val="accent6"/>
+                  <a:srgbClr val="64748B"/>
                 </a:solidFill>
               </a:rPr>
               <a:t>左はテスト結果から言える数字、右はチームで特に見てほしい点</a:t>
@@ -3682,7 +3763,7 @@
             <a:r>
               <a:rPr lang="en-US" sz="3600" b="1" dirty="0">
                 <a:solidFill>
-                  <a:schemeClr val="accent1"/>
+                  <a:srgbClr val="0F7C8C"/>
                 </a:solidFill>
               </a:rPr>
               <a:t>約50</a:t>
@@ -3718,7 +3799,7 @@
             <a:r>
               <a:rPr lang="en-US" sz="1400" b="1" dirty="0">
                 <a:solidFill>
-                  <a:schemeClr val="tx2"/>
+                  <a:srgbClr val="0B3C49"/>
                 </a:solidFill>
               </a:rPr>
               <a:t>テスト項目</a:t>
@@ -3781,7 +3862,7 @@
             <a:r>
               <a:rPr lang="en-US" sz="3600" b="1" dirty="0">
                 <a:solidFill>
-                  <a:schemeClr val="accent1"/>
+                  <a:srgbClr val="0F7C8C"/>
                 </a:solidFill>
               </a:rPr>
               <a:t>48</a:t>
@@ -3817,7 +3898,7 @@
             <a:r>
               <a:rPr lang="en-US" sz="1400" b="1" dirty="0">
                 <a:solidFill>
-                  <a:schemeClr val="tx2"/>
+                  <a:srgbClr val="0B3C49"/>
                 </a:solidFill>
               </a:rPr>
               <a:t>OK</a:t>
@@ -3880,7 +3961,7 @@
             <a:r>
               <a:rPr lang="en-US" sz="3600" b="1" dirty="0">
                 <a:solidFill>
-                  <a:schemeClr val="bg1"/>
+                  <a:srgbClr val="FFFFFF"/>
                 </a:solidFill>
               </a:rPr>
               <a:t>0</a:t>
@@ -3916,7 +3997,7 @@
             <a:r>
               <a:rPr lang="en-US" sz="1400" b="1" dirty="0">
                 <a:solidFill>
-                  <a:schemeClr val="bg1"/>
+                  <a:srgbClr val="FFFFFF"/>
                 </a:solidFill>
               </a:rPr>
               <a:t>NG</a:t>
@@ -3952,7 +4033,7 @@
             <a:r>
               <a:rPr lang="en-US" sz="900" dirty="0">
                 <a:solidFill>
-                  <a:schemeClr val="accent6"/>
+                  <a:srgbClr val="64748B"/>
                 </a:solidFill>
               </a:rPr>
               <a:t>※実施不要の2件を除く（最終版の数字に修正）</a:t>
@@ -3990,7 +4071,7 @@
             <a:r>
               <a:rPr lang="en-US" sz="1300" b="1" dirty="0">
                 <a:solidFill>
-                  <a:schemeClr val="bg1"/>
+                  <a:srgbClr val="FFFFFF"/>
                 </a:solidFill>
               </a:rPr>
               <a:t>1</a:t>
@@ -4026,7 +4107,7 @@
             <a:r>
               <a:rPr lang="en-US" sz="1500" b="1" dirty="0">
                 <a:solidFill>
-                  <a:schemeClr val="tx2"/>
+                  <a:srgbClr val="0B3C49"/>
                 </a:solidFill>
               </a:rPr>
               <a:t>正常系と異常系を両方テスト</a:t>
@@ -4062,7 +4143,7 @@
             <a:r>
               <a:rPr lang="en-US" sz="1200" dirty="0">
                 <a:solidFill>
-                  <a:schemeClr val="tx1"/>
+                  <a:srgbClr val="1F2933"/>
                 </a:solidFill>
               </a:rPr>
               <a:t>未入力・桁あふれ・重複コード・記号入りコードなど、境界や例外の入力も確認した</a:t>
@@ -4100,7 +4181,7 @@
             <a:r>
               <a:rPr lang="en-US" sz="1300" b="1" dirty="0">
                 <a:solidFill>
-                  <a:schemeClr val="bg1"/>
+                  <a:srgbClr val="FFFFFF"/>
                 </a:solidFill>
               </a:rPr>
               <a:t>2</a:t>
@@ -4136,7 +4217,7 @@
             <a:r>
               <a:rPr lang="en-US" sz="1500" b="1" dirty="0">
                 <a:solidFill>
-                  <a:schemeClr val="tx2"/>
+                  <a:srgbClr val="0B3C49"/>
                 </a:solidFill>
               </a:rPr>
               <a:t>判断の根拠を記録</a:t>
@@ -4172,7 +4253,7 @@
             <a:r>
               <a:rPr lang="en-US" sz="1200" dirty="0">
                 <a:solidFill>
-                  <a:schemeClr val="tx1"/>
+                  <a:srgbClr val="1F2933"/>
                 </a:solidFill>
               </a:rPr>
               <a:t>仕様と違う挙動は備考に理由を残し、修正後は再テストした日付と内容も記録した</a:t>
@@ -4210,7 +4291,7 @@
             <a:r>
               <a:rPr lang="en-US" sz="1300" b="1" dirty="0">
                 <a:solidFill>
-                  <a:schemeClr val="bg1"/>
+                  <a:srgbClr val="FFFFFF"/>
                 </a:solidFill>
               </a:rPr>
               <a:t>3</a:t>
@@ -4246,7 +4327,7 @@
             <a:r>
               <a:rPr lang="en-US" sz="1500" b="1" i="1" dirty="0">
                 <a:solidFill>
-                  <a:schemeClr val="accent2"/>
+                  <a:srgbClr val="C2410C"/>
                 </a:solidFill>
               </a:rPr>
               <a:t>【記入】チーム独自の工夫</a:t>
@@ -4282,7 +4363,7 @@
             <a:r>
               <a:rPr lang="en-US" sz="1200" i="1" dirty="0">
                 <a:solidFill>
-                  <a:schemeClr val="accent2"/>
+                  <a:srgbClr val="C2410C"/>
                 </a:solidFill>
               </a:rPr>
               <a:t>【記入】例：画面デザイン、エラーメッセージの分かりやすさ、分担の工夫など</a:t>
@@ -4390,7 +4471,7 @@
             <a:r>
               <a:rPr lang="en-US" sz="2400" b="1" dirty="0">
                 <a:solidFill>
-                  <a:schemeClr val="tx2"/>
+                  <a:srgbClr val="0B3C49"/>
                 </a:solidFill>
               </a:rPr>
               <a:t>個人ごとの感想</a:t>
@@ -4401,7 +4482,7 @@
       </p:sp>
       <p:sp>
         <p:nvSpPr>
-          <p:cNvPr id="3" name="時間・担当タグ"/>
+          <p:cNvPr id="3" name="担当タグ"/>
           <p:cNvSpPr txBox="1"/>
           <p:nvPr/>
         </p:nvSpPr>
@@ -4434,7 +4515,7 @@
             <a:r>
               <a:rPr lang="en-US" sz="1100" b="1" dirty="0">
                 <a:solidFill>
-                  <a:schemeClr val="accent2"/>
+                  <a:srgbClr val="C2410C"/>
                 </a:solidFill>
               </a:rPr>
               <a:t>全員／1人30秒</a:t>
@@ -4470,7 +4551,7 @@
             <a:r>
               <a:rPr lang="en-US" sz="1300" dirty="0">
                 <a:solidFill>
-                  <a:schemeClr val="accent6"/>
+                  <a:srgbClr val="64748B"/>
                 </a:solidFill>
               </a:rPr>
               <a:t>担当した作業と、良かった点・反省点・次に活かしたいこと</a:t>
@@ -4535,7 +4616,7 @@
             <a:r>
               <a:rPr lang="en-US" sz="1300" b="1" dirty="0">
                 <a:solidFill>
-                  <a:schemeClr val="bg1"/>
+                  <a:srgbClr val="FFFFFF"/>
                 </a:solidFill>
               </a:rPr>
               <a:t>1</a:t>
@@ -4571,22 +4652,11 @@
             <a:r>
               <a:rPr lang="en-US" sz="1400" b="1" i="1" dirty="0">
                 <a:solidFill>
-                  <a:schemeClr val="accent2"/>
+                  <a:srgbClr val="C2410C"/>
                 </a:solidFill>
               </a:rPr>
               <a:t>【記入】氏名1</a:t>
             </a:r>
-            <a:pPr indent="0" marL="0">
-              <a:buNone/>
-            </a:pPr>
-            <a:r>
-              <a:rPr lang="en-US" sz="1100" i="1" dirty="0">
-                <a:solidFill>
-                  <a:schemeClr val="accent2"/>
-                </a:solidFill>
-              </a:rPr>
-              <a:t>　担当：【記入】</a:t>
-            </a:r>
             <a:endParaRPr lang="en-US" sz="1400" dirty="0"/>
           </a:p>
         </p:txBody>
@@ -4599,8 +4669,8 @@
         </p:nvSpPr>
         <p:spPr>
           <a:xfrm>
-            <a:off x="640080" y="1874520"/>
-            <a:ext cx="3657600" cy="868680"/>
+            <a:off x="640080" y="1847088"/>
+            <a:ext cx="3657600" cy="896112"/>
           </a:xfrm>
           <a:prstGeom prst="rect">
             <a:avLst/>
@@ -4620,12 +4690,26 @@
               <a:buChar char="•"/>
             </a:pPr>
             <a:r>
+              <a:rPr lang="en-US" sz="1200" b="1" dirty="0">
+                <a:solidFill>
+                  <a:srgbClr val="0B3C49"/>
+                </a:solidFill>
+              </a:rPr>
+              <a:t>良かった点：</a:t>
+            </a:r>
+            <a:pPr indent="0" marL="0">
+              <a:spcAft>
+                <a:spcPts val="200"/>
+              </a:spcAft>
+              <a:buNone/>
+            </a:pPr>
+            <a:r>
               <a:rPr lang="en-US" sz="1200" i="1" dirty="0">
                 <a:solidFill>
-                  <a:schemeClr val="accent2"/>
-                </a:solidFill>
-              </a:rPr>
-              <a:t>良かった点：【記入】</a:t>
+                  <a:srgbClr val="C2410C"/>
+                </a:solidFill>
+              </a:rPr>
+              <a:t>【記入】</a:t>
             </a:r>
             <a:endParaRPr lang="en-US" sz="1200" dirty="0"/>
           </a:p>
@@ -4638,12 +4722,26 @@
               <a:buChar char="•"/>
             </a:pPr>
             <a:r>
+              <a:rPr lang="en-US" sz="1200" b="1" dirty="0">
+                <a:solidFill>
+                  <a:srgbClr val="0B3C49"/>
+                </a:solidFill>
+              </a:rPr>
+              <a:t>反省点：</a:t>
+            </a:r>
+            <a:pPr indent="0" marL="0">
+              <a:spcAft>
+                <a:spcPts val="200"/>
+              </a:spcAft>
+              <a:buNone/>
+            </a:pPr>
+            <a:r>
               <a:rPr lang="en-US" sz="1200" i="1" dirty="0">
                 <a:solidFill>
-                  <a:schemeClr val="accent2"/>
-                </a:solidFill>
-              </a:rPr>
-              <a:t>反省点：【記入】</a:t>
+                  <a:srgbClr val="C2410C"/>
+                </a:solidFill>
+              </a:rPr>
+              <a:t>【記入】</a:t>
             </a:r>
             <a:endParaRPr lang="en-US" sz="1200" dirty="0"/>
           </a:p>
@@ -4656,12 +4754,26 @@
               <a:buChar char="•"/>
             </a:pPr>
             <a:r>
+              <a:rPr lang="en-US" sz="1200" b="1" dirty="0">
+                <a:solidFill>
+                  <a:srgbClr val="0B3C49"/>
+                </a:solidFill>
+              </a:rPr>
+              <a:t>次に活かしたいこと：</a:t>
+            </a:r>
+            <a:pPr indent="0" marL="0">
+              <a:spcAft>
+                <a:spcPts val="200"/>
+              </a:spcAft>
+              <a:buNone/>
+            </a:pPr>
+            <a:r>
               <a:rPr lang="en-US" sz="1200" i="1" dirty="0">
                 <a:solidFill>
-                  <a:schemeClr val="accent2"/>
-                </a:solidFill>
-              </a:rPr>
-              <a:t>次に活かしたいこと：【記入】</a:t>
+                  <a:srgbClr val="C2410C"/>
+                </a:solidFill>
+              </a:rPr>
+              <a:t>【記入】</a:t>
             </a:r>
             <a:endParaRPr lang="en-US" sz="1200" dirty="0"/>
           </a:p>
@@ -4723,7 +4835,7 @@
             <a:r>
               <a:rPr lang="en-US" sz="1300" b="1" dirty="0">
                 <a:solidFill>
-                  <a:schemeClr val="bg1"/>
+                  <a:srgbClr val="FFFFFF"/>
                 </a:solidFill>
               </a:rPr>
               <a:t>2</a:t>
@@ -4759,22 +4871,11 @@
             <a:r>
               <a:rPr lang="en-US" sz="1400" b="1" i="1" dirty="0">
                 <a:solidFill>
-                  <a:schemeClr val="accent2"/>
+                  <a:srgbClr val="C2410C"/>
                 </a:solidFill>
               </a:rPr>
               <a:t>【記入】氏名2</a:t>
             </a:r>
-            <a:pPr indent="0" marL="0">
-              <a:buNone/>
-            </a:pPr>
-            <a:r>
-              <a:rPr lang="en-US" sz="1100" i="1" dirty="0">
-                <a:solidFill>
-                  <a:schemeClr val="accent2"/>
-                </a:solidFill>
-              </a:rPr>
-              <a:t>　担当：【記入】</a:t>
-            </a:r>
             <a:endParaRPr lang="en-US" sz="1400" dirty="0"/>
           </a:p>
         </p:txBody>
@@ -4787,8 +4888,8 @@
         </p:nvSpPr>
         <p:spPr>
           <a:xfrm>
-            <a:off x="4846320" y="1874520"/>
-            <a:ext cx="3657600" cy="868680"/>
+            <a:off x="4846320" y="1847088"/>
+            <a:ext cx="3657600" cy="896112"/>
           </a:xfrm>
           <a:prstGeom prst="rect">
             <a:avLst/>
@@ -4808,12 +4909,26 @@
               <a:buChar char="•"/>
             </a:pPr>
             <a:r>
+              <a:rPr lang="en-US" sz="1200" b="1" dirty="0">
+                <a:solidFill>
+                  <a:srgbClr val="0B3C49"/>
+                </a:solidFill>
+              </a:rPr>
+              <a:t>良かった点：</a:t>
+            </a:r>
+            <a:pPr indent="0" marL="0">
+              <a:spcAft>
+                <a:spcPts val="200"/>
+              </a:spcAft>
+              <a:buNone/>
+            </a:pPr>
+            <a:r>
               <a:rPr lang="en-US" sz="1200" i="1" dirty="0">
                 <a:solidFill>
-                  <a:schemeClr val="accent2"/>
-                </a:solidFill>
-              </a:rPr>
-              <a:t>良かった点：【記入】</a:t>
+                  <a:srgbClr val="C2410C"/>
+                </a:solidFill>
+              </a:rPr>
+              <a:t>【記入】</a:t>
             </a:r>
             <a:endParaRPr lang="en-US" sz="1200" dirty="0"/>
           </a:p>
@@ -4826,12 +4941,26 @@
               <a:buChar char="•"/>
             </a:pPr>
             <a:r>
+              <a:rPr lang="en-US" sz="1200" b="1" dirty="0">
+                <a:solidFill>
+                  <a:srgbClr val="0B3C49"/>
+                </a:solidFill>
+              </a:rPr>
+              <a:t>反省点：</a:t>
+            </a:r>
+            <a:pPr indent="0" marL="0">
+              <a:spcAft>
+                <a:spcPts val="200"/>
+              </a:spcAft>
+              <a:buNone/>
+            </a:pPr>
+            <a:r>
               <a:rPr lang="en-US" sz="1200" i="1" dirty="0">
                 <a:solidFill>
-                  <a:schemeClr val="accent2"/>
-                </a:solidFill>
-              </a:rPr>
-              <a:t>反省点：【記入】</a:t>
+                  <a:srgbClr val="C2410C"/>
+                </a:solidFill>
+              </a:rPr>
+              <a:t>【記入】</a:t>
             </a:r>
             <a:endParaRPr lang="en-US" sz="1200" dirty="0"/>
           </a:p>
@@ -4844,12 +4973,26 @@
               <a:buChar char="•"/>
             </a:pPr>
             <a:r>
+              <a:rPr lang="en-US" sz="1200" b="1" dirty="0">
+                <a:solidFill>
+                  <a:srgbClr val="0B3C49"/>
+                </a:solidFill>
+              </a:rPr>
+              <a:t>次に活かしたいこと：</a:t>
+            </a:r>
+            <a:pPr indent="0" marL="0">
+              <a:spcAft>
+                <a:spcPts val="200"/>
+              </a:spcAft>
+              <a:buNone/>
+            </a:pPr>
+            <a:r>
               <a:rPr lang="en-US" sz="1200" i="1" dirty="0">
                 <a:solidFill>
-                  <a:schemeClr val="accent2"/>
-                </a:solidFill>
-              </a:rPr>
-              <a:t>次に活かしたいこと：【記入】</a:t>
+                  <a:srgbClr val="C2410C"/>
+                </a:solidFill>
+              </a:rPr>
+              <a:t>【記入】</a:t>
             </a:r>
             <a:endParaRPr lang="en-US" sz="1200" dirty="0"/>
           </a:p>
@@ -4911,7 +5054,7 @@
             <a:r>
               <a:rPr lang="en-US" sz="1300" b="1" dirty="0">
                 <a:solidFill>
-                  <a:schemeClr val="bg1"/>
+                  <a:srgbClr val="FFFFFF"/>
                 </a:solidFill>
               </a:rPr>
               <a:t>3</a:t>
@@ -4947,22 +5090,11 @@
             <a:r>
               <a:rPr lang="en-US" sz="1400" b="1" i="1" dirty="0">
                 <a:solidFill>
-                  <a:schemeClr val="accent2"/>
+                  <a:srgbClr val="C2410C"/>
                 </a:solidFill>
               </a:rPr>
               <a:t>【記入】氏名3</a:t>
             </a:r>
-            <a:pPr indent="0" marL="0">
-              <a:buNone/>
-            </a:pPr>
-            <a:r>
-              <a:rPr lang="en-US" sz="1100" i="1" dirty="0">
-                <a:solidFill>
-                  <a:schemeClr val="accent2"/>
-                </a:solidFill>
-              </a:rPr>
-              <a:t>　担当：【記入】</a:t>
-            </a:r>
             <a:endParaRPr lang="en-US" sz="1400" dirty="0"/>
           </a:p>
         </p:txBody>
@@ -4975,8 +5107,8 @@
         </p:nvSpPr>
         <p:spPr>
           <a:xfrm>
-            <a:off x="640080" y="3566160"/>
-            <a:ext cx="3657600" cy="868680"/>
+            <a:off x="640080" y="3538728"/>
+            <a:ext cx="3657600" cy="896112"/>
           </a:xfrm>
           <a:prstGeom prst="rect">
             <a:avLst/>
@@ -4996,12 +5128,26 @@
               <a:buChar char="•"/>
             </a:pPr>
             <a:r>
+              <a:rPr lang="en-US" sz="1200" b="1" dirty="0">
+                <a:solidFill>
+                  <a:srgbClr val="0B3C49"/>
+                </a:solidFill>
+              </a:rPr>
+              <a:t>良かった点：</a:t>
+            </a:r>
+            <a:pPr indent="0" marL="0">
+              <a:spcAft>
+                <a:spcPts val="200"/>
+              </a:spcAft>
+              <a:buNone/>
+            </a:pPr>
+            <a:r>
               <a:rPr lang="en-US" sz="1200" i="1" dirty="0">
                 <a:solidFill>
-                  <a:schemeClr val="accent2"/>
-                </a:solidFill>
-              </a:rPr>
-              <a:t>良かった点：【記入】</a:t>
+                  <a:srgbClr val="C2410C"/>
+                </a:solidFill>
+              </a:rPr>
+              <a:t>【記入】</a:t>
             </a:r>
             <a:endParaRPr lang="en-US" sz="1200" dirty="0"/>
           </a:p>
@@ -5014,12 +5160,26 @@
               <a:buChar char="•"/>
             </a:pPr>
             <a:r>
+              <a:rPr lang="en-US" sz="1200" b="1" dirty="0">
+                <a:solidFill>
+                  <a:srgbClr val="0B3C49"/>
+                </a:solidFill>
+              </a:rPr>
+              <a:t>反省点：</a:t>
+            </a:r>
+            <a:pPr indent="0" marL="0">
+              <a:spcAft>
+                <a:spcPts val="200"/>
+              </a:spcAft>
+              <a:buNone/>
+            </a:pPr>
+            <a:r>
               <a:rPr lang="en-US" sz="1200" i="1" dirty="0">
                 <a:solidFill>
-                  <a:schemeClr val="accent2"/>
-                </a:solidFill>
-              </a:rPr>
-              <a:t>反省点：【記入】</a:t>
+                  <a:srgbClr val="C2410C"/>
+                </a:solidFill>
+              </a:rPr>
+              <a:t>【記入】</a:t>
             </a:r>
             <a:endParaRPr lang="en-US" sz="1200" dirty="0"/>
           </a:p>
@@ -5032,12 +5192,26 @@
               <a:buChar char="•"/>
             </a:pPr>
             <a:r>
+              <a:rPr lang="en-US" sz="1200" b="1" dirty="0">
+                <a:solidFill>
+                  <a:srgbClr val="0B3C49"/>
+                </a:solidFill>
+              </a:rPr>
+              <a:t>次に活かしたいこと：</a:t>
+            </a:r>
+            <a:pPr indent="0" marL="0">
+              <a:spcAft>
+                <a:spcPts val="200"/>
+              </a:spcAft>
+              <a:buNone/>
+            </a:pPr>
+            <a:r>
               <a:rPr lang="en-US" sz="1200" i="1" dirty="0">
                 <a:solidFill>
-                  <a:schemeClr val="accent2"/>
-                </a:solidFill>
-              </a:rPr>
-              <a:t>次に活かしたいこと：【記入】</a:t>
+                  <a:srgbClr val="C2410C"/>
+                </a:solidFill>
+              </a:rPr>
+              <a:t>【記入】</a:t>
             </a:r>
             <a:endParaRPr lang="en-US" sz="1200" dirty="0"/>
           </a:p>
@@ -5099,7 +5273,7 @@
             <a:r>
               <a:rPr lang="en-US" sz="1300" b="1" dirty="0">
                 <a:solidFill>
-                  <a:schemeClr val="bg1"/>
+                  <a:srgbClr val="FFFFFF"/>
                 </a:solidFill>
               </a:rPr>
               <a:t>4</a:t>
@@ -5135,22 +5309,11 @@
             <a:r>
               <a:rPr lang="en-US" sz="1400" b="1" i="1" dirty="0">
                 <a:solidFill>
-                  <a:schemeClr val="accent2"/>
+                  <a:srgbClr val="C2410C"/>
                 </a:solidFill>
               </a:rPr>
               <a:t>【記入】氏名4</a:t>
             </a:r>
-            <a:pPr indent="0" marL="0">
-              <a:buNone/>
-            </a:pPr>
-            <a:r>
-              <a:rPr lang="en-US" sz="1100" i="1" dirty="0">
-                <a:solidFill>
-                  <a:schemeClr val="accent2"/>
-                </a:solidFill>
-              </a:rPr>
-              <a:t>　担当：【記入】</a:t>
-            </a:r>
             <a:endParaRPr lang="en-US" sz="1400" dirty="0"/>
           </a:p>
         </p:txBody>
@@ -5163,8 +5326,8 @@
         </p:nvSpPr>
         <p:spPr>
           <a:xfrm>
-            <a:off x="4846320" y="3566160"/>
-            <a:ext cx="3657600" cy="868680"/>
+            <a:off x="4846320" y="3538728"/>
+            <a:ext cx="3657600" cy="896112"/>
           </a:xfrm>
           <a:prstGeom prst="rect">
             <a:avLst/>
@@ -5184,12 +5347,26 @@
               <a:buChar char="•"/>
             </a:pPr>
             <a:r>
+              <a:rPr lang="en-US" sz="1200" b="1" dirty="0">
+                <a:solidFill>
+                  <a:srgbClr val="0B3C49"/>
+                </a:solidFill>
+              </a:rPr>
+              <a:t>良かった点：</a:t>
+            </a:r>
+            <a:pPr indent="0" marL="0">
+              <a:spcAft>
+                <a:spcPts val="200"/>
+              </a:spcAft>
+              <a:buNone/>
+            </a:pPr>
+            <a:r>
               <a:rPr lang="en-US" sz="1200" i="1" dirty="0">
                 <a:solidFill>
-                  <a:schemeClr val="accent2"/>
-                </a:solidFill>
-              </a:rPr>
-              <a:t>良かった点：【記入】</a:t>
+                  <a:srgbClr val="C2410C"/>
+                </a:solidFill>
+              </a:rPr>
+              <a:t>【記入】</a:t>
             </a:r>
             <a:endParaRPr lang="en-US" sz="1200" dirty="0"/>
           </a:p>
@@ -5202,12 +5379,26 @@
               <a:buChar char="•"/>
             </a:pPr>
             <a:r>
+              <a:rPr lang="en-US" sz="1200" b="1" dirty="0">
+                <a:solidFill>
+                  <a:srgbClr val="0B3C49"/>
+                </a:solidFill>
+              </a:rPr>
+              <a:t>反省点：</a:t>
+            </a:r>
+            <a:pPr indent="0" marL="0">
+              <a:spcAft>
+                <a:spcPts val="200"/>
+              </a:spcAft>
+              <a:buNone/>
+            </a:pPr>
+            <a:r>
               <a:rPr lang="en-US" sz="1200" i="1" dirty="0">
                 <a:solidFill>
-                  <a:schemeClr val="accent2"/>
-                </a:solidFill>
-              </a:rPr>
-              <a:t>反省点：【記入】</a:t>
+                  <a:srgbClr val="C2410C"/>
+                </a:solidFill>
+              </a:rPr>
+              <a:t>【記入】</a:t>
             </a:r>
             <a:endParaRPr lang="en-US" sz="1200" dirty="0"/>
           </a:p>
@@ -5220,12 +5411,26 @@
               <a:buChar char="•"/>
             </a:pPr>
             <a:r>
+              <a:rPr lang="en-US" sz="1200" b="1" dirty="0">
+                <a:solidFill>
+                  <a:srgbClr val="0B3C49"/>
+                </a:solidFill>
+              </a:rPr>
+              <a:t>次に活かしたいこと：</a:t>
+            </a:r>
+            <a:pPr indent="0" marL="0">
+              <a:spcAft>
+                <a:spcPts val="200"/>
+              </a:spcAft>
+              <a:buNone/>
+            </a:pPr>
+            <a:r>
               <a:rPr lang="en-US" sz="1200" i="1" dirty="0">
                 <a:solidFill>
-                  <a:schemeClr val="accent2"/>
-                </a:solidFill>
-              </a:rPr>
-              <a:t>次に活かしたいこと：【記入】</a:t>
+                  <a:srgbClr val="C2410C"/>
+                </a:solidFill>
+              </a:rPr>
+              <a:t>【記入】</a:t>
             </a:r>
             <a:endParaRPr lang="en-US" sz="1200" dirty="0"/>
           </a:p>
@@ -5330,7 +5535,7 @@
             <a:r>
               <a:rPr lang="en-US" sz="2400" b="1" dirty="0">
                 <a:solidFill>
-                  <a:schemeClr val="tx2"/>
+                  <a:srgbClr val="0B3C49"/>
                 </a:solidFill>
               </a:rPr>
               <a:t>今後の授業への要望</a:t>
@@ -5341,7 +5546,7 @@
       </p:sp>
       <p:sp>
         <p:nvSpPr>
-          <p:cNvPr id="3" name="時間・担当タグ"/>
+          <p:cNvPr id="3" name="担当タグ"/>
           <p:cNvSpPr txBox="1"/>
           <p:nvPr/>
         </p:nvSpPr>
@@ -5374,10 +5579,21 @@
             <a:r>
               <a:rPr lang="en-US" sz="1100" b="1" dirty="0">
                 <a:solidFill>
-                  <a:schemeClr val="accent2"/>
-                </a:solidFill>
-              </a:rPr>
-              <a:t>担当：【記入】</a:t>
+                  <a:srgbClr val="C2410C"/>
+                </a:solidFill>
+              </a:rPr>
+              <a:t>担当：</a:t>
+            </a:r>
+            <a:pPr algn="ctr" indent="0" marL="0">
+              <a:buNone/>
+            </a:pPr>
+            <a:r>
+              <a:rPr lang="en-US" sz="1100" b="1" i="1" dirty="0">
+                <a:solidFill>
+                  <a:srgbClr val="C2410C"/>
+                </a:solidFill>
+              </a:rPr>
+              <a:t>【記入】</a:t>
             </a:r>
             <a:endParaRPr lang="en-US" sz="1100" dirty="0"/>
           </a:p>
@@ -5410,7 +5626,7 @@
             <a:r>
               <a:rPr lang="en-US" sz="1300" dirty="0">
                 <a:solidFill>
-                  <a:schemeClr val="accent6"/>
+                  <a:srgbClr val="64748B"/>
                 </a:solidFill>
               </a:rPr>
               <a:t>企業課題Iに向けて、そして来年の3年生の授業に向けて</a:t>
@@ -5421,7 +5637,7 @@
       </p:sp>
       <p:sp>
         <p:nvSpPr>
-          <p:cNvPr id="5" name="要望1背景"/>
+          <p:cNvPr id="5" name="要望背景1"/>
           <p:cNvSpPr/>
           <p:nvPr/>
         </p:nvSpPr>
@@ -5448,7 +5664,7 @@
       </p:sp>
       <p:sp>
         <p:nvSpPr>
-          <p:cNvPr id="6" name="要望1見出し"/>
+          <p:cNvPr id="6" name="要望見出し1"/>
           <p:cNvSpPr txBox="1"/>
           <p:nvPr/>
         </p:nvSpPr>
@@ -5473,7 +5689,7 @@
             <a:r>
               <a:rPr lang="en-US" sz="1500" b="1" dirty="0">
                 <a:solidFill>
-                  <a:schemeClr val="accent1"/>
+                  <a:srgbClr val="0F7C8C"/>
                 </a:solidFill>
               </a:rPr>
               <a:t>企業課題Iに向けた要望</a:t>
@@ -5484,7 +5700,7 @@
       </p:sp>
       <p:sp>
         <p:nvSpPr>
-          <p:cNvPr id="7" name="要望1本文"/>
+          <p:cNvPr id="7" name="要望本文1"/>
           <p:cNvSpPr txBox="1"/>
           <p:nvPr/>
         </p:nvSpPr>
@@ -5513,7 +5729,7 @@
             <a:r>
               <a:rPr lang="en-US" sz="1300" i="1" dirty="0">
                 <a:solidFill>
-                  <a:schemeClr val="accent2"/>
+                  <a:srgbClr val="C2410C"/>
                 </a:solidFill>
               </a:rPr>
               <a:t>【記入】例：今回の工程（設計〜テスト）を企業課題でも同じ流れで進めたい</a:t>
@@ -5531,7 +5747,7 @@
             <a:r>
               <a:rPr lang="en-US" sz="1300" i="1" dirty="0">
                 <a:solidFill>
-                  <a:schemeClr val="accent2"/>
+                  <a:srgbClr val="C2410C"/>
                 </a:solidFill>
               </a:rPr>
               <a:t>【記入】例：レビューの観点を事前に共有してほしい</a:t>
@@ -5549,7 +5765,7 @@
             <a:r>
               <a:rPr lang="en-US" sz="1300" i="1" dirty="0">
                 <a:solidFill>
-                  <a:schemeClr val="accent2"/>
+                  <a:srgbClr val="C2410C"/>
                 </a:solidFill>
               </a:rPr>
               <a:t>【記入】</a:t>
@@ -5560,7 +5776,7 @@
       </p:sp>
       <p:sp>
         <p:nvSpPr>
-          <p:cNvPr id="8" name="要望2背景"/>
+          <p:cNvPr id="8" name="要望背景2"/>
           <p:cNvSpPr/>
           <p:nvPr/>
         </p:nvSpPr>
@@ -5587,7 +5803,7 @@
       </p:sp>
       <p:sp>
         <p:nvSpPr>
-          <p:cNvPr id="9" name="要望2見出し"/>
+          <p:cNvPr id="9" name="要望見出し2"/>
           <p:cNvSpPr txBox="1"/>
           <p:nvPr/>
         </p:nvSpPr>
@@ -5612,7 +5828,7 @@
             <a:r>
               <a:rPr lang="en-US" sz="1500" b="1" dirty="0">
                 <a:solidFill>
-                  <a:schemeClr val="accent1"/>
+                  <a:srgbClr val="0F7C8C"/>
                 </a:solidFill>
               </a:rPr>
               <a:t>来年の3年生授業への改善点</a:t>
@@ -5623,7 +5839,7 @@
       </p:sp>
       <p:sp>
         <p:nvSpPr>
-          <p:cNvPr id="10" name="要望2本文"/>
+          <p:cNvPr id="10" name="要望本文2"/>
           <p:cNvSpPr txBox="1"/>
           <p:nvPr/>
         </p:nvSpPr>
@@ -5652,7 +5868,7 @@
             <a:r>
               <a:rPr lang="en-US" sz="1300" i="1" dirty="0">
                 <a:solidFill>
-                  <a:schemeClr val="accent2"/>
+                  <a:srgbClr val="C2410C"/>
                 </a:solidFill>
               </a:rPr>
               <a:t>【記入】例：配布資料のテーブル定義と画面の文字数上限をそろえてほしい</a:t>
@@ -5670,7 +5886,7 @@
             <a:r>
               <a:rPr lang="en-US" sz="1300" i="1" dirty="0">
                 <a:solidFill>
-                  <a:schemeClr val="accent2"/>
+                  <a:srgbClr val="C2410C"/>
                 </a:solidFill>
               </a:rPr>
               <a:t>【記入】例：開発環境構築の手順書がほしい</a:t>
@@ -5688,7 +5904,7 @@
             <a:r>
               <a:rPr lang="en-US" sz="1300" i="1" dirty="0">
                 <a:solidFill>
-                  <a:schemeClr val="accent2"/>
+                  <a:srgbClr val="C2410C"/>
                 </a:solidFill>
               </a:rPr>
               <a:t>【記入】</a:t>
@@ -5796,7 +6012,7 @@
             <a:r>
               <a:rPr lang="en-US" sz="3600" b="1" dirty="0">
                 <a:solidFill>
-                  <a:schemeClr val="bg1"/>
+                  <a:srgbClr val="FFFFFF"/>
                 </a:solidFill>
               </a:rPr>
               <a:t>ご清聴ありがとうございました</a:t>
@@ -5832,21 +6048,98 @@
             <a:r>
               <a:rPr lang="en-US" sz="1600" b="1" dirty="0">
                 <a:solidFill>
-                  <a:schemeClr val="bg1"/>
-                </a:solidFill>
-              </a:rPr>
-              <a:t>F班　</a:t>
+                  <a:srgbClr val="FFFFFF"/>
+                </a:solidFill>
+              </a:rPr>
+              <a:t>F班</a:t>
             </a:r>
             <a:pPr indent="0" marL="0">
               <a:buNone/>
             </a:pPr>
             <a:r>
-              <a:rPr lang="en-US" sz="1600" i="1" dirty="0">
+              <a:rPr lang="en-US" sz="1600" b="1" dirty="0">
+                <a:solidFill>
+                  <a:srgbClr val="000000"/>
+                </a:solidFill>
+              </a:rPr>
+              <a:t>　</a:t>
+            </a:r>
+            <a:pPr indent="0" marL="0">
+              <a:buNone/>
+            </a:pPr>
+            <a:r>
+              <a:rPr lang="en-US" sz="1600" b="1" i="1" dirty="0">
                 <a:solidFill>
                   <a:srgbClr val="FDBA74"/>
                 </a:solidFill>
               </a:rPr>
-              <a:t>【記入】氏名1／氏名2／氏名3／氏名4</a:t>
+              <a:t>【記入】氏名1</a:t>
+            </a:r>
+            <a:pPr indent="0" marL="0">
+              <a:buNone/>
+            </a:pPr>
+            <a:r>
+              <a:rPr lang="en-US" sz="1600" b="1" dirty="0">
+                <a:solidFill>
+                  <a:srgbClr val="FFFFFF"/>
+                </a:solidFill>
+              </a:rPr>
+              <a:t>／</a:t>
+            </a:r>
+            <a:pPr indent="0" marL="0">
+              <a:buNone/>
+            </a:pPr>
+            <a:r>
+              <a:rPr lang="en-US" sz="1600" b="1" i="1" dirty="0">
+                <a:solidFill>
+                  <a:srgbClr val="FDBA74"/>
+                </a:solidFill>
+              </a:rPr>
+              <a:t>【記入】氏名2</a:t>
+            </a:r>
+            <a:pPr indent="0" marL="0">
+              <a:buNone/>
+            </a:pPr>
+            <a:r>
+              <a:rPr lang="en-US" sz="1600" b="1" dirty="0">
+                <a:solidFill>
+                  <a:srgbClr val="FFFFFF"/>
+                </a:solidFill>
+              </a:rPr>
+              <a:t>／</a:t>
+            </a:r>
+            <a:pPr indent="0" marL="0">
+              <a:buNone/>
+            </a:pPr>
+            <a:r>
+              <a:rPr lang="en-US" sz="1600" b="1" i="1" dirty="0">
+                <a:solidFill>
+                  <a:srgbClr val="FDBA74"/>
+                </a:solidFill>
+              </a:rPr>
+              <a:t>【記入】氏名3</a:t>
+            </a:r>
+            <a:pPr indent="0" marL="0">
+              <a:buNone/>
+            </a:pPr>
+            <a:r>
+              <a:rPr lang="en-US" sz="1600" b="1" dirty="0">
+                <a:solidFill>
+                  <a:srgbClr val="FFFFFF"/>
+                </a:solidFill>
+              </a:rPr>
+              <a:t>／</a:t>
+            </a:r>
+            <a:pPr indent="0" marL="0">
+              <a:buNone/>
+            </a:pPr>
+            <a:r>
+              <a:rPr lang="en-US" sz="1600" b="1" i="1" dirty="0">
+                <a:solidFill>
+                  <a:srgbClr val="FDBA74"/>
+                </a:solidFill>
+              </a:rPr>
+              <a:t>【記入】氏名4</a:t>
             </a:r>
             <a:endParaRPr lang="en-US" sz="1600" dirty="0"/>
           </a:p>
@@ -5942,7 +6235,7 @@
             <a:r>
               <a:rPr lang="en-US" sz="2400" b="1" dirty="0">
                 <a:solidFill>
-                  <a:schemeClr val="tx2"/>
+                  <a:srgbClr val="0B3C49"/>
                 </a:solidFill>
               </a:rPr>
               <a:t>発表の流れ</a:t>
@@ -5978,7 +6271,7 @@
             <a:r>
               <a:rPr lang="en-US" sz="1300" dirty="0">
                 <a:solidFill>
-                  <a:schemeClr val="accent6"/>
+                  <a:srgbClr val="64748B"/>
                 </a:solidFill>
               </a:rPr>
               <a:t>1チーム 8〜12分。全員がホワイトボード前に出て発表します</a:t>
@@ -6028,7 +6321,7 @@
                       <a:r>
                         <a:rPr lang="en-US" sz="1300" b="1" dirty="0">
                           <a:solidFill>
-                            <a:schemeClr val="bg1"/>
+                            <a:srgbClr val="FFFFFF"/>
                           </a:solidFill>
                         </a:rPr>
                         <a:t>No</a:t>
@@ -6089,7 +6382,7 @@
                       <a:r>
                         <a:rPr lang="en-US" sz="1300" b="1" dirty="0">
                           <a:solidFill>
-                            <a:schemeClr val="bg1"/>
+                            <a:srgbClr val="FFFFFF"/>
                           </a:solidFill>
                         </a:rPr>
                         <a:t>内容</a:t>
@@ -6150,7 +6443,7 @@
                       <a:r>
                         <a:rPr lang="en-US" sz="1300" b="1" dirty="0">
                           <a:solidFill>
-                            <a:schemeClr val="bg1"/>
+                            <a:srgbClr val="FFFFFF"/>
                           </a:solidFill>
                         </a:rPr>
                         <a:t>目安</a:t>
@@ -6211,7 +6504,7 @@
                       <a:r>
                         <a:rPr lang="en-US" sz="1300" b="1" dirty="0">
                           <a:solidFill>
-                            <a:schemeClr val="bg1"/>
+                            <a:srgbClr val="FFFFFF"/>
                           </a:solidFill>
                         </a:rPr>
                         <a:t>担当</a:t>
@@ -6272,7 +6565,7 @@
                       <a:r>
                         <a:rPr lang="en-US" sz="1300" b="1" dirty="0">
                           <a:solidFill>
-                            <a:schemeClr val="bg1"/>
+                            <a:srgbClr val="FFFFFF"/>
                           </a:solidFill>
                         </a:rPr>
                         <a:t>備考</a:t>
@@ -6509,7 +6802,7 @@
                       <a:r>
                         <a:rPr lang="en-US" sz="1300" i="1" dirty="0">
                           <a:solidFill>
-                            <a:schemeClr val="accent2"/>
+                            <a:srgbClr val="C2410C"/>
                           </a:solidFill>
                         </a:rPr>
                         <a:t>【記入】</a:t>
@@ -6567,7 +6860,7 @@
                       <a:r>
                         <a:rPr lang="en-US" sz="1300" dirty="0">
                           <a:solidFill>
-                            <a:schemeClr val="accent6"/>
+                            <a:srgbClr val="64748B"/>
                           </a:solidFill>
                         </a:rPr>
                         <a:t>※最初のチームのみ発表</a:t>
@@ -6801,7 +7094,7 @@
                       <a:r>
                         <a:rPr lang="en-US" sz="1300" i="1" dirty="0">
                           <a:solidFill>
-                            <a:schemeClr val="accent2"/>
+                            <a:srgbClr val="C2410C"/>
                           </a:solidFill>
                         </a:rPr>
                         <a:t>【記入】</a:t>
@@ -6859,7 +7152,7 @@
                       <a:r>
                         <a:rPr lang="en-US" sz="1300" dirty="0">
                           <a:solidFill>
-                            <a:schemeClr val="accent6"/>
+                            <a:srgbClr val="64748B"/>
                           </a:solidFill>
                         </a:rPr>
                         <a:t>基本ルート＋追加課題</a:t>
@@ -7093,7 +7386,7 @@
                       <a:r>
                         <a:rPr lang="en-US" sz="1300" i="1" dirty="0">
                           <a:solidFill>
-                            <a:schemeClr val="accent2"/>
+                            <a:srgbClr val="C2410C"/>
                           </a:solidFill>
                         </a:rPr>
                         <a:t>【記入】</a:t>
@@ -7375,12 +7668,12 @@
                         <a:buNone/>
                       </a:pPr>
                       <a:r>
-                        <a:rPr lang="en-US" sz="1300" i="1" dirty="0">
+                        <a:rPr lang="en-US" sz="1300" dirty="0">
                           <a:solidFill>
-                            <a:schemeClr val="accent2"/>
+                            <a:srgbClr val="1F2933"/>
                           </a:solidFill>
                         </a:rPr>
-                        <a:t>【記入】</a:t>
+                        <a:t>全員</a:t>
                       </a:r>
                       <a:endParaRPr lang="en-US" sz="1300" dirty="0"/>
                     </a:p>
@@ -7435,7 +7728,7 @@
                       <a:r>
                         <a:rPr lang="en-US" sz="1300" dirty="0">
                           <a:solidFill>
-                            <a:schemeClr val="accent6"/>
+                            <a:srgbClr val="64748B"/>
                           </a:solidFill>
                         </a:rPr>
                         <a:t>1人30秒程度</a:t>
@@ -7669,7 +7962,7 @@
                       <a:r>
                         <a:rPr lang="en-US" sz="1300" i="1" dirty="0">
                           <a:solidFill>
-                            <a:schemeClr val="accent2"/>
+                            <a:srgbClr val="C2410C"/>
                           </a:solidFill>
                         </a:rPr>
                         <a:t>【記入】</a:t>
@@ -7995,10 +8288,10 @@
                       <a:r>
                         <a:rPr lang="en-US" sz="1300" dirty="0">
                           <a:solidFill>
-                            <a:schemeClr val="accent6"/>
+                            <a:srgbClr val="64748B"/>
                           </a:solidFill>
                         </a:rPr>
-                        <a:t>概要を省く場合は約10分</a:t>
+                        <a:t>概要なしは約10分</a:t>
                       </a:r>
                       <a:endParaRPr lang="en-US" sz="1300" dirty="0"/>
                     </a:p>
@@ -8146,7 +8439,7 @@
             <a:r>
               <a:rPr lang="en-US" sz="2400" b="1" dirty="0">
                 <a:solidFill>
-                  <a:schemeClr val="tx2"/>
+                  <a:srgbClr val="0B3C49"/>
                 </a:solidFill>
               </a:rPr>
               <a:t>システム概要</a:t>
@@ -8157,7 +8450,7 @@
       </p:sp>
       <p:sp>
         <p:nvSpPr>
-          <p:cNvPr id="3" name="時間・担当タグ"/>
+          <p:cNvPr id="3" name="担当タグ"/>
           <p:cNvSpPr txBox="1"/>
           <p:nvPr/>
         </p:nvSpPr>
@@ -8190,10 +8483,21 @@
             <a:r>
               <a:rPr lang="en-US" sz="1100" b="1" dirty="0">
                 <a:solidFill>
-                  <a:schemeClr val="accent2"/>
-                </a:solidFill>
-              </a:rPr>
-              <a:t>担当：【記入】</a:t>
+                  <a:srgbClr val="C2410C"/>
+                </a:solidFill>
+              </a:rPr>
+              <a:t>担当：</a:t>
+            </a:r>
+            <a:pPr algn="ctr" indent="0" marL="0">
+              <a:buNone/>
+            </a:pPr>
+            <a:r>
+              <a:rPr lang="en-US" sz="1100" b="1" i="1" dirty="0">
+                <a:solidFill>
+                  <a:srgbClr val="C2410C"/>
+                </a:solidFill>
+              </a:rPr>
+              <a:t>【記入】</a:t>
             </a:r>
             <a:endParaRPr lang="en-US" sz="1100" dirty="0"/>
           </a:p>
@@ -8226,7 +8530,7 @@
             <a:r>
               <a:rPr lang="en-US" sz="1300" dirty="0">
                 <a:solidFill>
-                  <a:schemeClr val="accent6"/>
+                  <a:srgbClr val="64748B"/>
                 </a:solidFill>
               </a:rPr>
               <a:t>総務部の社員が、従業員情報をWebブラウザから閲覧・登録・削除するシステム</a:t>
@@ -8289,7 +8593,7 @@
             <a:r>
               <a:rPr lang="en-US" sz="1500" b="1" dirty="0">
                 <a:solidFill>
-                  <a:schemeClr val="bg1"/>
+                  <a:srgbClr val="FFFFFF"/>
                 </a:solidFill>
               </a:rPr>
               <a:t>利用者</a:t>
@@ -8325,7 +8629,7 @@
             <a:r>
               <a:rPr lang="en-US" sz="1200" dirty="0">
                 <a:solidFill>
-                  <a:schemeClr val="bg1"/>
+                  <a:srgbClr val="FFFFFF"/>
                 </a:solidFill>
               </a:rPr>
               <a:t>総務部の社員</a:t>
@@ -8413,7 +8717,7 @@
             <a:r>
               <a:rPr lang="en-US" sz="1500" b="1" dirty="0">
                 <a:solidFill>
-                  <a:schemeClr val="tx2"/>
+                  <a:srgbClr val="0B3C49"/>
                 </a:solidFill>
               </a:rPr>
               <a:t>Webブラウザ</a:t>
@@ -8449,7 +8753,7 @@
             <a:r>
               <a:rPr lang="en-US" sz="1200" dirty="0">
                 <a:solidFill>
-                  <a:schemeClr val="tx1"/>
+                  <a:srgbClr val="1F2933"/>
                 </a:solidFill>
               </a:rPr>
               <a:t>画面操作</a:t>
@@ -8537,7 +8841,7 @@
             <a:r>
               <a:rPr lang="en-US" sz="1500" b="1" dirty="0">
                 <a:solidFill>
-                  <a:schemeClr val="tx2"/>
+                  <a:srgbClr val="0B3C49"/>
                 </a:solidFill>
               </a:rPr>
               <a:t>Webサーバ</a:t>
@@ -8573,7 +8877,7 @@
             <a:r>
               <a:rPr lang="en-US" sz="1200" dirty="0">
                 <a:solidFill>
-                  <a:schemeClr val="tx1"/>
+                  <a:srgbClr val="1F2933"/>
                 </a:solidFill>
               </a:rPr>
               <a:t>Tomcat</a:t>
@@ -8587,7 +8891,7 @@
             <a:r>
               <a:rPr lang="en-US" sz="1200" dirty="0">
                 <a:solidFill>
-                  <a:schemeClr val="tx1"/>
+                  <a:srgbClr val="1F2933"/>
                 </a:solidFill>
               </a:rPr>
               <a:t>Servlet / JSP</a:t>
@@ -8675,7 +8979,7 @@
             <a:r>
               <a:rPr lang="en-US" sz="1500" b="1" dirty="0">
                 <a:solidFill>
-                  <a:schemeClr val="tx2"/>
+                  <a:srgbClr val="0B3C49"/>
                 </a:solidFill>
               </a:rPr>
               <a:t>DBサーバ</a:t>
@@ -8711,7 +9015,7 @@
             <a:r>
               <a:rPr lang="en-US" sz="1200" dirty="0">
                 <a:solidFill>
-                  <a:schemeClr val="tx1"/>
+                  <a:srgbClr val="1F2933"/>
                 </a:solidFill>
               </a:rPr>
               <a:t>MySQL</a:t>
@@ -8725,7 +9029,7 @@
             <a:r>
               <a:rPr lang="en-US" sz="1200" dirty="0">
                 <a:solidFill>
-                  <a:schemeClr val="tx1"/>
+                  <a:srgbClr val="1F2933"/>
                 </a:solidFill>
               </a:rPr>
               <a:t>emp_sys_db</a:t>
@@ -8788,7 +9092,7 @@
             <a:r>
               <a:rPr lang="en-US" sz="1400" b="1" dirty="0">
                 <a:solidFill>
-                  <a:schemeClr val="accent1"/>
+                  <a:srgbClr val="0F7C8C"/>
                 </a:solidFill>
               </a:rPr>
               <a:t>目的・利用者</a:t>
@@ -8828,7 +9132,7 @@
             <a:r>
               <a:rPr lang="en-US" sz="1200" dirty="0">
                 <a:solidFill>
-                  <a:schemeClr val="tx1"/>
+                  <a:srgbClr val="1F2933"/>
                 </a:solidFill>
               </a:rPr>
               <a:t>利用者：従業員情報を業務で扱う総務部の社員</a:t>
@@ -8846,7 +9150,7 @@
             <a:r>
               <a:rPr lang="en-US" sz="1200" dirty="0">
                 <a:solidFill>
-                  <a:schemeClr val="tx1"/>
+                  <a:srgbClr val="1F2933"/>
                 </a:solidFill>
               </a:rPr>
               <a:t>入退社のたびに発生する従業員情報の登録・削除を、ブラウザから行えるようにする</a:t>
@@ -8864,7 +9168,7 @@
             <a:r>
               <a:rPr lang="en-US" sz="1200" dirty="0">
                 <a:solidFill>
-                  <a:schemeClr val="tx1"/>
+                  <a:srgbClr val="1F2933"/>
                 </a:solidFill>
               </a:rPr>
               <a:t>ログインした利用者だけが操作できる</a:t>
@@ -8927,7 +9231,7 @@
             <a:r>
               <a:rPr lang="en-US" sz="1400" b="1" dirty="0">
                 <a:solidFill>
-                  <a:schemeClr val="accent1"/>
+                  <a:srgbClr val="0F7C8C"/>
                 </a:solidFill>
               </a:rPr>
               <a:t>管理するデータ（3テーブル）</a:t>
@@ -8967,7 +9271,7 @@
             <a:r>
               <a:rPr lang="en-US" sz="1200" dirty="0">
                 <a:solidFill>
-                  <a:schemeClr val="tx1"/>
+                  <a:srgbClr val="1F2933"/>
                 </a:solidFill>
               </a:rPr>
               <a:t>employee：従業員マスタ（コード・氏名・フリガナ・性別・生年月日・所属・入社日）</a:t>
@@ -8985,7 +9289,7 @@
             <a:r>
               <a:rPr lang="en-US" sz="1200" dirty="0">
                 <a:solidFill>
-                  <a:schemeClr val="tx1"/>
+                  <a:srgbClr val="1F2933"/>
                 </a:solidFill>
               </a:rPr>
               <a:t>section：所属マスタ（所属コード・部署名）</a:t>
@@ -9003,7 +9307,7 @@
             <a:r>
               <a:rPr lang="en-US" sz="1200" dirty="0">
                 <a:solidFill>
-                  <a:schemeClr val="tx1"/>
+                  <a:srgbClr val="1F2933"/>
                 </a:solidFill>
               </a:rPr>
               <a:t>user：ユーザマスタ（ユーザID・パスワード）</a:t>
@@ -9111,7 +9415,7 @@
             <a:r>
               <a:rPr lang="en-US" sz="2400" b="1" dirty="0">
                 <a:solidFill>
-                  <a:schemeClr val="tx2"/>
+                  <a:srgbClr val="0B3C49"/>
                 </a:solidFill>
               </a:rPr>
               <a:t>機能一覧と画面遷移</a:t>
@@ -9122,7 +9426,7 @@
       </p:sp>
       <p:sp>
         <p:nvSpPr>
-          <p:cNvPr id="3" name="時間・担当タグ"/>
+          <p:cNvPr id="3" name="担当タグ"/>
           <p:cNvSpPr txBox="1"/>
           <p:nvPr/>
         </p:nvSpPr>
@@ -9155,10 +9459,21 @@
             <a:r>
               <a:rPr lang="en-US" sz="1100" b="1" dirty="0">
                 <a:solidFill>
-                  <a:schemeClr val="accent2"/>
-                </a:solidFill>
-              </a:rPr>
-              <a:t>担当：【記入】</a:t>
+                  <a:srgbClr val="C2410C"/>
+                </a:solidFill>
+              </a:rPr>
+              <a:t>担当：</a:t>
+            </a:r>
+            <a:pPr algn="ctr" indent="0" marL="0">
+              <a:buNone/>
+            </a:pPr>
+            <a:r>
+              <a:rPr lang="en-US" sz="1100" b="1" i="1" dirty="0">
+                <a:solidFill>
+                  <a:srgbClr val="C2410C"/>
+                </a:solidFill>
+              </a:rPr>
+              <a:t>【記入】</a:t>
             </a:r>
             <a:endParaRPr lang="en-US" sz="1100" dirty="0"/>
           </a:p>
@@ -9191,7 +9506,7 @@
             <a:r>
               <a:rPr lang="en-US" sz="1300" dirty="0">
                 <a:solidFill>
-                  <a:schemeClr val="accent6"/>
+                  <a:srgbClr val="64748B"/>
                 </a:solidFill>
               </a:rPr>
               <a:t>必須機能5つ＋追加課題。ログイン後はメニュー画面から各機能へ遷移します</a:t>
@@ -9229,7 +9544,7 @@
             <a:r>
               <a:rPr lang="en-US" sz="1300" b="1" dirty="0">
                 <a:solidFill>
-                  <a:schemeClr val="bg1"/>
+                  <a:srgbClr val="FFFFFF"/>
                 </a:solidFill>
               </a:rPr>
               <a:t>1</a:t>
@@ -9265,7 +9580,7 @@
             <a:r>
               <a:rPr lang="en-US" sz="1400" b="1" dirty="0">
                 <a:solidFill>
-                  <a:schemeClr val="tx2"/>
+                  <a:srgbClr val="0B3C49"/>
                 </a:solidFill>
               </a:rPr>
               <a:t>ログイン</a:t>
@@ -9301,7 +9616,7 @@
             <a:r>
               <a:rPr lang="en-US" sz="1200" dirty="0">
                 <a:solidFill>
-                  <a:schemeClr val="tx1"/>
+                  <a:srgbClr val="1F2933"/>
                 </a:solidFill>
               </a:rPr>
               <a:t>ユーザID・パスワードで認証。成功→メニュー、失敗→エラー画面</a:t>
@@ -9341,7 +9656,7 @@
             <a:r>
               <a:rPr lang="en-US" sz="1100" b="1" dirty="0">
                 <a:solidFill>
-                  <a:schemeClr val="bg1"/>
+                  <a:srgbClr val="FFFFFF"/>
                 </a:solidFill>
               </a:rPr>
               <a:t>必須</a:t>
@@ -9379,7 +9694,7 @@
             <a:r>
               <a:rPr lang="en-US" sz="1300" b="1" dirty="0">
                 <a:solidFill>
-                  <a:schemeClr val="bg1"/>
+                  <a:srgbClr val="FFFFFF"/>
                 </a:solidFill>
               </a:rPr>
               <a:t>2</a:t>
@@ -9415,7 +9730,7 @@
             <a:r>
               <a:rPr lang="en-US" sz="1400" b="1" dirty="0">
                 <a:solidFill>
-                  <a:schemeClr val="tx2"/>
+                  <a:srgbClr val="0B3C49"/>
                 </a:solidFill>
               </a:rPr>
               <a:t>従業員一覧表示</a:t>
@@ -9451,7 +9766,7 @@
             <a:r>
               <a:rPr lang="en-US" sz="1200" dirty="0">
                 <a:solidFill>
-                  <a:schemeClr val="tx1"/>
+                  <a:srgbClr val="1F2933"/>
                 </a:solidFill>
               </a:rPr>
               <a:t>全従業員を表形式で表示（従業員コード昇順）</a:t>
@@ -9491,7 +9806,7 @@
             <a:r>
               <a:rPr lang="en-US" sz="1100" b="1" dirty="0">
                 <a:solidFill>
-                  <a:schemeClr val="bg1"/>
+                  <a:srgbClr val="FFFFFF"/>
                 </a:solidFill>
               </a:rPr>
               <a:t>必須</a:t>
@@ -9529,7 +9844,7 @@
             <a:r>
               <a:rPr lang="en-US" sz="1300" b="1" dirty="0">
                 <a:solidFill>
-                  <a:schemeClr val="bg1"/>
+                  <a:srgbClr val="FFFFFF"/>
                 </a:solidFill>
               </a:rPr>
               <a:t>3</a:t>
@@ -9565,7 +9880,7 @@
             <a:r>
               <a:rPr lang="en-US" sz="1400" b="1" dirty="0">
                 <a:solidFill>
-                  <a:schemeClr val="tx2"/>
+                  <a:srgbClr val="0B3C49"/>
                 </a:solidFill>
               </a:rPr>
               <a:t>従業員情報登録</a:t>
@@ -9601,7 +9916,7 @@
             <a:r>
               <a:rPr lang="en-US" sz="1200" dirty="0">
                 <a:solidFill>
-                  <a:schemeClr val="tx1"/>
+                  <a:srgbClr val="1F2933"/>
                 </a:solidFill>
               </a:rPr>
               <a:t>性別・所属はプルダウン、日付はカレンダーで入力</a:t>
@@ -9641,7 +9956,7 @@
             <a:r>
               <a:rPr lang="en-US" sz="1100" b="1" dirty="0">
                 <a:solidFill>
-                  <a:schemeClr val="bg1"/>
+                  <a:srgbClr val="FFFFFF"/>
                 </a:solidFill>
               </a:rPr>
               <a:t>必須</a:t>
@@ -9679,7 +9994,7 @@
             <a:r>
               <a:rPr lang="en-US" sz="1300" b="1" dirty="0">
                 <a:solidFill>
-                  <a:schemeClr val="bg1"/>
+                  <a:srgbClr val="FFFFFF"/>
                 </a:solidFill>
               </a:rPr>
               <a:t>4</a:t>
@@ -9715,7 +10030,7 @@
             <a:r>
               <a:rPr lang="en-US" sz="1400" b="1" dirty="0">
                 <a:solidFill>
-                  <a:schemeClr val="tx2"/>
+                  <a:srgbClr val="0B3C49"/>
                 </a:solidFill>
               </a:rPr>
               <a:t>従業員情報削除</a:t>
@@ -9751,7 +10066,7 @@
             <a:r>
               <a:rPr lang="en-US" sz="1200" dirty="0">
                 <a:solidFill>
-                  <a:schemeClr val="tx1"/>
+                  <a:srgbClr val="1F2933"/>
                 </a:solidFill>
               </a:rPr>
               <a:t>一覧で選択→確認ダイアログ→削除完了画面</a:t>
@@ -9791,7 +10106,7 @@
             <a:r>
               <a:rPr lang="en-US" sz="1100" b="1" dirty="0">
                 <a:solidFill>
-                  <a:schemeClr val="bg1"/>
+                  <a:srgbClr val="FFFFFF"/>
                 </a:solidFill>
               </a:rPr>
               <a:t>必須</a:t>
@@ -9829,7 +10144,7 @@
             <a:r>
               <a:rPr lang="en-US" sz="1300" b="1" dirty="0">
                 <a:solidFill>
-                  <a:schemeClr val="bg1"/>
+                  <a:srgbClr val="FFFFFF"/>
                 </a:solidFill>
               </a:rPr>
               <a:t>5</a:t>
@@ -9865,7 +10180,7 @@
             <a:r>
               <a:rPr lang="en-US" sz="1400" b="1" dirty="0">
                 <a:solidFill>
-                  <a:schemeClr val="tx2"/>
+                  <a:srgbClr val="0B3C49"/>
                 </a:solidFill>
               </a:rPr>
               <a:t>ログアウト</a:t>
@@ -9901,7 +10216,7 @@
             <a:r>
               <a:rPr lang="en-US" sz="1200" dirty="0">
                 <a:solidFill>
-                  <a:schemeClr val="tx1"/>
+                  <a:srgbClr val="1F2933"/>
                 </a:solidFill>
               </a:rPr>
               <a:t>セッションを破棄しログアウト画面を表示</a:t>
@@ -9941,7 +10256,7 @@
             <a:r>
               <a:rPr lang="en-US" sz="1100" b="1" dirty="0">
                 <a:solidFill>
-                  <a:schemeClr val="bg1"/>
+                  <a:srgbClr val="FFFFFF"/>
                 </a:solidFill>
               </a:rPr>
               <a:t>必須</a:t>
@@ -9979,7 +10294,7 @@
             <a:r>
               <a:rPr lang="en-US" sz="1300" b="1" dirty="0">
                 <a:solidFill>
-                  <a:schemeClr val="bg1"/>
+                  <a:srgbClr val="FFFFFF"/>
                 </a:solidFill>
               </a:rPr>
               <a:t>6</a:t>
@@ -10015,7 +10330,7 @@
             <a:r>
               <a:rPr lang="en-US" sz="1400" b="1" dirty="0">
                 <a:solidFill>
-                  <a:schemeClr val="tx2"/>
+                  <a:srgbClr val="0B3C49"/>
                 </a:solidFill>
               </a:rPr>
               <a:t>従業員情報更新</a:t>
@@ -10051,7 +10366,7 @@
             <a:r>
               <a:rPr lang="en-US" sz="1200" dirty="0">
                 <a:solidFill>
-                  <a:schemeClr val="tx1"/>
+                  <a:srgbClr val="1F2933"/>
                 </a:solidFill>
               </a:rPr>
               <a:t>一覧で選択した従業員を初期表示して更新（コードは変更不可）</a:t>
@@ -10091,7 +10406,7 @@
             <a:r>
               <a:rPr lang="en-US" sz="1100" b="1" dirty="0">
                 <a:solidFill>
-                  <a:schemeClr val="bg1"/>
+                  <a:srgbClr val="FFFFFF"/>
                 </a:solidFill>
               </a:rPr>
               <a:t>追加</a:t>
@@ -10129,7 +10444,7 @@
             <a:r>
               <a:rPr lang="en-US" sz="1300" b="1" dirty="0">
                 <a:solidFill>
-                  <a:schemeClr val="bg1"/>
+                  <a:srgbClr val="FFFFFF"/>
                 </a:solidFill>
               </a:rPr>
               <a:t>7</a:t>
@@ -10165,7 +10480,7 @@
             <a:r>
               <a:rPr lang="en-US" sz="1400" b="1" dirty="0">
                 <a:solidFill>
-                  <a:schemeClr val="tx2"/>
+                  <a:srgbClr val="0B3C49"/>
                 </a:solidFill>
               </a:rPr>
               <a:t>ユーザ情報登録</a:t>
@@ -10201,7 +10516,7 @@
             <a:r>
               <a:rPr lang="en-US" sz="1200" dirty="0">
                 <a:solidFill>
-                  <a:schemeClr val="tx1"/>
+                  <a:srgbClr val="1F2933"/>
                 </a:solidFill>
               </a:rPr>
               <a:t>システム利用者（ユーザID・パスワード）を登録</a:t>
@@ -10241,7 +10556,7 @@
             <a:r>
               <a:rPr lang="en-US" sz="1100" b="1" dirty="0">
                 <a:solidFill>
-                  <a:schemeClr val="bg1"/>
+                  <a:srgbClr val="FFFFFF"/>
                 </a:solidFill>
               </a:rPr>
               <a:t>追加</a:t>
@@ -10349,7 +10664,7 @@
             <a:r>
               <a:rPr lang="en-US" sz="2400" b="1" dirty="0">
                 <a:solidFill>
-                  <a:schemeClr val="tx2"/>
+                  <a:srgbClr val="0B3C49"/>
                 </a:solidFill>
               </a:rPr>
               <a:t>開発環境とプログラム構成</a:t>
@@ -10360,7 +10675,7 @@
       </p:sp>
       <p:sp>
         <p:nvSpPr>
-          <p:cNvPr id="3" name="時間・担当タグ"/>
+          <p:cNvPr id="3" name="担当タグ"/>
           <p:cNvSpPr txBox="1"/>
           <p:nvPr/>
         </p:nvSpPr>
@@ -10393,10 +10708,21 @@
             <a:r>
               <a:rPr lang="en-US" sz="1100" b="1" dirty="0">
                 <a:solidFill>
-                  <a:schemeClr val="accent2"/>
-                </a:solidFill>
-              </a:rPr>
-              <a:t>担当：【記入】</a:t>
+                  <a:srgbClr val="C2410C"/>
+                </a:solidFill>
+              </a:rPr>
+              <a:t>担当：</a:t>
+            </a:r>
+            <a:pPr algn="ctr" indent="0" marL="0">
+              <a:buNone/>
+            </a:pPr>
+            <a:r>
+              <a:rPr lang="en-US" sz="1100" b="1" i="1" dirty="0">
+                <a:solidFill>
+                  <a:srgbClr val="C2410C"/>
+                </a:solidFill>
+              </a:rPr>
+              <a:t>【記入】</a:t>
             </a:r>
             <a:endParaRPr lang="en-US" sz="1100" dirty="0"/>
           </a:p>
@@ -10429,7 +10755,7 @@
             <a:r>
               <a:rPr lang="en-US" sz="1300" dirty="0">
                 <a:solidFill>
-                  <a:schemeClr val="accent6"/>
+                  <a:srgbClr val="64748B"/>
                 </a:solidFill>
               </a:rPr>
               <a:t>Servlet（受付）→ Logic（処理）→ DAO（DB操作）の3層に分けて実装</a:t>
@@ -10476,7 +10802,7 @@
                       <a:r>
                         <a:rPr lang="en-US" sz="1200" b="1" dirty="0">
                           <a:solidFill>
-                            <a:schemeClr val="tx2"/>
+                            <a:srgbClr val="0B3C49"/>
                           </a:solidFill>
                         </a:rPr>
                         <a:t>言語</a:t>
@@ -10597,7 +10923,7 @@
                       <a:r>
                         <a:rPr lang="en-US" sz="1200" b="1" dirty="0">
                           <a:solidFill>
-                            <a:schemeClr val="tx2"/>
+                            <a:srgbClr val="0B3C49"/>
                           </a:solidFill>
                         </a:rPr>
                         <a:t>IDE</a:t>
@@ -10718,7 +11044,7 @@
                       <a:r>
                         <a:rPr lang="en-US" sz="1200" b="1" dirty="0">
                           <a:solidFill>
-                            <a:schemeClr val="tx2"/>
+                            <a:srgbClr val="0B3C49"/>
                           </a:solidFill>
                         </a:rPr>
                         <a:t>APサーバ</a:t>
@@ -10839,7 +11165,7 @@
                       <a:r>
                         <a:rPr lang="en-US" sz="1200" b="1" dirty="0">
                           <a:solidFill>
-                            <a:schemeClr val="tx2"/>
+                            <a:srgbClr val="0B3C49"/>
                           </a:solidFill>
                         </a:rPr>
                         <a:t>DB</a:t>
@@ -10960,7 +11286,7 @@
                       <a:r>
                         <a:rPr lang="en-US" sz="1200" b="1" dirty="0">
                           <a:solidFill>
-                            <a:schemeClr val="tx2"/>
+                            <a:srgbClr val="0B3C49"/>
                           </a:solidFill>
                         </a:rPr>
                         <a:t>JDBC</a:t>
@@ -11081,7 +11407,7 @@
                       <a:r>
                         <a:rPr lang="en-US" sz="1200" b="1" dirty="0">
                           <a:solidFill>
-                            <a:schemeClr val="tx2"/>
+                            <a:srgbClr val="0B3C49"/>
                           </a:solidFill>
                         </a:rPr>
                         <a:t>画面</a:t>
@@ -11196,43 +11522,7 @@
       </p:graphicFrame>
       <p:sp>
         <p:nvSpPr>
-          <p:cNvPr id="6" name="環境注記"/>
-          <p:cNvSpPr txBox="1"/>
-          <p:nvPr/>
-        </p:nvSpPr>
-        <p:spPr>
-          <a:xfrm>
-            <a:off x="457200" y="3749040"/>
-            <a:ext cx="3291840" cy="457200"/>
-          </a:xfrm>
-          <a:prstGeom prst="rect">
-            <a:avLst/>
-          </a:prstGeom>
-          <a:noFill/>
-          <a:ln/>
-        </p:spPr>
-        <p:txBody>
-          <a:bodyPr wrap="square" lIns="0" tIns="0" rIns="0" bIns="0" rtlCol="0" anchor="t"/>
-          <a:lstStyle/>
-          <a:p>
-            <a:pPr indent="0" marL="0">
-              <a:buNone/>
-            </a:pPr>
-            <a:r>
-              <a:rPr lang="en-US" sz="1000" dirty="0">
-                <a:solidFill>
-                  <a:schemeClr val="accent6"/>
-                </a:solidFill>
-              </a:rPr>
-              <a:t>※要件定義書の指定（JDK 8以降・Tomcat 9・MySQL）より新しい版で構築</a:t>
-            </a:r>
-            <a:endParaRPr lang="en-US" sz="1000" dirty="0"/>
-          </a:p>
-        </p:txBody>
-      </p:sp>
-      <p:sp>
-        <p:nvSpPr>
-          <p:cNvPr id="7" name="層_servlet"/>
+          <p:cNvPr id="6" name="層_servlet"/>
           <p:cNvSpPr/>
           <p:nvPr/>
         </p:nvSpPr>
@@ -11259,7 +11549,7 @@
       </p:sp>
       <p:sp>
         <p:nvSpPr>
-          <p:cNvPr id="8" name="層名_servlet"/>
+          <p:cNvPr id="7" name="層名_servlet"/>
           <p:cNvSpPr txBox="1"/>
           <p:nvPr/>
         </p:nvSpPr>
@@ -11288,7 +11578,7 @@
             <a:r>
               <a:rPr lang="en-US" sz="1200" b="1" dirty="0">
                 <a:solidFill>
-                  <a:schemeClr val="bg1"/>
+                  <a:srgbClr val="FFFFFF"/>
                 </a:solidFill>
               </a:rPr>
               <a:t>servlet</a:t>
@@ -11299,7 +11589,7 @@
       </p:sp>
       <p:sp>
         <p:nvSpPr>
-          <p:cNvPr id="9" name="層説明_servlet"/>
+          <p:cNvPr id="8" name="層説明_servlet"/>
           <p:cNvSpPr txBox="1"/>
           <p:nvPr/>
         </p:nvSpPr>
@@ -11324,7 +11614,7 @@
             <a:r>
               <a:rPr lang="en-US" sz="1200" b="1" dirty="0">
                 <a:solidFill>
-                  <a:schemeClr val="tx2"/>
+                  <a:srgbClr val="0B3C49"/>
                 </a:solidFill>
               </a:rPr>
               <a:t>画面からの要求を受け付け、JSPへ振り分け</a:t>
@@ -11335,7 +11625,7 @@
       </p:sp>
       <p:sp>
         <p:nvSpPr>
-          <p:cNvPr id="10" name="層クラス_servlet"/>
+          <p:cNvPr id="9" name="層クラス_servlet"/>
           <p:cNvSpPr txBox="1"/>
           <p:nvPr/>
         </p:nvSpPr>
@@ -11360,7 +11650,7 @@
             <a:r>
               <a:rPr lang="en-US" sz="1000" dirty="0">
                 <a:solidFill>
-                  <a:schemeClr val="accent6"/>
+                  <a:srgbClr val="64748B"/>
                 </a:solidFill>
               </a:rPr>
               <a:t>Login / Logout / AdminMenu / EmployeeList / EmployeeCreate / EmployeeDelete / EmployeeEdit …</a:t>
@@ -11371,7 +11661,7 @@
       </p:sp>
       <p:sp>
         <p:nvSpPr>
-          <p:cNvPr id="11" name="層_model"/>
+          <p:cNvPr id="10" name="層_model"/>
           <p:cNvSpPr/>
           <p:nvPr/>
         </p:nvSpPr>
@@ -11398,7 +11688,7 @@
       </p:sp>
       <p:sp>
         <p:nvSpPr>
-          <p:cNvPr id="12" name="層名_model"/>
+          <p:cNvPr id="11" name="層名_model"/>
           <p:cNvSpPr txBox="1"/>
           <p:nvPr/>
         </p:nvSpPr>
@@ -11427,7 +11717,7 @@
             <a:r>
               <a:rPr lang="en-US" sz="1200" b="1" dirty="0">
                 <a:solidFill>
-                  <a:schemeClr val="bg1"/>
+                  <a:srgbClr val="FFFFFF"/>
                 </a:solidFill>
               </a:rPr>
               <a:t>model</a:t>
@@ -11438,7 +11728,7 @@
       </p:sp>
       <p:sp>
         <p:nvSpPr>
-          <p:cNvPr id="13" name="層説明_model"/>
+          <p:cNvPr id="12" name="層説明_model"/>
           <p:cNvSpPr txBox="1"/>
           <p:nvPr/>
         </p:nvSpPr>
@@ -11463,7 +11753,7 @@
             <a:r>
               <a:rPr lang="en-US" sz="1200" b="1" dirty="0">
                 <a:solidFill>
-                  <a:schemeClr val="tx2"/>
+                  <a:srgbClr val="0B3C49"/>
                 </a:solidFill>
               </a:rPr>
               <a:t>業務ロジックとデータの入れ物</a:t>
@@ -11474,7 +11764,7 @@
       </p:sp>
       <p:sp>
         <p:nvSpPr>
-          <p:cNvPr id="14" name="層クラス_model"/>
+          <p:cNvPr id="13" name="層クラス_model"/>
           <p:cNvSpPr txBox="1"/>
           <p:nvPr/>
         </p:nvSpPr>
@@ -11499,7 +11789,7 @@
             <a:r>
               <a:rPr lang="en-US" sz="1000" dirty="0">
                 <a:solidFill>
-                  <a:schemeClr val="accent6"/>
+                  <a:srgbClr val="64748B"/>
                 </a:solidFill>
               </a:rPr>
               <a:t>LoginLogic / EmployeeListLogic / EmployeeCreateLogic …</a:t>
@@ -11513,7 +11803,7 @@
             <a:r>
               <a:rPr lang="en-US" sz="1000" dirty="0">
                 <a:solidFill>
-                  <a:schemeClr val="accent6"/>
+                  <a:srgbClr val="64748B"/>
                 </a:solidFill>
               </a:rPr>
               <a:t>Employee / Section / User</a:t>
@@ -11524,7 +11814,7 @@
       </p:sp>
       <p:sp>
         <p:nvSpPr>
-          <p:cNvPr id="15" name="層_dao"/>
+          <p:cNvPr id="14" name="層_dao"/>
           <p:cNvSpPr/>
           <p:nvPr/>
         </p:nvSpPr>
@@ -11551,7 +11841,7 @@
       </p:sp>
       <p:sp>
         <p:nvSpPr>
-          <p:cNvPr id="16" name="層名_dao"/>
+          <p:cNvPr id="15" name="層名_dao"/>
           <p:cNvSpPr txBox="1"/>
           <p:nvPr/>
         </p:nvSpPr>
@@ -11580,7 +11870,7 @@
             <a:r>
               <a:rPr lang="en-US" sz="1200" b="1" dirty="0">
                 <a:solidFill>
-                  <a:schemeClr val="bg1"/>
+                  <a:srgbClr val="FFFFFF"/>
                 </a:solidFill>
               </a:rPr>
               <a:t>dao</a:t>
@@ -11591,7 +11881,7 @@
       </p:sp>
       <p:sp>
         <p:nvSpPr>
-          <p:cNvPr id="17" name="層説明_dao"/>
+          <p:cNvPr id="16" name="層説明_dao"/>
           <p:cNvSpPr txBox="1"/>
           <p:nvPr/>
         </p:nvSpPr>
@@ -11616,7 +11906,7 @@
             <a:r>
               <a:rPr lang="en-US" sz="1200" b="1" dirty="0">
                 <a:solidFill>
-                  <a:schemeClr val="tx2"/>
+                  <a:srgbClr val="0B3C49"/>
                 </a:solidFill>
               </a:rPr>
               <a:t>SQLを発行してDBを操作</a:t>
@@ -11627,7 +11917,7 @@
       </p:sp>
       <p:sp>
         <p:nvSpPr>
-          <p:cNvPr id="18" name="層クラス_dao"/>
+          <p:cNvPr id="17" name="層クラス_dao"/>
           <p:cNvSpPr txBox="1"/>
           <p:nvPr/>
         </p:nvSpPr>
@@ -11652,7 +11942,7 @@
             <a:r>
               <a:rPr lang="en-US" sz="1000" dirty="0">
                 <a:solidFill>
-                  <a:schemeClr val="accent6"/>
+                  <a:srgbClr val="64748B"/>
                 </a:solidFill>
               </a:rPr>
               <a:t>UserDAO / SectionDAO / EmployeeDAO</a:t>
@@ -11760,7 +12050,7 @@
             <a:r>
               <a:rPr lang="en-US" sz="2400" b="1" dirty="0">
                 <a:solidFill>
-                  <a:schemeClr val="tx2"/>
+                  <a:srgbClr val="0B3C49"/>
                 </a:solidFill>
               </a:rPr>
               <a:t>開発の進め方（全30コマ）</a:t>
@@ -11771,7 +12061,7 @@
       </p:sp>
       <p:sp>
         <p:nvSpPr>
-          <p:cNvPr id="3" name="時間・担当タグ"/>
+          <p:cNvPr id="3" name="担当タグ"/>
           <p:cNvSpPr txBox="1"/>
           <p:nvPr/>
         </p:nvSpPr>
@@ -11804,10 +12094,21 @@
             <a:r>
               <a:rPr lang="en-US" sz="1100" b="1" dirty="0">
                 <a:solidFill>
-                  <a:schemeClr val="accent2"/>
-                </a:solidFill>
-              </a:rPr>
-              <a:t>担当：【記入】</a:t>
+                  <a:srgbClr val="C2410C"/>
+                </a:solidFill>
+              </a:rPr>
+              <a:t>担当：</a:t>
+            </a:r>
+            <a:pPr algn="ctr" indent="0" marL="0">
+              <a:buNone/>
+            </a:pPr>
+            <a:r>
+              <a:rPr lang="en-US" sz="1100" b="1" i="1" dirty="0">
+                <a:solidFill>
+                  <a:srgbClr val="C2410C"/>
+                </a:solidFill>
+              </a:rPr>
+              <a:t>【記入】</a:t>
             </a:r>
             <a:endParaRPr lang="en-US" sz="1100" dirty="0"/>
           </a:p>
@@ -11840,7 +12141,7 @@
             <a:r>
               <a:rPr lang="en-US" sz="1300" dirty="0">
                 <a:solidFill>
-                  <a:schemeClr val="accent6"/>
+                  <a:srgbClr val="64748B"/>
                 </a:solidFill>
               </a:rPr>
               <a:t>要求分析から成果発表まで、WBSで進捗を管理しながら進めました</a:t>
@@ -11882,7 +12183,7 @@
             <a:r>
               <a:rPr lang="en-US" sz="1300" b="1" dirty="0">
                 <a:solidFill>
-                  <a:schemeClr val="bg1"/>
+                  <a:srgbClr val="FFFFFF"/>
                 </a:solidFill>
               </a:rPr>
               <a:t>準備</a:t>
@@ -11896,7 +12197,7 @@
             <a:r>
               <a:rPr lang="en-US" sz="1000" dirty="0">
                 <a:solidFill>
-                  <a:schemeClr val="bg1"/>
+                  <a:srgbClr val="FFFFFF"/>
                 </a:solidFill>
               </a:rPr>
               <a:t>1〜2コマ</a:t>
@@ -11938,7 +12239,7 @@
             <a:r>
               <a:rPr lang="en-US" sz="1300" b="1" dirty="0">
                 <a:solidFill>
-                  <a:schemeClr val="bg1"/>
+                  <a:srgbClr val="FFFFFF"/>
                 </a:solidFill>
               </a:rPr>
               <a:t>要求分析</a:t>
@@ -11952,7 +12253,7 @@
             <a:r>
               <a:rPr lang="en-US" sz="1000" dirty="0">
                 <a:solidFill>
-                  <a:schemeClr val="bg1"/>
+                  <a:srgbClr val="FFFFFF"/>
                 </a:solidFill>
               </a:rPr>
               <a:t>3〜5コマ</a:t>
@@ -11994,7 +12295,7 @@
             <a:r>
               <a:rPr lang="en-US" sz="1300" b="1" dirty="0">
                 <a:solidFill>
-                  <a:schemeClr val="bg1"/>
+                  <a:srgbClr val="FFFFFF"/>
                 </a:solidFill>
               </a:rPr>
               <a:t>設計</a:t>
@@ -12008,7 +12309,7 @@
             <a:r>
               <a:rPr lang="en-US" sz="1000" dirty="0">
                 <a:solidFill>
-                  <a:schemeClr val="bg1"/>
+                  <a:srgbClr val="FFFFFF"/>
                 </a:solidFill>
               </a:rPr>
               <a:t>6〜10コマ</a:t>
@@ -12050,7 +12351,7 @@
             <a:r>
               <a:rPr lang="en-US" sz="1300" b="1" dirty="0">
                 <a:solidFill>
-                  <a:schemeClr val="bg1"/>
+                  <a:srgbClr val="FFFFFF"/>
                 </a:solidFill>
               </a:rPr>
               <a:t>実装</a:t>
@@ -12064,7 +12365,7 @@
             <a:r>
               <a:rPr lang="en-US" sz="1000" dirty="0">
                 <a:solidFill>
-                  <a:schemeClr val="bg1"/>
+                  <a:srgbClr val="FFFFFF"/>
                 </a:solidFill>
               </a:rPr>
               <a:t>11〜20コマ</a:t>
@@ -12106,7 +12407,7 @@
             <a:r>
               <a:rPr lang="en-US" sz="1300" b="1" dirty="0">
                 <a:solidFill>
-                  <a:schemeClr val="bg1"/>
+                  <a:srgbClr val="FFFFFF"/>
                 </a:solidFill>
               </a:rPr>
               <a:t>テスト</a:t>
@@ -12120,7 +12421,7 @@
             <a:r>
               <a:rPr lang="en-US" sz="1000" dirty="0">
                 <a:solidFill>
-                  <a:schemeClr val="bg1"/>
+                  <a:srgbClr val="FFFFFF"/>
                 </a:solidFill>
               </a:rPr>
               <a:t>21〜25コマ</a:t>
@@ -12162,7 +12463,7 @@
             <a:r>
               <a:rPr lang="en-US" sz="1300" b="1" dirty="0">
                 <a:solidFill>
-                  <a:schemeClr val="bg1"/>
+                  <a:srgbClr val="FFFFFF"/>
                 </a:solidFill>
               </a:rPr>
               <a:t>納品</a:t>
@@ -12176,7 +12477,7 @@
             <a:r>
               <a:rPr lang="en-US" sz="1000" dirty="0">
                 <a:solidFill>
-                  <a:schemeClr val="bg1"/>
+                  <a:srgbClr val="FFFFFF"/>
                 </a:solidFill>
               </a:rPr>
               <a:t>26コマ</a:t>
@@ -12218,7 +12519,7 @@
             <a:r>
               <a:rPr lang="en-US" sz="1300" b="1" dirty="0">
                 <a:solidFill>
-                  <a:schemeClr val="bg1"/>
+                  <a:srgbClr val="FFFFFF"/>
                 </a:solidFill>
               </a:rPr>
               <a:t>発表</a:t>
@@ -12232,7 +12533,7 @@
             <a:r>
               <a:rPr lang="en-US" sz="1000" dirty="0">
                 <a:solidFill>
-                  <a:schemeClr val="bg1"/>
+                  <a:srgbClr val="FFFFFF"/>
                 </a:solidFill>
               </a:rPr>
               <a:t>27〜30コマ</a:t>
@@ -12295,7 +12596,7 @@
             <a:r>
               <a:rPr lang="en-US" sz="1400" b="1" dirty="0">
                 <a:solidFill>
-                  <a:schemeClr val="accent1"/>
+                  <a:srgbClr val="0F7C8C"/>
                 </a:solidFill>
               </a:rPr>
               <a:t>主な成果物</a:t>
@@ -12335,7 +12636,7 @@
             <a:r>
               <a:rPr lang="en-US" sz="1200" dirty="0">
                 <a:solidFill>
-                  <a:schemeClr val="tx1"/>
+                  <a:srgbClr val="1F2933"/>
                 </a:solidFill>
               </a:rPr>
               <a:t>分析：ユースケース図・画面遷移図</a:t>
@@ -12353,7 +12654,7 @@
             <a:r>
               <a:rPr lang="en-US" sz="1200" dirty="0">
                 <a:solidFill>
-                  <a:schemeClr val="tx1"/>
+                  <a:srgbClr val="1F2933"/>
                 </a:solidFill>
               </a:rPr>
               <a:t>設計：シーケンス図・クラス図・画面設計書</a:t>
@@ -12371,7 +12672,7 @@
             <a:r>
               <a:rPr lang="en-US" sz="1200" dirty="0">
                 <a:solidFill>
-                  <a:schemeClr val="tx1"/>
+                  <a:srgbClr val="1F2933"/>
                 </a:solidFill>
               </a:rPr>
               <a:t>実装：ソースコード・DB作成SQL</a:t>
@@ -12389,7 +12690,7 @@
             <a:r>
               <a:rPr lang="en-US" sz="1200" dirty="0">
                 <a:solidFill>
-                  <a:schemeClr val="tx1"/>
+                  <a:srgbClr val="1F2933"/>
                 </a:solidFill>
               </a:rPr>
               <a:t>テスト：テスト仕様書兼結果報告書</a:t>
@@ -12407,7 +12708,7 @@
             <a:r>
               <a:rPr lang="en-US" sz="1200" dirty="0">
                 <a:solidFill>
-                  <a:schemeClr val="tx1"/>
+                  <a:srgbClr val="1F2933"/>
                 </a:solidFill>
               </a:rPr>
               <a:t>管理：WBS／進捗管理表</a:t>
@@ -12418,66 +12719,86 @@
       </p:sp>
       <p:sp>
         <p:nvSpPr>
-          <p:cNvPr id="15" name="役割分担_見出し"/>
-          <p:cNvSpPr txBox="1"/>
+          <p:cNvPr id="15" name="役割分担_背景"/>
+          <p:cNvSpPr/>
           <p:nvPr/>
         </p:nvSpPr>
         <p:spPr>
           <a:xfrm>
             <a:off x="4663440" y="2606040"/>
-            <a:ext cx="4023360" cy="320040"/>
-          </a:xfrm>
-          <a:prstGeom prst="rect">
-            <a:avLst/>
-          </a:prstGeom>
-          <a:noFill/>
-          <a:ln/>
-        </p:spPr>
-        <p:txBody>
-          <a:bodyPr wrap="square" lIns="0" tIns="0" rIns="0" bIns="0" rtlCol="0" anchor="ctr"/>
-          <a:lstStyle/>
-          <a:p>
-            <a:pPr indent="0" marL="0">
-              <a:buNone/>
-            </a:pPr>
-            <a:r>
-              <a:rPr lang="en-US" sz="1400" b="1" dirty="0">
-                <a:solidFill>
-                  <a:schemeClr val="accent1"/>
-                </a:solidFill>
-              </a:rPr>
-              <a:t>役割分担</a:t>
-            </a:r>
-            <a:endParaRPr lang="en-US" sz="1400" dirty="0"/>
-          </a:p>
-        </p:txBody>
-      </p:sp>
-      <p:sp>
-        <p:nvSpPr>
-          <p:cNvPr id="16" name="役割分担_記入欄"/>
-          <p:cNvSpPr txBox="1"/>
-          <p:nvPr/>
-        </p:nvSpPr>
-        <p:spPr>
-          <a:xfrm>
-            <a:off x="4663440" y="2971800"/>
-            <a:ext cx="4023360" cy="1645920"/>
-          </a:xfrm>
-          <a:prstGeom prst="rect">
-            <a:avLst/>
+            <a:ext cx="4023360" cy="2011680"/>
+          </a:xfrm>
+          <a:prstGeom prst="roundRect">
+            <a:avLst>
+              <a:gd name="adj" fmla="val 3636"/>
+            </a:avLst>
           </a:prstGeom>
           <a:solidFill>
-            <a:srgbClr val="FFFAF6"/>
+            <a:srgbClr val="EEF4F5"/>
           </a:solidFill>
           <a:ln w="12700">
             <a:solidFill>
-              <a:srgbClr val="C2410C"/>
+              <a:srgbClr val="EEF4F5"/>
             </a:solidFill>
-            <a:prstDash val="dash"/>
+            <a:prstDash val="solid"/>
           </a:ln>
         </p:spPr>
-        <p:txBody>
-          <a:bodyPr wrap="square" lIns="1524" tIns="1524" rIns="1524" bIns="1524" rtlCol="0" anchor="t"/>
+      </p:sp>
+      <p:sp>
+        <p:nvSpPr>
+          <p:cNvPr id="16" name="役割分担_見出し"/>
+          <p:cNvSpPr txBox="1"/>
+          <p:nvPr/>
+        </p:nvSpPr>
+        <p:spPr>
+          <a:xfrm>
+            <a:off x="4800600" y="2697480"/>
+            <a:ext cx="3749040" cy="320040"/>
+          </a:xfrm>
+          <a:prstGeom prst="rect">
+            <a:avLst/>
+          </a:prstGeom>
+          <a:noFill/>
+          <a:ln/>
+        </p:spPr>
+        <p:txBody>
+          <a:bodyPr wrap="square" lIns="0" tIns="0" rIns="0" bIns="0" rtlCol="0" anchor="ctr"/>
+          <a:lstStyle/>
+          <a:p>
+            <a:pPr indent="0" marL="0">
+              <a:buNone/>
+            </a:pPr>
+            <a:r>
+              <a:rPr lang="en-US" sz="1400" b="1" dirty="0">
+                <a:solidFill>
+                  <a:srgbClr val="0F7C8C"/>
+                </a:solidFill>
+              </a:rPr>
+              <a:t>役割分担</a:t>
+            </a:r>
+            <a:endParaRPr lang="en-US" sz="1400" dirty="0"/>
+          </a:p>
+        </p:txBody>
+      </p:sp>
+      <p:sp>
+        <p:nvSpPr>
+          <p:cNvPr id="17" name="役割分担_本文"/>
+          <p:cNvSpPr txBox="1"/>
+          <p:nvPr/>
+        </p:nvSpPr>
+        <p:spPr>
+          <a:xfrm>
+            <a:off x="4800600" y="3063240"/>
+            <a:ext cx="3749040" cy="1463040"/>
+          </a:xfrm>
+          <a:prstGeom prst="rect">
+            <a:avLst/>
+          </a:prstGeom>
+          <a:noFill/>
+          <a:ln/>
+        </p:spPr>
+        <p:txBody>
+          <a:bodyPr wrap="square" lIns="0" tIns="0" rIns="0" bIns="0" rtlCol="0" anchor="t"/>
           <a:lstStyle/>
           <a:p>
             <a:pPr indent="0" marL="0">
@@ -12487,16 +12808,13 @@
               <a:buNone/>
             </a:pPr>
             <a:r>
-              <a:rPr lang="en-US" sz="1400" i="1" dirty="0">
-                <a:solidFill>
-                  <a:schemeClr val="accent2"/>
-                </a:solidFill>
-              </a:rPr>
-              <a:t>【記入】氏名1：リーダー／ログイン等</a:t>
-            </a:r>
-            <a:endParaRPr lang="en-US" sz="1400" dirty="0"/>
-          </a:p>
-          <a:p>
+              <a:rPr lang="en-US" sz="1300" b="1" i="1" dirty="0">
+                <a:solidFill>
+                  <a:srgbClr val="C2410C"/>
+                </a:solidFill>
+              </a:rPr>
+              <a:t>【記入】氏名1</a:t>
+            </a:r>
             <a:pPr indent="0" marL="0">
               <a:spcAft>
                 <a:spcPts val="400"/>
@@ -12504,16 +12822,13 @@
               <a:buNone/>
             </a:pPr>
             <a:r>
-              <a:rPr lang="en-US" sz="1400" i="1" dirty="0">
-                <a:solidFill>
-                  <a:schemeClr val="accent2"/>
-                </a:solidFill>
-              </a:rPr>
-              <a:t>【記入】氏名2：従業員一覧・削除</a:t>
-            </a:r>
-            <a:endParaRPr lang="en-US" sz="1400" dirty="0"/>
-          </a:p>
-          <a:p>
+              <a:rPr lang="en-US" sz="1300" dirty="0">
+                <a:solidFill>
+                  <a:srgbClr val="1F2933"/>
+                </a:solidFill>
+              </a:rPr>
+              <a:t>：</a:t>
+            </a:r>
             <a:pPr indent="0" marL="0">
               <a:spcAft>
                 <a:spcPts val="400"/>
@@ -12521,14 +12836,14 @@
               <a:buNone/>
             </a:pPr>
             <a:r>
-              <a:rPr lang="en-US" sz="1400" i="1" dirty="0">
-                <a:solidFill>
-                  <a:schemeClr val="accent2"/>
-                </a:solidFill>
-              </a:rPr>
-              <a:t>【記入】氏名3：従業員登録</a:t>
-            </a:r>
-            <a:endParaRPr lang="en-US" sz="1400" dirty="0"/>
+              <a:rPr lang="en-US" sz="1300" i="1" dirty="0">
+                <a:solidFill>
+                  <a:srgbClr val="C2410C"/>
+                </a:solidFill>
+              </a:rPr>
+              <a:t>【記入】リーダー／ログイン等</a:t>
+            </a:r>
+            <a:endParaRPr lang="en-US" sz="1300" dirty="0"/>
           </a:p>
           <a:p>
             <a:pPr indent="0" marL="0">
@@ -12538,14 +12853,132 @@
               <a:buNone/>
             </a:pPr>
             <a:r>
-              <a:rPr lang="en-US" sz="1400" i="1" dirty="0">
-                <a:solidFill>
-                  <a:schemeClr val="accent2"/>
-                </a:solidFill>
-              </a:rPr>
-              <a:t>【記入】氏名4：追加課題・テスト取りまとめ</a:t>
-            </a:r>
-            <a:endParaRPr lang="en-US" sz="1400" dirty="0"/>
+              <a:rPr lang="en-US" sz="1300" b="1" i="1" dirty="0">
+                <a:solidFill>
+                  <a:srgbClr val="C2410C"/>
+                </a:solidFill>
+              </a:rPr>
+              <a:t>【記入】氏名2</a:t>
+            </a:r>
+            <a:pPr indent="0" marL="0">
+              <a:spcAft>
+                <a:spcPts val="400"/>
+              </a:spcAft>
+              <a:buNone/>
+            </a:pPr>
+            <a:r>
+              <a:rPr lang="en-US" sz="1300" dirty="0">
+                <a:solidFill>
+                  <a:srgbClr val="1F2933"/>
+                </a:solidFill>
+              </a:rPr>
+              <a:t>：</a:t>
+            </a:r>
+            <a:pPr indent="0" marL="0">
+              <a:spcAft>
+                <a:spcPts val="400"/>
+              </a:spcAft>
+              <a:buNone/>
+            </a:pPr>
+            <a:r>
+              <a:rPr lang="en-US" sz="1300" i="1" dirty="0">
+                <a:solidFill>
+                  <a:srgbClr val="C2410C"/>
+                </a:solidFill>
+              </a:rPr>
+              <a:t>【記入】従業員一覧・削除</a:t>
+            </a:r>
+            <a:endParaRPr lang="en-US" sz="1300" dirty="0"/>
+          </a:p>
+          <a:p>
+            <a:pPr indent="0" marL="0">
+              <a:spcAft>
+                <a:spcPts val="400"/>
+              </a:spcAft>
+              <a:buNone/>
+            </a:pPr>
+            <a:r>
+              <a:rPr lang="en-US" sz="1300" b="1" i="1" dirty="0">
+                <a:solidFill>
+                  <a:srgbClr val="C2410C"/>
+                </a:solidFill>
+              </a:rPr>
+              <a:t>【記入】氏名3</a:t>
+            </a:r>
+            <a:pPr indent="0" marL="0">
+              <a:spcAft>
+                <a:spcPts val="400"/>
+              </a:spcAft>
+              <a:buNone/>
+            </a:pPr>
+            <a:r>
+              <a:rPr lang="en-US" sz="1300" dirty="0">
+                <a:solidFill>
+                  <a:srgbClr val="1F2933"/>
+                </a:solidFill>
+              </a:rPr>
+              <a:t>：</a:t>
+            </a:r>
+            <a:pPr indent="0" marL="0">
+              <a:spcAft>
+                <a:spcPts val="400"/>
+              </a:spcAft>
+              <a:buNone/>
+            </a:pPr>
+            <a:r>
+              <a:rPr lang="en-US" sz="1300" i="1" dirty="0">
+                <a:solidFill>
+                  <a:srgbClr val="C2410C"/>
+                </a:solidFill>
+              </a:rPr>
+              <a:t>【記入】従業員登録</a:t>
+            </a:r>
+            <a:endParaRPr lang="en-US" sz="1300" dirty="0"/>
+          </a:p>
+          <a:p>
+            <a:pPr indent="0" marL="0">
+              <a:spcAft>
+                <a:spcPts val="400"/>
+              </a:spcAft>
+              <a:buNone/>
+            </a:pPr>
+            <a:r>
+              <a:rPr lang="en-US" sz="1300" b="1" i="1" dirty="0">
+                <a:solidFill>
+                  <a:srgbClr val="C2410C"/>
+                </a:solidFill>
+              </a:rPr>
+              <a:t>【記入】氏名4</a:t>
+            </a:r>
+            <a:pPr indent="0" marL="0">
+              <a:spcAft>
+                <a:spcPts val="400"/>
+              </a:spcAft>
+              <a:buNone/>
+            </a:pPr>
+            <a:r>
+              <a:rPr lang="en-US" sz="1300" dirty="0">
+                <a:solidFill>
+                  <a:srgbClr val="1F2933"/>
+                </a:solidFill>
+              </a:rPr>
+              <a:t>：</a:t>
+            </a:r>
+            <a:pPr indent="0" marL="0">
+              <a:spcAft>
+                <a:spcPts val="400"/>
+              </a:spcAft>
+              <a:buNone/>
+            </a:pPr>
+            <a:r>
+              <a:rPr lang="en-US" sz="1300" i="1" dirty="0">
+                <a:solidFill>
+                  <a:srgbClr val="C2410C"/>
+                </a:solidFill>
+              </a:rPr>
+              <a:t>【記入】追加課題・テスト取りまとめ</a:t>
+            </a:r>
+            <a:endParaRPr lang="en-US" sz="1300" dirty="0"/>
           </a:p>
         </p:txBody>
       </p:sp>
@@ -12648,7 +13081,7 @@
             <a:r>
               <a:rPr lang="en-US" sz="2400" b="1" dirty="0">
                 <a:solidFill>
-                  <a:schemeClr val="tx2"/>
+                  <a:srgbClr val="0B3C49"/>
                 </a:solidFill>
               </a:rPr>
               <a:t>デモンストレーション：基本ルート</a:t>
@@ -12659,7 +13092,7 @@
       </p:sp>
       <p:sp>
         <p:nvSpPr>
-          <p:cNvPr id="3" name="時間・担当タグ"/>
+          <p:cNvPr id="3" name="担当タグ"/>
           <p:cNvSpPr txBox="1"/>
           <p:nvPr/>
         </p:nvSpPr>
@@ -12692,10 +13125,21 @@
             <a:r>
               <a:rPr lang="en-US" sz="1100" b="1" dirty="0">
                 <a:solidFill>
-                  <a:schemeClr val="accent2"/>
-                </a:solidFill>
-              </a:rPr>
-              <a:t>操作：【記入】</a:t>
+                  <a:srgbClr val="C2410C"/>
+                </a:solidFill>
+              </a:rPr>
+              <a:t>操作：</a:t>
+            </a:r>
+            <a:pPr algn="ctr" indent="0" marL="0">
+              <a:buNone/>
+            </a:pPr>
+            <a:r>
+              <a:rPr lang="en-US" sz="1100" b="1" i="1" dirty="0">
+                <a:solidFill>
+                  <a:srgbClr val="C2410C"/>
+                </a:solidFill>
+              </a:rPr>
+              <a:t>【記入】</a:t>
             </a:r>
             <a:endParaRPr lang="en-US" sz="1100" dirty="0"/>
           </a:p>
@@ -12728,7 +13172,7 @@
             <a:r>
               <a:rPr lang="en-US" sz="1300" dirty="0">
                 <a:solidFill>
-                  <a:schemeClr val="accent6"/>
+                  <a:srgbClr val="64748B"/>
                 </a:solidFill>
               </a:rPr>
               <a:t>Web画面を表示して、ログインからログアウトまでを順に操作します</a:t>
@@ -12766,7 +13210,7 @@
             <a:r>
               <a:rPr lang="en-US" sz="1300" b="1" dirty="0">
                 <a:solidFill>
-                  <a:schemeClr val="bg1"/>
+                  <a:srgbClr val="FFFFFF"/>
                 </a:solidFill>
               </a:rPr>
               <a:t>1</a:t>
@@ -12802,7 +13246,7 @@
             <a:r>
               <a:rPr lang="en-US" sz="1500" b="1" dirty="0">
                 <a:solidFill>
-                  <a:schemeClr val="tx2"/>
+                  <a:srgbClr val="0B3C49"/>
                 </a:solidFill>
               </a:rPr>
               <a:t>ログイン</a:t>
@@ -12838,7 +13282,7 @@
             <a:r>
               <a:rPr lang="en-US" sz="1200" dirty="0">
                 <a:solidFill>
-                  <a:schemeClr val="tx1"/>
+                  <a:srgbClr val="1F2933"/>
                 </a:solidFill>
               </a:rPr>
               <a:t>誤ったID／パスワード → エラー画面、正しい値 → メニュー画面（「ようこそ、○○さん」）</a:t>
@@ -12876,7 +13320,7 @@
             <a:r>
               <a:rPr lang="en-US" sz="1300" b="1" dirty="0">
                 <a:solidFill>
-                  <a:schemeClr val="bg1"/>
+                  <a:srgbClr val="FFFFFF"/>
                 </a:solidFill>
               </a:rPr>
               <a:t>2</a:t>
@@ -12912,7 +13356,7 @@
             <a:r>
               <a:rPr lang="en-US" sz="1500" b="1" dirty="0">
                 <a:solidFill>
-                  <a:schemeClr val="tx2"/>
+                  <a:srgbClr val="0B3C49"/>
                 </a:solidFill>
               </a:rPr>
               <a:t>登録</a:t>
@@ -12948,7 +13392,7 @@
             <a:r>
               <a:rPr lang="en-US" sz="1200" dirty="0">
                 <a:solidFill>
-                  <a:schemeClr val="tx1"/>
+                  <a:srgbClr val="1F2933"/>
                 </a:solidFill>
               </a:rPr>
               <a:t>メニュー →［従業員登録］→ 入力（性別・所属はプルダウン、日付はカレンダー）→ 登録完了画面</a:t>
@@ -12986,7 +13430,7 @@
             <a:r>
               <a:rPr lang="en-US" sz="1300" b="1" dirty="0">
                 <a:solidFill>
-                  <a:schemeClr val="bg1"/>
+                  <a:srgbClr val="FFFFFF"/>
                 </a:solidFill>
               </a:rPr>
               <a:t>3</a:t>
@@ -13022,7 +13466,7 @@
             <a:r>
               <a:rPr lang="en-US" sz="1500" b="1" dirty="0">
                 <a:solidFill>
-                  <a:schemeClr val="tx2"/>
+                  <a:srgbClr val="0B3C49"/>
                 </a:solidFill>
               </a:rPr>
               <a:t>一覧表示</a:t>
@@ -13058,7 +13502,7 @@
             <a:r>
               <a:rPr lang="en-US" sz="1200" dirty="0">
                 <a:solidFill>
-                  <a:schemeClr val="tx1"/>
+                  <a:srgbClr val="1F2933"/>
                 </a:solidFill>
               </a:rPr>
               <a:t>メニュー →［従業員一覧］→ 今登録した従業員が従業員コード順に表示されることを確認</a:t>
@@ -13096,7 +13540,7 @@
             <a:r>
               <a:rPr lang="en-US" sz="1300" b="1" dirty="0">
                 <a:solidFill>
-                  <a:schemeClr val="bg1"/>
+                  <a:srgbClr val="FFFFFF"/>
                 </a:solidFill>
               </a:rPr>
               <a:t>4</a:t>
@@ -13132,7 +13576,7 @@
             <a:r>
               <a:rPr lang="en-US" sz="1500" b="1" dirty="0">
                 <a:solidFill>
-                  <a:schemeClr val="tx2"/>
+                  <a:srgbClr val="0B3C49"/>
                 </a:solidFill>
               </a:rPr>
               <a:t>削除</a:t>
@@ -13168,7 +13612,7 @@
             <a:r>
               <a:rPr lang="en-US" sz="1200" dirty="0">
                 <a:solidFill>
-                  <a:schemeClr val="tx1"/>
+                  <a:srgbClr val="1F2933"/>
                 </a:solidFill>
               </a:rPr>
               <a:t>一覧で従業員を選択 →［削除］→ 確認ダイアログでOK → 削除完了画面 → 一覧から消えたことを確認</a:t>
@@ -13206,7 +13650,7 @@
             <a:r>
               <a:rPr lang="en-US" sz="1300" b="1" dirty="0">
                 <a:solidFill>
-                  <a:schemeClr val="bg1"/>
+                  <a:srgbClr val="FFFFFF"/>
                 </a:solidFill>
               </a:rPr>
               <a:t>5</a:t>
@@ -13242,7 +13686,7 @@
             <a:r>
               <a:rPr lang="en-US" sz="1500" b="1" dirty="0">
                 <a:solidFill>
-                  <a:schemeClr val="tx2"/>
+                  <a:srgbClr val="0B3C49"/>
                 </a:solidFill>
               </a:rPr>
               <a:t>ログアウト</a:t>
@@ -13278,7 +13722,7 @@
             <a:r>
               <a:rPr lang="en-US" sz="1200" dirty="0">
                 <a:solidFill>
-                  <a:schemeClr val="tx1"/>
+                  <a:srgbClr val="1F2933"/>
                 </a:solidFill>
               </a:rPr>
               <a:t>メニュー →［ログアウト］→ ログアウト画面 → ログイン画面へ戻る</a:t>
@@ -13314,7 +13758,7 @@
             <a:r>
               <a:rPr lang="en-US" sz="1200" b="1" dirty="0">
                 <a:solidFill>
-                  <a:schemeClr val="tx2"/>
+                  <a:srgbClr val="0B3C49"/>
                 </a:solidFill>
               </a:rPr>
               <a:t>URL：</a:t>
@@ -13325,7 +13769,7 @@
             <a:r>
               <a:rPr lang="en-US" sz="1200" dirty="0">
                 <a:solidFill>
-                  <a:schemeClr val="tx1"/>
+                  <a:srgbClr val="1F2933"/>
                 </a:solidFill>
               </a:rPr>
               <a:t>http://localhost:8080/empsys/　</a:t>
@@ -13336,7 +13780,7 @@
             <a:r>
               <a:rPr lang="en-US" sz="1200" b="1" dirty="0">
                 <a:solidFill>
-                  <a:schemeClr val="tx2"/>
+                  <a:srgbClr val="0B3C49"/>
                 </a:solidFill>
               </a:rPr>
               <a:t>ログインID：</a:t>
@@ -13345,9 +13789,9 @@
               <a:buNone/>
             </a:pPr>
             <a:r>
-              <a:rPr lang="en-US" sz="1300" i="1" dirty="0">
-                <a:solidFill>
-                  <a:schemeClr val="accent2"/>
+              <a:rPr lang="en-US" sz="1200" i="1" dirty="0">
+                <a:solidFill>
+                  <a:srgbClr val="C2410C"/>
                 </a:solidFill>
               </a:rPr>
               <a:t>【記入】（例：metro）</a:t>
@@ -13455,7 +13899,7 @@
             <a:r>
               <a:rPr lang="en-US" sz="2400" b="1" dirty="0">
                 <a:solidFill>
-                  <a:schemeClr val="tx2"/>
+                  <a:srgbClr val="0B3C49"/>
                 </a:solidFill>
               </a:rPr>
               <a:t>デモンストレーション：追加課題</a:t>
@@ -13466,7 +13910,7 @@
       </p:sp>
       <p:sp>
         <p:nvSpPr>
-          <p:cNvPr id="3" name="時間・担当タグ"/>
+          <p:cNvPr id="3" name="担当タグ"/>
           <p:cNvSpPr txBox="1"/>
           <p:nvPr/>
         </p:nvSpPr>
@@ -13499,10 +13943,21 @@
             <a:r>
               <a:rPr lang="en-US" sz="1100" b="1" dirty="0">
                 <a:solidFill>
-                  <a:schemeClr val="accent2"/>
-                </a:solidFill>
-              </a:rPr>
-              <a:t>操作：【記入】</a:t>
+                  <a:srgbClr val="C2410C"/>
+                </a:solidFill>
+              </a:rPr>
+              <a:t>操作：</a:t>
+            </a:r>
+            <a:pPr algn="ctr" indent="0" marL="0">
+              <a:buNone/>
+            </a:pPr>
+            <a:r>
+              <a:rPr lang="en-US" sz="1100" b="1" i="1" dirty="0">
+                <a:solidFill>
+                  <a:srgbClr val="C2410C"/>
+                </a:solidFill>
+              </a:rPr>
+              <a:t>【記入】</a:t>
             </a:r>
             <a:endParaRPr lang="en-US" sz="1100" dirty="0"/>
           </a:p>
@@ -13535,7 +13990,7 @@
             <a:r>
               <a:rPr lang="en-US" sz="1300" dirty="0">
                 <a:solidFill>
-                  <a:schemeClr val="accent6"/>
+                  <a:srgbClr val="64748B"/>
                 </a:solidFill>
               </a:rPr>
               <a:t>要件定義書の「余力があれば」「追加システム要件」から実装した機能</a:t>
@@ -13546,7 +14001,7 @@
       </p:sp>
       <p:sp>
         <p:nvSpPr>
-          <p:cNvPr id="5" name="更新_背景"/>
+          <p:cNvPr id="5" name="追加課題1_背景"/>
           <p:cNvSpPr/>
           <p:nvPr/>
         </p:nvSpPr>
@@ -13573,7 +14028,7 @@
       </p:sp>
       <p:sp>
         <p:nvSpPr>
-          <p:cNvPr id="6" name="更新_見出し"/>
+          <p:cNvPr id="6" name="追加課題1_見出し"/>
           <p:cNvSpPr txBox="1"/>
           <p:nvPr/>
         </p:nvSpPr>
@@ -13598,7 +14053,7 @@
             <a:r>
               <a:rPr lang="en-US" sz="1400" b="1" dirty="0">
                 <a:solidFill>
-                  <a:schemeClr val="accent5"/>
+                  <a:srgbClr val="D9A43B"/>
                 </a:solidFill>
               </a:rPr>
               <a:t>① 従業員情報更新</a:t>
@@ -13609,7 +14064,7 @@
       </p:sp>
       <p:sp>
         <p:nvSpPr>
-          <p:cNvPr id="7" name="更新_本文"/>
+          <p:cNvPr id="7" name="追加課題1_本文"/>
           <p:cNvSpPr txBox="1"/>
           <p:nvPr/>
         </p:nvSpPr>
@@ -13638,7 +14093,7 @@
             <a:r>
               <a:rPr lang="en-US" sz="1200" dirty="0">
                 <a:solidFill>
-                  <a:schemeClr val="tx1"/>
+                  <a:srgbClr val="1F2933"/>
                 </a:solidFill>
               </a:rPr>
               <a:t>一覧で従業員を選択 →［従業員更新］</a:t>
@@ -13656,7 +14111,7 @@
             <a:r>
               <a:rPr lang="en-US" sz="1200" dirty="0">
                 <a:solidFill>
-                  <a:schemeClr val="tx1"/>
+                  <a:srgbClr val="1F2933"/>
                 </a:solidFill>
               </a:rPr>
               <a:t>更新画面に選択した従業員の情報が初期表示される</a:t>
@@ -13674,7 +14129,7 @@
             <a:r>
               <a:rPr lang="en-US" sz="1200" dirty="0">
                 <a:solidFill>
-                  <a:schemeClr val="tx1"/>
+                  <a:srgbClr val="1F2933"/>
                 </a:solidFill>
               </a:rPr>
               <a:t>従業員コードは変更不可</a:t>
@@ -13692,7 +14147,7 @@
             <a:r>
               <a:rPr lang="en-US" sz="1200" dirty="0">
                 <a:solidFill>
-                  <a:schemeClr val="tx1"/>
+                  <a:srgbClr val="1F2933"/>
                 </a:solidFill>
               </a:rPr>
               <a:t>更新ボタン → 更新完了画面 → 一覧で変更を確認</a:t>
@@ -13703,7 +14158,7 @@
       </p:sp>
       <p:sp>
         <p:nvSpPr>
-          <p:cNvPr id="8" name="ユーザ登録_背景"/>
+          <p:cNvPr id="8" name="追加課題2_背景"/>
           <p:cNvSpPr/>
           <p:nvPr/>
         </p:nvSpPr>
@@ -13730,7 +14185,7 @@
       </p:sp>
       <p:sp>
         <p:nvSpPr>
-          <p:cNvPr id="9" name="ユーザ登録_見出し"/>
+          <p:cNvPr id="9" name="追加課題2_見出し"/>
           <p:cNvSpPr txBox="1"/>
           <p:nvPr/>
         </p:nvSpPr>
@@ -13755,7 +14210,7 @@
             <a:r>
               <a:rPr lang="en-US" sz="1400" b="1" dirty="0">
                 <a:solidFill>
-                  <a:schemeClr val="accent5"/>
+                  <a:srgbClr val="D9A43B"/>
                 </a:solidFill>
               </a:rPr>
               <a:t>② ユーザ情報登録</a:t>
@@ -13766,7 +14221,7 @@
       </p:sp>
       <p:sp>
         <p:nvSpPr>
-          <p:cNvPr id="10" name="ユーザ登録_本文"/>
+          <p:cNvPr id="10" name="追加課題2_本文"/>
           <p:cNvSpPr txBox="1"/>
           <p:nvPr/>
         </p:nvSpPr>
@@ -13795,7 +14250,7 @@
             <a:r>
               <a:rPr lang="en-US" sz="1200" dirty="0">
                 <a:solidFill>
-                  <a:schemeClr val="tx1"/>
+                  <a:srgbClr val="1F2933"/>
                 </a:solidFill>
               </a:rPr>
               <a:t>メニュー →［システム利用者登録］</a:t>
@@ -13813,7 +14268,7 @@
             <a:r>
               <a:rPr lang="en-US" sz="1200" dirty="0">
                 <a:solidFill>
-                  <a:schemeClr val="tx1"/>
+                  <a:srgbClr val="1F2933"/>
                 </a:solidFill>
               </a:rPr>
               <a:t>ユーザID・パスワードを入力して登録</a:t>
@@ -13831,7 +14286,7 @@
             <a:r>
               <a:rPr lang="en-US" sz="1200" dirty="0">
                 <a:solidFill>
-                  <a:schemeClr val="tx1"/>
+                  <a:srgbClr val="1F2933"/>
                 </a:solidFill>
               </a:rPr>
               <a:t>登録完了画面を確認</a:t>
@@ -13849,7 +14304,7 @@
             <a:r>
               <a:rPr lang="en-US" sz="1200" dirty="0">
                 <a:solidFill>
-                  <a:schemeClr val="tx1"/>
+                  <a:srgbClr val="1F2933"/>
                 </a:solidFill>
               </a:rPr>
               <a:t>ログアウト後、登録したユーザでログインできることを確認</a:t>
@@ -13885,7 +14340,7 @@
             <a:r>
               <a:rPr lang="en-US" sz="1300" b="1" dirty="0">
                 <a:solidFill>
-                  <a:schemeClr val="accent1"/>
+                  <a:srgbClr val="0F7C8C"/>
                 </a:solidFill>
               </a:rPr>
               <a:t>見どころ（ここを見てほしい点）</a:t>
@@ -13896,7 +14351,7 @@
       </p:sp>
       <p:sp>
         <p:nvSpPr>
-          <p:cNvPr id="12" name="見どころ_記入欄"/>
+          <p:cNvPr id="12" name="見どころ_本文"/>
           <p:cNvSpPr txBox="1"/>
           <p:nvPr/>
         </p:nvSpPr>
@@ -13923,15 +14378,12 @@
           <a:lstStyle/>
           <a:p>
             <a:pPr indent="0" marL="0">
-              <a:spcAft>
-                <a:spcPts val="400"/>
-              </a:spcAft>
               <a:buNone/>
             </a:pPr>
             <a:r>
               <a:rPr lang="en-US" sz="1400" i="1" dirty="0">
                 <a:solidFill>
-                  <a:schemeClr val="accent2"/>
+                  <a:srgbClr val="C2410C"/>
                 </a:solidFill>
               </a:rPr>
               <a:t>【記入】例：更新画面を開いた時点で現在の値が入っているので、変更したい項目だけ直せば済む</a:t>
@@ -14039,7 +14491,7 @@
             <a:r>
               <a:rPr lang="en-US" sz="2400" b="1" dirty="0">
                 <a:solidFill>
-                  <a:schemeClr val="tx2"/>
+                  <a:srgbClr val="0B3C49"/>
                 </a:solidFill>
               </a:rPr>
               <a:t>学んだこと</a:t>
@@ -14050,7 +14502,7 @@
       </p:sp>
       <p:sp>
         <p:nvSpPr>
-          <p:cNvPr id="3" name="時間・担当タグ"/>
+          <p:cNvPr id="3" name="担当タグ"/>
           <p:cNvSpPr txBox="1"/>
           <p:nvPr/>
         </p:nvSpPr>
@@ -14083,10 +14535,21 @@
             <a:r>
               <a:rPr lang="en-US" sz="1100" b="1" dirty="0">
                 <a:solidFill>
-                  <a:schemeClr val="accent2"/>
-                </a:solidFill>
-              </a:rPr>
-              <a:t>担当：【記入】</a:t>
+                  <a:srgbClr val="C2410C"/>
+                </a:solidFill>
+              </a:rPr>
+              <a:t>担当：</a:t>
+            </a:r>
+            <a:pPr algn="ctr" indent="0" marL="0">
+              <a:buNone/>
+            </a:pPr>
+            <a:r>
+              <a:rPr lang="en-US" sz="1100" b="1" i="1" dirty="0">
+                <a:solidFill>
+                  <a:srgbClr val="C2410C"/>
+                </a:solidFill>
+              </a:rPr>
+              <a:t>【記入】</a:t>
             </a:r>
             <a:endParaRPr lang="en-US" sz="1100" dirty="0"/>
           </a:p>
@@ -14119,7 +14582,7 @@
             <a:r>
               <a:rPr lang="en-US" sz="1300" dirty="0">
                 <a:solidFill>
-                  <a:schemeClr val="accent6"/>
+                  <a:srgbClr val="64748B"/>
                 </a:solidFill>
               </a:rPr>
               <a:t>要求分析からテスト・納品まで、ひと通りの開発工程を経験して学んだこと</a:t>
@@ -14184,7 +14647,7 @@
             <a:r>
               <a:rPr lang="en-US" sz="1300" b="1" dirty="0">
                 <a:solidFill>
-                  <a:schemeClr val="bg1"/>
+                  <a:srgbClr val="FFFFFF"/>
                 </a:solidFill>
               </a:rPr>
               <a:t>1</a:t>
@@ -14202,7 +14665,7 @@
         <p:spPr>
           <a:xfrm>
             <a:off x="1143000" y="1481328"/>
-            <a:ext cx="1783080" cy="384048"/>
+            <a:ext cx="1792224" cy="384048"/>
           </a:xfrm>
           <a:prstGeom prst="rect">
             <a:avLst/>
@@ -14220,7 +14683,7 @@
             <a:r>
               <a:rPr lang="en-US" sz="1500" b="1" dirty="0">
                 <a:solidFill>
-                  <a:schemeClr val="tx2"/>
+                  <a:srgbClr val="0B3C49"/>
                 </a:solidFill>
               </a:rPr>
               <a:t>開発工程</a:t>
@@ -14231,7 +14694,7 @@
       </p:sp>
       <p:sp>
         <p:nvSpPr>
-          <p:cNvPr id="8" name="学び記入欄1"/>
+          <p:cNvPr id="8" name="学び内容1"/>
           <p:cNvSpPr txBox="1"/>
           <p:nvPr/>
         </p:nvSpPr>
@@ -14256,7 +14719,7 @@
             <a:r>
               <a:rPr lang="en-US" sz="1300" i="1" dirty="0">
                 <a:solidFill>
-                  <a:schemeClr val="accent2"/>
+                  <a:srgbClr val="C2410C"/>
                 </a:solidFill>
               </a:rPr>
               <a:t>【記入】例：設計書を先に固めると、分担して実装してもつなげやすい</a:t>
@@ -14321,7 +14784,7 @@
             <a:r>
               <a:rPr lang="en-US" sz="1300" b="1" dirty="0">
                 <a:solidFill>
-                  <a:schemeClr val="bg1"/>
+                  <a:srgbClr val="FFFFFF"/>
                 </a:solidFill>
               </a:rPr>
               <a:t>2</a:t>
@@ -14339,7 +14802,7 @@
         <p:spPr>
           <a:xfrm>
             <a:off x="3950208" y="1481328"/>
-            <a:ext cx="1783080" cy="384048"/>
+            <a:ext cx="1792224" cy="384048"/>
           </a:xfrm>
           <a:prstGeom prst="rect">
             <a:avLst/>
@@ -14357,7 +14820,7 @@
             <a:r>
               <a:rPr lang="en-US" sz="1500" b="1" dirty="0">
                 <a:solidFill>
-                  <a:schemeClr val="tx2"/>
+                  <a:srgbClr val="0B3C49"/>
                 </a:solidFill>
               </a:rPr>
               <a:t>技術</a:t>
@@ -14368,7 +14831,7 @@
       </p:sp>
       <p:sp>
         <p:nvSpPr>
-          <p:cNvPr id="12" name="学び記入欄2"/>
+          <p:cNvPr id="12" name="学び内容2"/>
           <p:cNvSpPr txBox="1"/>
           <p:nvPr/>
         </p:nvSpPr>
@@ -14393,7 +14856,7 @@
             <a:r>
               <a:rPr lang="en-US" sz="1300" i="1" dirty="0">
                 <a:solidFill>
-                  <a:schemeClr val="accent2"/>
+                  <a:srgbClr val="C2410C"/>
                 </a:solidFill>
               </a:rPr>
               <a:t>【記入】例：Servlet・JSP・DAOに役割を分ける構成、JDBCでのDB操作</a:t>
@@ -14458,7 +14921,7 @@
             <a:r>
               <a:rPr lang="en-US" sz="1300" b="1" dirty="0">
                 <a:solidFill>
-                  <a:schemeClr val="bg1"/>
+                  <a:srgbClr val="FFFFFF"/>
                 </a:solidFill>
               </a:rPr>
               <a:t>3</a:t>
@@ -14476,7 +14939,7 @@
         <p:spPr>
           <a:xfrm>
             <a:off x="6757416" y="1481328"/>
-            <a:ext cx="1783080" cy="384048"/>
+            <a:ext cx="1792224" cy="384048"/>
           </a:xfrm>
           <a:prstGeom prst="rect">
             <a:avLst/>
@@ -14494,7 +14957,7 @@
             <a:r>
               <a:rPr lang="en-US" sz="1500" b="1" dirty="0">
                 <a:solidFill>
-                  <a:schemeClr val="tx2"/>
+                  <a:srgbClr val="0B3C49"/>
                 </a:solidFill>
               </a:rPr>
               <a:t>チーム開発</a:t>
@@ -14505,7 +14968,7 @@
       </p:sp>
       <p:sp>
         <p:nvSpPr>
-          <p:cNvPr id="16" name="学び記入欄3"/>
+          <p:cNvPr id="16" name="学び内容3"/>
           <p:cNvSpPr txBox="1"/>
           <p:nvPr/>
         </p:nvSpPr>
@@ -14530,7 +14993,7 @@
             <a:r>
               <a:rPr lang="en-US" sz="1300" i="1" dirty="0">
                 <a:solidFill>
-                  <a:schemeClr val="accent2"/>
+                  <a:srgbClr val="C2410C"/>
                 </a:solidFill>
               </a:rPr>
               <a:t>【記入】例：レビューやマージの進め方、進捗の共有</a:t>
@@ -14593,47 +15056,47 @@
 </file>
 
 <file path=ppt/theme/theme1.xml><?xml version="1.0" encoding="utf-8"?>
-<a:theme xmlns:a="http://schemas.openxmlformats.org/drawingml/2006/main" name="empsys 成果発表">
+<a:theme xmlns:a="http://schemas.openxmlformats.org/drawingml/2006/main" name="Office Theme">
   <a:themeElements>
-    <a:clrScheme name="empsys 成果発表">
+    <a:clrScheme name="Office">
       <a:dk1>
-        <a:srgbClr val="1F2933"/>
+        <a:sysClr val="windowText" lastClr="000000"/>
       </a:dk1>
       <a:lt1>
-        <a:srgbClr val="FFFFFF"/>
+        <a:sysClr val="window" lastClr="FFFFFF"/>
       </a:lt1>
       <a:dk2>
-        <a:srgbClr val="0B3C49"/>
+        <a:srgbClr val="44546A"/>
       </a:dk2>
       <a:lt2>
-        <a:srgbClr val="EEF4F5"/>
+        <a:srgbClr val="E7E6E6"/>
       </a:lt2>
       <a:accent1>
-        <a:srgbClr val="0F7C8C"/>
+        <a:srgbClr val="4472C4"/>
       </a:accent1>
       <a:accent2>
-        <a:srgbClr val="C2410C"/>
+        <a:srgbClr val="ED7D31"/>
       </a:accent2>
       <a:accent3>
-        <a:srgbClr val="5B8C5A"/>
+        <a:srgbClr val="A5A5A5"/>
       </a:accent3>
       <a:accent4>
-        <a:srgbClr val="7A6FB0"/>
+        <a:srgbClr val="FFC000"/>
       </a:accent4>
       <a:accent5>
-        <a:srgbClr val="D9A43B"/>
+        <a:srgbClr val="5B9BD5"/>
       </a:accent5>
       <a:accent6>
-        <a:srgbClr val="64748B"/>
+        <a:srgbClr val="70AD47"/>
       </a:accent6>
       <a:hlink>
-        <a:srgbClr val="0F7C8C"/>
+        <a:srgbClr val="0563C1"/>
       </a:hlink>
       <a:folHlink>
-        <a:srgbClr val="7A6FB0"/>
+        <a:srgbClr val="954F72"/>
       </a:folHlink>
     </a:clrScheme>
-    <a:fontScheme name="empsys 成果発表">
+    <a:fontScheme name="Office">
       <a:majorFont>
         <a:latin typeface="Meiryo UI"/>
         <a:ea typeface=""/>

--- a/成果発表会資料_テンプレート.pptx
+++ b/成果発表会資料_テンプレート.pptx
@@ -120,17 +120,17 @@
   <p:extLst>
     <p:ext uri="{521415D9-36F7-43E2-AB2F-B90AF26B5E84}">
       <p14:sectionLst xmlns:p14="http://schemas.microsoft.com/office/powerpoint/2010/main">
-        <p14:section name="表紙" id="{aae36df6-19bb-00f2-88a0-71df1efae4e1}">
+        <p14:section name="表紙" id="{c4c32323-72ee-389c-423b-8b3bced00f63}">
           <p14:sldIdLst>
             <p14:sldId id="256"/>
           </p14:sldIdLst>
         </p14:section>
-        <p14:section name="導入" id="{abed1b82-59f4-0a40-d7bb-24c7ab53ac0b}">
+        <p14:section name="導入" id="{15071c26-9b6f-3db1-0520-82cc17c35d7e}">
           <p14:sldIdLst>
             <p14:sldId id="257"/>
           </p14:sldIdLst>
         </p14:section>
-        <p14:section name="システム概要" id="{1cb1e6c6-d59c-0c57-d6ed-20099c49a07d}">
+        <p14:section name="システム概要" id="{925f0779-aa90-e7ad-9af3-41d91519bdfd}">
           <p14:sldIdLst>
             <p14:sldId id="258"/>
             <p14:sldId id="259"/>
@@ -138,13 +138,13 @@
             <p14:sldId id="261"/>
           </p14:sldIdLst>
         </p14:section>
-        <p14:section name="デモンストレーション" id="{cb6b1752-f13e-706d-d779-a080c12d873d}">
+        <p14:section name="デモンストレーション" id="{ff06e2e6-115a-c167-79f8-ec19c863271e}">
           <p14:sldIdLst>
             <p14:sldId id="262"/>
             <p14:sldId id="263"/>
           </p14:sldIdLst>
         </p14:section>
-        <p14:section name="振り返り" id="{a229b44d-bbfd-af79-8747-d3fcbc4ba1cd}">
+        <p14:section name="振り返り" id="{e7ca8e21-4878-73c9-b43d-8a341f1e046f}">
           <p14:sldIdLst>
             <p14:sldId id="264"/>
             <p14:sldId id="265"/>
@@ -152,7 +152,7 @@
             <p14:sldId id="267"/>
           </p14:sldIdLst>
         </p14:section>
-        <p14:section name="要望・まとめ" id="{91365e61-ce2e-696b-153c-81f395c2c049}">
+        <p14:section name="要望・まとめ" id="{792b659b-a332-fe6a-4722-401fecf1a14c}">
           <p14:sldIdLst>
             <p14:sldId id="268"/>
             <p14:sldId id="269"/>

--- a/成果発表会資料_テンプレート.pptx
+++ b/成果発表会資料_テンプレート.pptx
@@ -120,17 +120,17 @@
   <p:extLst>
     <p:ext uri="{521415D9-36F7-43E2-AB2F-B90AF26B5E84}">
       <p14:sectionLst xmlns:p14="http://schemas.microsoft.com/office/powerpoint/2010/main">
-        <p14:section name="表紙" id="{c4c32323-72ee-389c-423b-8b3bced00f63}">
+        <p14:section name="表紙" id="{06911565-3bb6-dd7d-5199-d41c3e3d1871}">
           <p14:sldIdLst>
             <p14:sldId id="256"/>
           </p14:sldIdLst>
         </p14:section>
-        <p14:section name="導入" id="{15071c26-9b6f-3db1-0520-82cc17c35d7e}">
+        <p14:section name="導入" id="{8e68fa87-a4f1-9362-e353-c49a06d720aa}">
           <p14:sldIdLst>
             <p14:sldId id="257"/>
           </p14:sldIdLst>
         </p14:section>
-        <p14:section name="システム概要" id="{925f0779-aa90-e7ad-9af3-41d91519bdfd}">
+        <p14:section name="システム概要" id="{1c9db49c-fe60-0824-40d4-f9189fefee13}">
           <p14:sldIdLst>
             <p14:sldId id="258"/>
             <p14:sldId id="259"/>
@@ -138,13 +138,13 @@
             <p14:sldId id="261"/>
           </p14:sldIdLst>
         </p14:section>
-        <p14:section name="デモンストレーション" id="{ff06e2e6-115a-c167-79f8-ec19c863271e}">
+        <p14:section name="デモンストレーション" id="{d3dbbb7d-f599-2ecd-5e66-57b4feec6006}">
           <p14:sldIdLst>
             <p14:sldId id="262"/>
             <p14:sldId id="263"/>
           </p14:sldIdLst>
         </p14:section>
-        <p14:section name="振り返り" id="{e7ca8e21-4878-73c9-b43d-8a341f1e046f}">
+        <p14:section name="振り返り" id="{41bcaa96-eebb-593e-ed6d-b58a30cf5d38}">
           <p14:sldIdLst>
             <p14:sldId id="264"/>
             <p14:sldId id="265"/>
@@ -152,7 +152,7 @@
             <p14:sldId id="267"/>
           </p14:sldIdLst>
         </p14:section>
-        <p14:section name="要望・まとめ" id="{792b659b-a332-fe6a-4722-401fecf1a14c}">
+        <p14:section name="要望・まとめ" id="{39df9390-8ef0-2e38-7e75-ea9a65f3f482}">
           <p14:sldIdLst>
             <p14:sldId id="268"/>
             <p14:sldId id="269"/>
@@ -2519,12 +2519,12 @@
               <a:buNone/>
             </a:pPr>
             <a:r>
-              <a:rPr lang="en-US" sz="1600" i="1" dirty="0">
-                <a:solidFill>
-                  <a:srgbClr val="FDBA74"/>
-                </a:solidFill>
-              </a:rPr>
-              <a:t>【記入】氏名1</a:t>
+              <a:rPr lang="en-US" sz="1600" dirty="0">
+                <a:solidFill>
+                  <a:srgbClr val="FFFFFF"/>
+                </a:solidFill>
+              </a:rPr>
+              <a:t>新井真佐斗</a:t>
             </a:r>
             <a:pPr indent="0" marL="0">
               <a:buNone/>
@@ -4650,12 +4650,12 @@
               <a:buNone/>
             </a:pPr>
             <a:r>
-              <a:rPr lang="en-US" sz="1400" b="1" i="1" dirty="0">
-                <a:solidFill>
-                  <a:srgbClr val="C2410C"/>
-                </a:solidFill>
-              </a:rPr>
-              <a:t>【記入】氏名1</a:t>
+              <a:rPr lang="en-US" sz="1400" b="1" dirty="0">
+                <a:solidFill>
+                  <a:srgbClr val="0B3C49"/>
+                </a:solidFill>
+              </a:rPr>
+              <a:t>新井真佐斗</a:t>
             </a:r>
             <a:endParaRPr lang="en-US" sz="1400" dirty="0"/>
           </a:p>
@@ -6068,12 +6068,12 @@
               <a:buNone/>
             </a:pPr>
             <a:r>
-              <a:rPr lang="en-US" sz="1600" b="1" i="1" dirty="0">
-                <a:solidFill>
-                  <a:srgbClr val="FDBA74"/>
-                </a:solidFill>
-              </a:rPr>
-              <a:t>【記入】氏名1</a:t>
+              <a:rPr lang="en-US" sz="1600" b="1" dirty="0">
+                <a:solidFill>
+                  <a:srgbClr val="FFFFFF"/>
+                </a:solidFill>
+              </a:rPr>
+              <a:t>新井真佐斗</a:t>
             </a:r>
             <a:pPr indent="0" marL="0">
               <a:buNone/>
@@ -12808,12 +12808,12 @@
               <a:buNone/>
             </a:pPr>
             <a:r>
-              <a:rPr lang="en-US" sz="1300" b="1" i="1" dirty="0">
-                <a:solidFill>
-                  <a:srgbClr val="C2410C"/>
-                </a:solidFill>
-              </a:rPr>
-              <a:t>【記入】氏名1</a:t>
+              <a:rPr lang="en-US" sz="1300" b="1" dirty="0">
+                <a:solidFill>
+                  <a:srgbClr val="0B3C49"/>
+                </a:solidFill>
+              </a:rPr>
+              <a:t>新井真佐斗</a:t>
             </a:r>
             <a:pPr indent="0" marL="0">
               <a:spcAft>
@@ -12836,12 +12836,12 @@
               <a:buNone/>
             </a:pPr>
             <a:r>
-              <a:rPr lang="en-US" sz="1300" i="1" dirty="0">
-                <a:solidFill>
-                  <a:srgbClr val="C2410C"/>
-                </a:solidFill>
-              </a:rPr>
-              <a:t>【記入】リーダー／ログイン等</a:t>
+              <a:rPr lang="en-US" sz="1300" dirty="0">
+                <a:solidFill>
+                  <a:srgbClr val="1F2933"/>
+                </a:solidFill>
+              </a:rPr>
+              <a:t>リーダー／班員のレビュー</a:t>
             </a:r>
             <a:endParaRPr lang="en-US" sz="1300" dirty="0"/>
           </a:p>

--- a/成果発表会資料_テンプレート.pptx
+++ b/成果発表会資料_テンプレート.pptx
@@ -120,17 +120,17 @@
   <p:extLst>
     <p:ext uri="{521415D9-36F7-43E2-AB2F-B90AF26B5E84}">
       <p14:sectionLst xmlns:p14="http://schemas.microsoft.com/office/powerpoint/2010/main">
-        <p14:section name="表紙" id="{06911565-3bb6-dd7d-5199-d41c3e3d1871}">
+        <p14:section name="表紙" id="{fdbdc3ec-147d-7010-b58b-7077f2b22129}">
           <p14:sldIdLst>
             <p14:sldId id="256"/>
           </p14:sldIdLst>
         </p14:section>
-        <p14:section name="導入" id="{8e68fa87-a4f1-9362-e353-c49a06d720aa}">
+        <p14:section name="導入" id="{d2f0f6ad-4d71-c402-1e14-dcb8bb24b3de}">
           <p14:sldIdLst>
             <p14:sldId id="257"/>
           </p14:sldIdLst>
         </p14:section>
-        <p14:section name="システム概要" id="{1c9db49c-fe60-0824-40d4-f9189fefee13}">
+        <p14:section name="システム概要" id="{b90be760-8a3e-7897-818c-5ce764590771}">
           <p14:sldIdLst>
             <p14:sldId id="258"/>
             <p14:sldId id="259"/>
@@ -138,13 +138,13 @@
             <p14:sldId id="261"/>
           </p14:sldIdLst>
         </p14:section>
-        <p14:section name="デモンストレーション" id="{d3dbbb7d-f599-2ecd-5e66-57b4feec6006}">
+        <p14:section name="デモンストレーション" id="{7546c8c0-4aa5-dea5-8990-291b5a1108f3}">
           <p14:sldIdLst>
             <p14:sldId id="262"/>
             <p14:sldId id="263"/>
           </p14:sldIdLst>
         </p14:section>
-        <p14:section name="振り返り" id="{41bcaa96-eebb-593e-ed6d-b58a30cf5d38}">
+        <p14:section name="振り返り" id="{5adacaf7-5775-9576-9006-a77f339ec8c4}">
           <p14:sldIdLst>
             <p14:sldId id="264"/>
             <p14:sldId id="265"/>
@@ -152,7 +152,7 @@
             <p14:sldId id="267"/>
           </p14:sldIdLst>
         </p14:section>
-        <p14:section name="要望・まとめ" id="{39df9390-8ef0-2e38-7e75-ea9a65f3f482}">
+        <p14:section name="要望・まとめ" id="{abbe2584-b6f7-22cb-5dde-68c131eee225}">
           <p14:sldIdLst>
             <p14:sldId id="268"/>
             <p14:sldId id="269"/>
@@ -2643,12 +2643,12 @@
               <a:buNone/>
             </a:pPr>
             <a:r>
-              <a:rPr lang="en-US" sz="1600" i="1" dirty="0">
-                <a:solidFill>
-                  <a:srgbClr val="FDBA74"/>
-                </a:solidFill>
-              </a:rPr>
-              <a:t>【記入】2026年○月○日</a:t>
+              <a:rPr lang="en-US" sz="1600" dirty="0">
+                <a:solidFill>
+                  <a:srgbClr val="FFFFFF"/>
+                </a:solidFill>
+              </a:rPr>
+              <a:t>2026年10月27日</a:t>
             </a:r>
             <a:endParaRPr lang="en-US" sz="1600" dirty="0"/>
           </a:p>

--- a/成果発表会資料_テンプレート.pptx
+++ b/成果発表会資料_テンプレート.pptx
@@ -120,17 +120,17 @@
   <p:extLst>
     <p:ext uri="{521415D9-36F7-43E2-AB2F-B90AF26B5E84}">
       <p14:sectionLst xmlns:p14="http://schemas.microsoft.com/office/powerpoint/2010/main">
-        <p14:section name="表紙" id="{fdbdc3ec-147d-7010-b58b-7077f2b22129}">
+        <p14:section name="表紙" id="{4c8e5552-f324-8f90-61b9-31d922fca075}">
           <p14:sldIdLst>
             <p14:sldId id="256"/>
           </p14:sldIdLst>
         </p14:section>
-        <p14:section name="導入" id="{d2f0f6ad-4d71-c402-1e14-dcb8bb24b3de}">
+        <p14:section name="導入" id="{337d9f5f-3c81-fa08-762f-fe13e5ff95dd}">
           <p14:sldIdLst>
             <p14:sldId id="257"/>
           </p14:sldIdLst>
         </p14:section>
-        <p14:section name="システム概要" id="{b90be760-8a3e-7897-818c-5ce764590771}">
+        <p14:section name="システム概要" id="{72a8afe6-03e6-8f43-693d-65fd4b108a3b}">
           <p14:sldIdLst>
             <p14:sldId id="258"/>
             <p14:sldId id="259"/>
@@ -138,13 +138,13 @@
             <p14:sldId id="261"/>
           </p14:sldIdLst>
         </p14:section>
-        <p14:section name="デモンストレーション" id="{7546c8c0-4aa5-dea5-8990-291b5a1108f3}">
+        <p14:section name="デモンストレーション" id="{d1c068f0-82fe-ff97-4f1f-5cc9f50f43d8}">
           <p14:sldIdLst>
             <p14:sldId id="262"/>
             <p14:sldId id="263"/>
           </p14:sldIdLst>
         </p14:section>
-        <p14:section name="振り返り" id="{5adacaf7-5775-9576-9006-a77f339ec8c4}">
+        <p14:section name="振り返り" id="{8cf97618-3c66-cab6-ac68-3546e8556882}">
           <p14:sldIdLst>
             <p14:sldId id="264"/>
             <p14:sldId id="265"/>
@@ -152,7 +152,7 @@
             <p14:sldId id="267"/>
           </p14:sldIdLst>
         </p14:section>
-        <p14:section name="要望・まとめ" id="{abbe2584-b6f7-22cb-5dde-68c131eee225}">
+        <p14:section name="要望・まとめ" id="{0e3b4185-daf9-37ad-b3c1-38b75168c079}">
           <p14:sldIdLst>
             <p14:sldId id="268"/>
             <p14:sldId id="269"/>
@@ -2552,12 +2552,12 @@
               <a:buNone/>
             </a:pPr>
             <a:r>
-              <a:rPr lang="en-US" sz="1600" i="1" dirty="0">
-                <a:solidFill>
-                  <a:srgbClr val="FDBA74"/>
-                </a:solidFill>
-              </a:rPr>
-              <a:t>【記入】氏名2</a:t>
+              <a:rPr lang="en-US" sz="1600" dirty="0">
+                <a:solidFill>
+                  <a:srgbClr val="FFFFFF"/>
+                </a:solidFill>
+              </a:rPr>
+              <a:t>栗原聡汰</a:t>
             </a:r>
             <a:pPr indent="0" marL="0">
               <a:buNone/>
@@ -4869,12 +4869,12 @@
               <a:buNone/>
             </a:pPr>
             <a:r>
-              <a:rPr lang="en-US" sz="1400" b="1" i="1" dirty="0">
-                <a:solidFill>
-                  <a:srgbClr val="C2410C"/>
-                </a:solidFill>
-              </a:rPr>
-              <a:t>【記入】氏名2</a:t>
+              <a:rPr lang="en-US" sz="1400" b="1" dirty="0">
+                <a:solidFill>
+                  <a:srgbClr val="0B3C49"/>
+                </a:solidFill>
+              </a:rPr>
+              <a:t>栗原聡汰</a:t>
             </a:r>
             <a:endParaRPr lang="en-US" sz="1400" dirty="0"/>
           </a:p>
@@ -6090,12 +6090,12 @@
               <a:buNone/>
             </a:pPr>
             <a:r>
-              <a:rPr lang="en-US" sz="1600" b="1" i="1" dirty="0">
-                <a:solidFill>
-                  <a:srgbClr val="FDBA74"/>
-                </a:solidFill>
-              </a:rPr>
-              <a:t>【記入】氏名2</a:t>
+              <a:rPr lang="en-US" sz="1600" b="1" dirty="0">
+                <a:solidFill>
+                  <a:srgbClr val="FFFFFF"/>
+                </a:solidFill>
+              </a:rPr>
+              <a:t>栗原聡汰</a:t>
             </a:r>
             <a:pPr indent="0" marL="0">
               <a:buNone/>
@@ -12853,12 +12853,12 @@
               <a:buNone/>
             </a:pPr>
             <a:r>
-              <a:rPr lang="en-US" sz="1300" b="1" i="1" dirty="0">
-                <a:solidFill>
-                  <a:srgbClr val="C2410C"/>
-                </a:solidFill>
-              </a:rPr>
-              <a:t>【記入】氏名2</a:t>
+              <a:rPr lang="en-US" sz="1300" b="1" dirty="0">
+                <a:solidFill>
+                  <a:srgbClr val="0B3C49"/>
+                </a:solidFill>
+              </a:rPr>
+              <a:t>栗原聡汰</a:t>
             </a:r>
             <a:pPr indent="0" marL="0">
               <a:spcAft>

--- a/成果発表会資料_テンプレート.pptx
+++ b/成果発表会資料_テンプレート.pptx
@@ -120,17 +120,17 @@
   <p:extLst>
     <p:ext uri="{521415D9-36F7-43E2-AB2F-B90AF26B5E84}">
       <p14:sectionLst xmlns:p14="http://schemas.microsoft.com/office/powerpoint/2010/main">
-        <p14:section name="表紙" id="{4c8e5552-f324-8f90-61b9-31d922fca075}">
+        <p14:section name="表紙" id="{424b00f6-f53b-810b-8a81-5a68431ec59d}">
           <p14:sldIdLst>
             <p14:sldId id="256"/>
           </p14:sldIdLst>
         </p14:section>
-        <p14:section name="導入" id="{337d9f5f-3c81-fa08-762f-fe13e5ff95dd}">
+        <p14:section name="導入" id="{1a1a161c-f068-8180-4abb-27428c6a920e}">
           <p14:sldIdLst>
             <p14:sldId id="257"/>
           </p14:sldIdLst>
         </p14:section>
-        <p14:section name="システム概要" id="{72a8afe6-03e6-8f43-693d-65fd4b108a3b}">
+        <p14:section name="システム概要" id="{37331d4c-b1b1-16b3-1529-871d00fe227c}">
           <p14:sldIdLst>
             <p14:sldId id="258"/>
             <p14:sldId id="259"/>
@@ -138,13 +138,13 @@
             <p14:sldId id="261"/>
           </p14:sldIdLst>
         </p14:section>
-        <p14:section name="デモンストレーション" id="{d1c068f0-82fe-ff97-4f1f-5cc9f50f43d8}">
+        <p14:section name="デモンストレーション" id="{03493b45-d768-d0d7-ed58-155ed7d8c03c}">
           <p14:sldIdLst>
             <p14:sldId id="262"/>
             <p14:sldId id="263"/>
           </p14:sldIdLst>
         </p14:section>
-        <p14:section name="振り返り" id="{8cf97618-3c66-cab6-ac68-3546e8556882}">
+        <p14:section name="振り返り" id="{128b8eba-e590-e39b-7b20-fffc50d730af}">
           <p14:sldIdLst>
             <p14:sldId id="264"/>
             <p14:sldId id="265"/>
@@ -152,7 +152,7 @@
             <p14:sldId id="267"/>
           </p14:sldIdLst>
         </p14:section>
-        <p14:section name="要望・まとめ" id="{0e3b4185-daf9-37ad-b3c1-38b75168c079}">
+        <p14:section name="要望・まとめ" id="{14061772-4478-6594-b2fe-7501d715155a}">
           <p14:sldIdLst>
             <p14:sldId id="268"/>
             <p14:sldId id="269"/>
@@ -2574,12 +2574,12 @@
               <a:buNone/>
             </a:pPr>
             <a:r>
-              <a:rPr lang="en-US" sz="1600" i="1" dirty="0">
-                <a:solidFill>
-                  <a:srgbClr val="FDBA74"/>
-                </a:solidFill>
-              </a:rPr>
-              <a:t>【記入】氏名3</a:t>
+              <a:rPr lang="en-US" sz="1600" dirty="0">
+                <a:solidFill>
+                  <a:srgbClr val="FFFFFF"/>
+                </a:solidFill>
+              </a:rPr>
+              <a:t>川端はると</a:t>
             </a:r>
             <a:pPr indent="0" marL="0">
               <a:buNone/>
@@ -5088,12 +5088,12 @@
               <a:buNone/>
             </a:pPr>
             <a:r>
-              <a:rPr lang="en-US" sz="1400" b="1" i="1" dirty="0">
-                <a:solidFill>
-                  <a:srgbClr val="C2410C"/>
-                </a:solidFill>
-              </a:rPr>
-              <a:t>【記入】氏名3</a:t>
+              <a:rPr lang="en-US" sz="1400" b="1" dirty="0">
+                <a:solidFill>
+                  <a:srgbClr val="0B3C49"/>
+                </a:solidFill>
+              </a:rPr>
+              <a:t>川端はると</a:t>
             </a:r>
             <a:endParaRPr lang="en-US" sz="1400" dirty="0"/>
           </a:p>
@@ -6112,12 +6112,12 @@
               <a:buNone/>
             </a:pPr>
             <a:r>
-              <a:rPr lang="en-US" sz="1600" b="1" i="1" dirty="0">
-                <a:solidFill>
-                  <a:srgbClr val="FDBA74"/>
-                </a:solidFill>
-              </a:rPr>
-              <a:t>【記入】氏名3</a:t>
+              <a:rPr lang="en-US" sz="1600" b="1" dirty="0">
+                <a:solidFill>
+                  <a:srgbClr val="FFFFFF"/>
+                </a:solidFill>
+              </a:rPr>
+              <a:t>川端はると</a:t>
             </a:r>
             <a:pPr indent="0" marL="0">
               <a:buNone/>
@@ -12898,12 +12898,12 @@
               <a:buNone/>
             </a:pPr>
             <a:r>
-              <a:rPr lang="en-US" sz="1300" b="1" i="1" dirty="0">
-                <a:solidFill>
-                  <a:srgbClr val="C2410C"/>
-                </a:solidFill>
-              </a:rPr>
-              <a:t>【記入】氏名3</a:t>
+              <a:rPr lang="en-US" sz="1300" b="1" dirty="0">
+                <a:solidFill>
+                  <a:srgbClr val="0B3C49"/>
+                </a:solidFill>
+              </a:rPr>
+              <a:t>川端はると</a:t>
             </a:r>
             <a:pPr indent="0" marL="0">
               <a:spcAft>

--- a/成果発表会資料_テンプレート.pptx
+++ b/成果発表会資料_テンプレート.pptx
@@ -120,17 +120,17 @@
   <p:extLst>
     <p:ext uri="{521415D9-36F7-43E2-AB2F-B90AF26B5E84}">
       <p14:sectionLst xmlns:p14="http://schemas.microsoft.com/office/powerpoint/2010/main">
-        <p14:section name="表紙" id="{424b00f6-f53b-810b-8a81-5a68431ec59d}">
+        <p14:section name="表紙" id="{cb37aead-2ff0-7a68-f6b4-d4f7f4ee77ad}">
           <p14:sldIdLst>
             <p14:sldId id="256"/>
           </p14:sldIdLst>
         </p14:section>
-        <p14:section name="導入" id="{1a1a161c-f068-8180-4abb-27428c6a920e}">
+        <p14:section name="導入" id="{d2fd6651-ae90-99cb-0ced-dfb28cd1f388}">
           <p14:sldIdLst>
             <p14:sldId id="257"/>
           </p14:sldIdLst>
         </p14:section>
-        <p14:section name="システム概要" id="{37331d4c-b1b1-16b3-1529-871d00fe227c}">
+        <p14:section name="システム概要" id="{f63feed6-a600-ade7-21f0-b71847b0db47}">
           <p14:sldIdLst>
             <p14:sldId id="258"/>
             <p14:sldId id="259"/>
@@ -138,13 +138,13 @@
             <p14:sldId id="261"/>
           </p14:sldIdLst>
         </p14:section>
-        <p14:section name="デモンストレーション" id="{03493b45-d768-d0d7-ed58-155ed7d8c03c}">
+        <p14:section name="デモンストレーション" id="{2b4bac3f-386d-b383-3926-25defd936c74}">
           <p14:sldIdLst>
             <p14:sldId id="262"/>
             <p14:sldId id="263"/>
           </p14:sldIdLst>
         </p14:section>
-        <p14:section name="振り返り" id="{128b8eba-e590-e39b-7b20-fffc50d730af}">
+        <p14:section name="振り返り" id="{f1c5504f-beab-a39b-cd95-b570aeb69e9d}">
           <p14:sldIdLst>
             <p14:sldId id="264"/>
             <p14:sldId id="265"/>
@@ -152,7 +152,7 @@
             <p14:sldId id="267"/>
           </p14:sldIdLst>
         </p14:section>
-        <p14:section name="要望・まとめ" id="{14061772-4478-6594-b2fe-7501d715155a}">
+        <p14:section name="要望・まとめ" id="{343297f9-f1f9-e9e9-2369-9297261430a4}">
           <p14:sldIdLst>
             <p14:sldId id="268"/>
             <p14:sldId id="269"/>
@@ -3209,7 +3209,7 @@
                   <a:srgbClr val="0B3C49"/>
                 </a:solidFill>
               </a:rPr>
-              <a:t>削除確認ダイアログの不具合</a:t>
+              <a:t>テスト項目にないエラーの発生</a:t>
             </a:r>
             <a:endParaRPr lang="en-US" sz="1300" dirty="0"/>
           </a:p>
@@ -3245,7 +3245,7 @@
                   <a:srgbClr val="1F2933"/>
                 </a:solidFill>
               </a:rPr>
-              <a:t>キャンセルを押してもフォームが送信され、選択が外れてしまっていた</a:t>
+              <a:t>オリジナルのテストで従業員一覧画面の更新を確認したところ性別を無選択で登録し、それを更新しようとするとエラーがおきた</a:t>
             </a:r>
             <a:endParaRPr lang="en-US" sz="1100" dirty="0"/>
           </a:p>
@@ -3306,7 +3306,7 @@
                   <a:srgbClr val="1F2933"/>
                 </a:solidFill>
               </a:rPr>
-              <a:t>onClick を return operation('delete') に変え、関数の最後で false を返すよう修正</a:t>
+              <a:t>ifでnullチェックを行い、安全に例外を回避した。</a:t>
             </a:r>
             <a:endParaRPr lang="en-US" sz="1100" dirty="0"/>
           </a:p>
@@ -4923,12 +4923,12 @@
               <a:buNone/>
             </a:pPr>
             <a:r>
-              <a:rPr lang="en-US" sz="1200" i="1" dirty="0">
-                <a:solidFill>
-                  <a:srgbClr val="C2410C"/>
-                </a:solidFill>
-              </a:rPr>
-              <a:t>【記入】</a:t>
+              <a:rPr lang="en-US" sz="1200" dirty="0">
+                <a:solidFill>
+                  <a:srgbClr val="1F2933"/>
+                </a:solidFill>
+              </a:rPr>
+              <a:t>仕様書を読み、テストやJSPとの不一致に対して食い違わないような対応が取れたこと</a:t>
             </a:r>
             <a:endParaRPr lang="en-US" sz="1200" dirty="0"/>
           </a:p>
@@ -4955,12 +4955,12 @@
               <a:buNone/>
             </a:pPr>
             <a:r>
-              <a:rPr lang="en-US" sz="1200" i="1" dirty="0">
-                <a:solidFill>
-                  <a:srgbClr val="C2410C"/>
-                </a:solidFill>
-              </a:rPr>
-              <a:t>【記入】</a:t>
+              <a:rPr lang="en-US" sz="1200" dirty="0">
+                <a:solidFill>
+                  <a:srgbClr val="1F2933"/>
+                </a:solidFill>
+              </a:rPr>
+              <a:t>想定外のエラーで止まった</a:t>
             </a:r>
             <a:endParaRPr lang="en-US" sz="1200" dirty="0"/>
           </a:p>
@@ -4987,12 +4987,12 @@
               <a:buNone/>
             </a:pPr>
             <a:r>
-              <a:rPr lang="en-US" sz="1200" i="1" dirty="0">
-                <a:solidFill>
-                  <a:srgbClr val="C2410C"/>
-                </a:solidFill>
-              </a:rPr>
-              <a:t>【記入】</a:t>
+              <a:rPr lang="en-US" sz="1200" dirty="0">
+                <a:solidFill>
+                  <a:srgbClr val="1F2933"/>
+                </a:solidFill>
+              </a:rPr>
+              <a:t>エラーに配慮した設計を考えること</a:t>
             </a:r>
             <a:endParaRPr lang="en-US" sz="1200" dirty="0"/>
           </a:p>
@@ -5889,7 +5889,7 @@
                   <a:srgbClr val="C2410C"/>
                 </a:solidFill>
               </a:rPr>
-              <a:t>【記入】例：開発環境構築の手順書がほしい</a:t>
+              <a:t>【記入】画面ごとのUI部品（生年月日のカレンダー等）の仕様や実装が統一されていない箇所があったので、お手本の実装環境を用意してテストをしてもらいたい</a:t>
             </a:r>
             <a:endParaRPr lang="en-US" sz="1300" dirty="0"/>
           </a:p>
@@ -12881,12 +12881,12 @@
               <a:buNone/>
             </a:pPr>
             <a:r>
-              <a:rPr lang="en-US" sz="1300" i="1" dirty="0">
-                <a:solidFill>
-                  <a:srgbClr val="C2410C"/>
-                </a:solidFill>
-              </a:rPr>
-              <a:t>【記入】従業員一覧・削除</a:t>
+              <a:rPr lang="en-US" sz="1300" dirty="0">
+                <a:solidFill>
+                  <a:srgbClr val="1F2933"/>
+                </a:solidFill>
+              </a:rPr>
+              <a:t>メンバー補助</a:t>
             </a:r>
             <a:endParaRPr lang="en-US" sz="1300" dirty="0"/>
           </a:p>

--- a/成果発表会資料_テンプレート.pptx
+++ b/成果発表会資料_テンプレート.pptx
@@ -120,17 +120,17 @@
   <p:extLst>
     <p:ext uri="{521415D9-36F7-43E2-AB2F-B90AF26B5E84}">
       <p14:sectionLst xmlns:p14="http://schemas.microsoft.com/office/powerpoint/2010/main">
-        <p14:section name="表紙" id="{cb37aead-2ff0-7a68-f6b4-d4f7f4ee77ad}">
+        <p14:section name="表紙" id="{2b319e0f-de31-d6f4-67d5-c7d89e6d9af3}">
           <p14:sldIdLst>
             <p14:sldId id="256"/>
           </p14:sldIdLst>
         </p14:section>
-        <p14:section name="導入" id="{d2fd6651-ae90-99cb-0ced-dfb28cd1f388}">
+        <p14:section name="導入" id="{c1f9dd46-7f40-9100-dea6-e4def2da4c78}">
           <p14:sldIdLst>
             <p14:sldId id="257"/>
           </p14:sldIdLst>
         </p14:section>
-        <p14:section name="システム概要" id="{f63feed6-a600-ade7-21f0-b71847b0db47}">
+        <p14:section name="システム概要" id="{8a457c5f-d814-7464-e241-174e4b7d1469}">
           <p14:sldIdLst>
             <p14:sldId id="258"/>
             <p14:sldId id="259"/>
@@ -138,13 +138,13 @@
             <p14:sldId id="261"/>
           </p14:sldIdLst>
         </p14:section>
-        <p14:section name="デモンストレーション" id="{2b4bac3f-386d-b383-3926-25defd936c74}">
+        <p14:section name="デモンストレーション" id="{78c08f1f-873b-21e8-c431-642cc13cd2da}">
           <p14:sldIdLst>
             <p14:sldId id="262"/>
             <p14:sldId id="263"/>
           </p14:sldIdLst>
         </p14:section>
-        <p14:section name="振り返り" id="{f1c5504f-beab-a39b-cd95-b570aeb69e9d}">
+        <p14:section name="振り返り" id="{6bf6fe0a-70b3-bc4f-d36e-fb851516fa36}">
           <p14:sldIdLst>
             <p14:sldId id="264"/>
             <p14:sldId id="265"/>
@@ -152,7 +152,7 @@
             <p14:sldId id="267"/>
           </p14:sldIdLst>
         </p14:section>
-        <p14:section name="要望・まとめ" id="{343297f9-f1f9-e9e9-2369-9297261430a4}">
+        <p14:section name="要望・まとめ" id="{046912a6-d9ae-0867-7b91-88e25ebc5be6}">
           <p14:sldIdLst>
             <p14:sldId id="268"/>
             <p14:sldId id="269"/>
@@ -2581,28 +2581,6 @@
               </a:rPr>
               <a:t>川端はると</a:t>
             </a:r>
-            <a:pPr indent="0" marL="0">
-              <a:buNone/>
-            </a:pPr>
-            <a:r>
-              <a:rPr lang="en-US" sz="1600" dirty="0">
-                <a:solidFill>
-                  <a:srgbClr val="FFFFFF"/>
-                </a:solidFill>
-              </a:rPr>
-              <a:t>／</a:t>
-            </a:r>
-            <a:pPr indent="0" marL="0">
-              <a:buNone/>
-            </a:pPr>
-            <a:r>
-              <a:rPr lang="en-US" sz="1600" i="1" dirty="0">
-                <a:solidFill>
-                  <a:srgbClr val="FDBA74"/>
-                </a:solidFill>
-              </a:rPr>
-              <a:t>【記入】氏名4</a:t>
-            </a:r>
             <a:endParaRPr lang="en-US" sz="1600" dirty="0"/>
           </a:p>
         </p:txBody>
@@ -2797,12 +2775,12 @@
               <a:buNone/>
             </a:pPr>
             <a:r>
-              <a:rPr lang="en-US" sz="1100" b="1" i="1" dirty="0">
+              <a:rPr lang="en-US" sz="1100" b="1" dirty="0">
                 <a:solidFill>
                   <a:srgbClr val="C2410C"/>
                 </a:solidFill>
               </a:rPr>
-              <a:t>【記入】</a:t>
+              <a:t>川端はると</a:t>
             </a:r>
             <a:endParaRPr lang="en-US" sz="1100" dirty="0"/>
           </a:p>
@@ -3662,12 +3640,12 @@
               <a:buNone/>
             </a:pPr>
             <a:r>
-              <a:rPr lang="en-US" sz="1100" b="1" i="1" dirty="0">
+              <a:rPr lang="en-US" sz="1100" b="1" dirty="0">
                 <a:solidFill>
                   <a:srgbClr val="C2410C"/>
                 </a:solidFill>
               </a:rPr>
-              <a:t>【記入】</a:t>
+              <a:t>川端はると</a:t>
             </a:r>
             <a:endParaRPr lang="en-US" sz="1100" dirty="0"/>
           </a:p>
@@ -4036,7 +4014,7 @@
                   <a:srgbClr val="64748B"/>
                 </a:solidFill>
               </a:rPr>
-              <a:t>※実施不要の2件を除く（最終版の数字に修正）</a:t>
+              <a:t>※実施不要と判断した2件を除く</a:t>
             </a:r>
             <a:endParaRPr lang="en-US" sz="900" dirty="0"/>
           </a:p>
@@ -4325,12 +4303,12 @@
               <a:buNone/>
             </a:pPr>
             <a:r>
-              <a:rPr lang="en-US" sz="1500" b="1" i="1" dirty="0">
-                <a:solidFill>
-                  <a:srgbClr val="C2410C"/>
-                </a:solidFill>
-              </a:rPr>
-              <a:t>【記入】チーム独自の工夫</a:t>
+              <a:rPr lang="en-US" sz="1500" b="1" dirty="0">
+                <a:solidFill>
+                  <a:srgbClr val="0B3C49"/>
+                </a:solidFill>
+              </a:rPr>
+              <a:t>プログラムによる構造・変数チェック</a:t>
             </a:r>
             <a:endParaRPr lang="en-US" sz="1500" dirty="0"/>
           </a:p>
@@ -4361,12 +4339,12 @@
               <a:buNone/>
             </a:pPr>
             <a:r>
-              <a:rPr lang="en-US" sz="1200" i="1" dirty="0">
-                <a:solidFill>
-                  <a:srgbClr val="C2410C"/>
-                </a:solidFill>
-              </a:rPr>
-              <a:t>【記入】例：画面デザイン、エラーメッセージの分かりやすさ、分担の工夫など</a:t>
+              <a:rPr lang="en-US" sz="1200" dirty="0">
+                <a:solidFill>
+                  <a:srgbClr val="1F2933"/>
+                </a:solidFill>
+              </a:rPr>
+              <a:t>単体テストプログラムを作成・実行し、各クラスや変数の定義に不整合がないか自動で検証した。</a:t>
             </a:r>
             <a:endParaRPr lang="en-US" sz="1200" dirty="0"/>
           </a:p>
@@ -4568,12 +4546,12 @@
         </p:nvSpPr>
         <p:spPr>
           <a:xfrm>
-            <a:off x="457200" y="1280160"/>
-            <a:ext cx="4023360" cy="1554480"/>
+            <a:off x="457200" y="1325880"/>
+            <a:ext cx="2615184" cy="3246120"/>
           </a:xfrm>
           <a:prstGeom prst="roundRect">
             <a:avLst>
-              <a:gd name="adj" fmla="val 4706"/>
+              <a:gd name="adj" fmla="val 2797"/>
             </a:avLst>
           </a:prstGeom>
           <a:solidFill>
@@ -4595,7 +4573,7 @@
         </p:nvSpPr>
         <p:spPr>
           <a:xfrm>
-            <a:off x="594360" y="1417320"/>
+            <a:off x="594360" y="1463040"/>
             <a:ext cx="347472" cy="347472"/>
           </a:xfrm>
           <a:prstGeom prst="ellipse">
@@ -4633,8 +4611,8 @@
         </p:nvSpPr>
         <p:spPr>
           <a:xfrm>
-            <a:off x="1051560" y="1399032"/>
-            <a:ext cx="3291840" cy="384048"/>
+            <a:off x="1051560" y="1444752"/>
+            <a:ext cx="1883664" cy="384048"/>
           </a:xfrm>
           <a:prstGeom prst="rect">
             <a:avLst/>
@@ -4669,8 +4647,8 @@
         </p:nvSpPr>
         <p:spPr>
           <a:xfrm>
-            <a:off x="640080" y="1847088"/>
-            <a:ext cx="3657600" cy="896112"/>
+            <a:off x="640080" y="1892808"/>
+            <a:ext cx="2249424" cy="2587752"/>
           </a:xfrm>
           <a:prstGeom prst="rect">
             <a:avLst/>
@@ -4704,12 +4682,12 @@
               <a:buNone/>
             </a:pPr>
             <a:r>
-              <a:rPr lang="en-US" sz="1200" i="1" dirty="0">
-                <a:solidFill>
-                  <a:srgbClr val="C2410C"/>
-                </a:solidFill>
-              </a:rPr>
-              <a:t>【記入】</a:t>
+              <a:rPr lang="en-US" sz="1200" dirty="0">
+                <a:solidFill>
+                  <a:srgbClr val="1F2933"/>
+                </a:solidFill>
+              </a:rPr>
+              <a:t>今までの授業での実習が活きていて実装のスピードが格段に上がっていた。</a:t>
             </a:r>
             <a:endParaRPr lang="en-US" sz="1200" dirty="0"/>
           </a:p>
@@ -4736,12 +4714,12 @@
               <a:buNone/>
             </a:pPr>
             <a:r>
-              <a:rPr lang="en-US" sz="1200" i="1" dirty="0">
-                <a:solidFill>
-                  <a:srgbClr val="C2410C"/>
-                </a:solidFill>
-              </a:rPr>
-              <a:t>【記入】</a:t>
+              <a:rPr lang="en-US" sz="1200" dirty="0">
+                <a:solidFill>
+                  <a:srgbClr val="1F2933"/>
+                </a:solidFill>
+              </a:rPr>
+              <a:t>仕様書やテストケースの理解が曖昧なまま作業を指示してしまう場面があった。</a:t>
             </a:r>
             <a:endParaRPr lang="en-US" sz="1200" dirty="0"/>
           </a:p>
@@ -4768,12 +4746,12 @@
               <a:buNone/>
             </a:pPr>
             <a:r>
-              <a:rPr lang="en-US" sz="1200" i="1" dirty="0">
-                <a:solidFill>
-                  <a:srgbClr val="C2410C"/>
-                </a:solidFill>
-              </a:rPr>
-              <a:t>【記入】</a:t>
+              <a:rPr lang="en-US" sz="1200" dirty="0">
+                <a:solidFill>
+                  <a:srgbClr val="1F2933"/>
+                </a:solidFill>
+              </a:rPr>
+              <a:t>班員の不明点や自分の不明点を明確にして認識の齟齬がないようにしてから作業を開始したい。</a:t>
             </a:r>
             <a:endParaRPr lang="en-US" sz="1200" dirty="0"/>
           </a:p>
@@ -4787,12 +4765,12 @@
         </p:nvSpPr>
         <p:spPr>
           <a:xfrm>
-            <a:off x="4663440" y="1280160"/>
-            <a:ext cx="4023360" cy="1554480"/>
+            <a:off x="3264408" y="1325880"/>
+            <a:ext cx="2615184" cy="3246120"/>
           </a:xfrm>
           <a:prstGeom prst="roundRect">
             <a:avLst>
-              <a:gd name="adj" fmla="val 4706"/>
+              <a:gd name="adj" fmla="val 2797"/>
             </a:avLst>
           </a:prstGeom>
           <a:solidFill>
@@ -4814,7 +4792,7 @@
         </p:nvSpPr>
         <p:spPr>
           <a:xfrm>
-            <a:off x="4800600" y="1417320"/>
+            <a:off x="3401568" y="1463040"/>
             <a:ext cx="347472" cy="347472"/>
           </a:xfrm>
           <a:prstGeom prst="ellipse">
@@ -4852,8 +4830,8 @@
         </p:nvSpPr>
         <p:spPr>
           <a:xfrm>
-            <a:off x="5257800" y="1399032"/>
-            <a:ext cx="3291840" cy="384048"/>
+            <a:off x="3858768" y="1444752"/>
+            <a:ext cx="1883664" cy="384048"/>
           </a:xfrm>
           <a:prstGeom prst="rect">
             <a:avLst/>
@@ -4888,8 +4866,8 @@
         </p:nvSpPr>
         <p:spPr>
           <a:xfrm>
-            <a:off x="4846320" y="1847088"/>
-            <a:ext cx="3657600" cy="896112"/>
+            <a:off x="3447288" y="1892808"/>
+            <a:ext cx="2249424" cy="2587752"/>
           </a:xfrm>
           <a:prstGeom prst="rect">
             <a:avLst/>
@@ -5006,12 +4984,12 @@
         </p:nvSpPr>
         <p:spPr>
           <a:xfrm>
-            <a:off x="457200" y="2971800"/>
-            <a:ext cx="4023360" cy="1554480"/>
+            <a:off x="6071616" y="1325880"/>
+            <a:ext cx="2615184" cy="3246120"/>
           </a:xfrm>
           <a:prstGeom prst="roundRect">
             <a:avLst>
-              <a:gd name="adj" fmla="val 4706"/>
+              <a:gd name="adj" fmla="val 2797"/>
             </a:avLst>
           </a:prstGeom>
           <a:solidFill>
@@ -5033,7 +5011,7 @@
         </p:nvSpPr>
         <p:spPr>
           <a:xfrm>
-            <a:off x="594360" y="3108960"/>
+            <a:off x="6208776" y="1463040"/>
             <a:ext cx="347472" cy="347472"/>
           </a:xfrm>
           <a:prstGeom prst="ellipse">
@@ -5071,8 +5049,8 @@
         </p:nvSpPr>
         <p:spPr>
           <a:xfrm>
-            <a:off x="1051560" y="3090672"/>
-            <a:ext cx="3291840" cy="384048"/>
+            <a:off x="6665976" y="1444752"/>
+            <a:ext cx="1883664" cy="384048"/>
           </a:xfrm>
           <a:prstGeom prst="rect">
             <a:avLst/>
@@ -5107,8 +5085,8 @@
         </p:nvSpPr>
         <p:spPr>
           <a:xfrm>
-            <a:off x="640080" y="3538728"/>
-            <a:ext cx="3657600" cy="896112"/>
+            <a:off x="6254496" y="1892808"/>
+            <a:ext cx="2249424" cy="2587752"/>
           </a:xfrm>
           <a:prstGeom prst="rect">
             <a:avLst/>
@@ -5142,12 +5120,12 @@
               <a:buNone/>
             </a:pPr>
             <a:r>
-              <a:rPr lang="en-US" sz="1200" i="1" dirty="0">
-                <a:solidFill>
-                  <a:srgbClr val="C2410C"/>
-                </a:solidFill>
-              </a:rPr>
-              <a:t>【記入】</a:t>
+              <a:rPr lang="en-US" sz="1200" dirty="0">
+                <a:solidFill>
+                  <a:srgbClr val="1F2933"/>
+                </a:solidFill>
+              </a:rPr>
+              <a:t>班員にフォローしてもらいながらも完成できたこと</a:t>
             </a:r>
             <a:endParaRPr lang="en-US" sz="1200" dirty="0"/>
           </a:p>
@@ -5174,12 +5152,12 @@
               <a:buNone/>
             </a:pPr>
             <a:r>
-              <a:rPr lang="en-US" sz="1200" i="1" dirty="0">
-                <a:solidFill>
-                  <a:srgbClr val="C2410C"/>
-                </a:solidFill>
-              </a:rPr>
-              <a:t>【記入】</a:t>
+              <a:rPr lang="en-US" sz="1200" dirty="0">
+                <a:solidFill>
+                  <a:srgbClr val="1F2933"/>
+                </a:solidFill>
+              </a:rPr>
+              <a:t>仕様書の理解が浅く、ギャップが生まれてしまい班員より作業が遅れてしまったこと。</a:t>
             </a:r>
             <a:endParaRPr lang="en-US" sz="1200" dirty="0"/>
           </a:p>
@@ -5206,231 +5184,12 @@
               <a:buNone/>
             </a:pPr>
             <a:r>
-              <a:rPr lang="en-US" sz="1200" i="1" dirty="0">
-                <a:solidFill>
-                  <a:srgbClr val="C2410C"/>
-                </a:solidFill>
-              </a:rPr>
-              <a:t>【記入】</a:t>
-            </a:r>
-            <a:endParaRPr lang="en-US" sz="1200" dirty="0"/>
-          </a:p>
-        </p:txBody>
-      </p:sp>
-      <p:sp>
-        <p:nvSpPr>
-          <p:cNvPr id="17" name="感想背景4"/>
-          <p:cNvSpPr/>
-          <p:nvPr/>
-        </p:nvSpPr>
-        <p:spPr>
-          <a:xfrm>
-            <a:off x="4663440" y="2971800"/>
-            <a:ext cx="4023360" cy="1554480"/>
-          </a:xfrm>
-          <a:prstGeom prst="roundRect">
-            <a:avLst>
-              <a:gd name="adj" fmla="val 4706"/>
-            </a:avLst>
-          </a:prstGeom>
-          <a:solidFill>
-            <a:srgbClr val="EEF4F5"/>
-          </a:solidFill>
-          <a:ln w="12700">
-            <a:solidFill>
-              <a:srgbClr val="EEF4F5"/>
-            </a:solidFill>
-            <a:prstDash val="solid"/>
-          </a:ln>
-        </p:spPr>
-      </p:sp>
-      <p:sp>
-        <p:nvSpPr>
-          <p:cNvPr id="18" name="番号バッジ4"/>
-          <p:cNvSpPr txBox="1"/>
-          <p:nvPr/>
-        </p:nvSpPr>
-        <p:spPr>
-          <a:xfrm>
-            <a:off x="4800600" y="3108960"/>
-            <a:ext cx="347472" cy="347472"/>
-          </a:xfrm>
-          <a:prstGeom prst="ellipse">
-            <a:avLst/>
-          </a:prstGeom>
-          <a:solidFill>
-            <a:srgbClr val="0F7C8C"/>
-          </a:solidFill>
-          <a:ln/>
-        </p:spPr>
-        <p:txBody>
-          <a:bodyPr wrap="square" lIns="0" tIns="0" rIns="0" bIns="0" rtlCol="0" anchor="ctr"/>
-          <a:lstStyle/>
-          <a:p>
-            <a:pPr algn="ctr" indent="0" marL="0">
-              <a:buNone/>
-            </a:pPr>
-            <a:r>
-              <a:rPr lang="en-US" sz="1300" b="1" dirty="0">
-                <a:solidFill>
-                  <a:srgbClr val="FFFFFF"/>
-                </a:solidFill>
-              </a:rPr>
-              <a:t>4</a:t>
-            </a:r>
-            <a:endParaRPr lang="en-US" sz="1300" dirty="0"/>
-          </a:p>
-        </p:txBody>
-      </p:sp>
-      <p:sp>
-        <p:nvSpPr>
-          <p:cNvPr id="19" name="感想氏名4"/>
-          <p:cNvSpPr txBox="1"/>
-          <p:nvPr/>
-        </p:nvSpPr>
-        <p:spPr>
-          <a:xfrm>
-            <a:off x="5257800" y="3090672"/>
-            <a:ext cx="3291840" cy="384048"/>
-          </a:xfrm>
-          <a:prstGeom prst="rect">
-            <a:avLst/>
-          </a:prstGeom>
-          <a:noFill/>
-          <a:ln/>
-        </p:spPr>
-        <p:txBody>
-          <a:bodyPr wrap="square" lIns="0" tIns="0" rIns="0" bIns="0" rtlCol="0" anchor="ctr"/>
-          <a:lstStyle/>
-          <a:p>
-            <a:pPr indent="0" marL="0">
-              <a:buNone/>
-            </a:pPr>
-            <a:r>
-              <a:rPr lang="en-US" sz="1400" b="1" i="1" dirty="0">
-                <a:solidFill>
-                  <a:srgbClr val="C2410C"/>
-                </a:solidFill>
-              </a:rPr>
-              <a:t>【記入】氏名4</a:t>
-            </a:r>
-            <a:endParaRPr lang="en-US" sz="1400" dirty="0"/>
-          </a:p>
-        </p:txBody>
-      </p:sp>
-      <p:sp>
-        <p:nvSpPr>
-          <p:cNvPr id="20" name="感想本文4"/>
-          <p:cNvSpPr txBox="1"/>
-          <p:nvPr/>
-        </p:nvSpPr>
-        <p:spPr>
-          <a:xfrm>
-            <a:off x="4846320" y="3538728"/>
-            <a:ext cx="3657600" cy="896112"/>
-          </a:xfrm>
-          <a:prstGeom prst="rect">
-            <a:avLst/>
-          </a:prstGeom>
-          <a:noFill/>
-          <a:ln/>
-        </p:spPr>
-        <p:txBody>
-          <a:bodyPr wrap="square" lIns="0" tIns="0" rIns="0" bIns="0" rtlCol="0" anchor="t"/>
-          <a:lstStyle/>
-          <a:p>
-            <a:pPr marL="342900" indent="-342900">
-              <a:spcAft>
-                <a:spcPts val="200"/>
-              </a:spcAft>
-              <a:buSzPct val="100000"/>
-              <a:buChar char="•"/>
-            </a:pPr>
-            <a:r>
-              <a:rPr lang="en-US" sz="1200" b="1" dirty="0">
-                <a:solidFill>
-                  <a:srgbClr val="0B3C49"/>
-                </a:solidFill>
-              </a:rPr>
-              <a:t>良かった点：</a:t>
-            </a:r>
-            <a:pPr indent="0" marL="0">
-              <a:spcAft>
-                <a:spcPts val="200"/>
-              </a:spcAft>
-              <a:buNone/>
-            </a:pPr>
-            <a:r>
-              <a:rPr lang="en-US" sz="1200" i="1" dirty="0">
-                <a:solidFill>
-                  <a:srgbClr val="C2410C"/>
-                </a:solidFill>
-              </a:rPr>
-              <a:t>【記入】</a:t>
-            </a:r>
-            <a:endParaRPr lang="en-US" sz="1200" dirty="0"/>
-          </a:p>
-          <a:p>
-            <a:pPr marL="342900" indent="-342900">
-              <a:spcAft>
-                <a:spcPts val="200"/>
-              </a:spcAft>
-              <a:buSzPct val="100000"/>
-              <a:buChar char="•"/>
-            </a:pPr>
-            <a:r>
-              <a:rPr lang="en-US" sz="1200" b="1" dirty="0">
-                <a:solidFill>
-                  <a:srgbClr val="0B3C49"/>
-                </a:solidFill>
-              </a:rPr>
-              <a:t>反省点：</a:t>
-            </a:r>
-            <a:pPr indent="0" marL="0">
-              <a:spcAft>
-                <a:spcPts val="200"/>
-              </a:spcAft>
-              <a:buNone/>
-            </a:pPr>
-            <a:r>
-              <a:rPr lang="en-US" sz="1200" i="1" dirty="0">
-                <a:solidFill>
-                  <a:srgbClr val="C2410C"/>
-                </a:solidFill>
-              </a:rPr>
-              <a:t>【記入】</a:t>
-            </a:r>
-            <a:endParaRPr lang="en-US" sz="1200" dirty="0"/>
-          </a:p>
-          <a:p>
-            <a:pPr marL="342900" indent="-342900">
-              <a:spcAft>
-                <a:spcPts val="200"/>
-              </a:spcAft>
-              <a:buSzPct val="100000"/>
-              <a:buChar char="•"/>
-            </a:pPr>
-            <a:r>
-              <a:rPr lang="en-US" sz="1200" b="1" dirty="0">
-                <a:solidFill>
-                  <a:srgbClr val="0B3C49"/>
-                </a:solidFill>
-              </a:rPr>
-              <a:t>次に活かしたいこと：</a:t>
-            </a:r>
-            <a:pPr indent="0" marL="0">
-              <a:spcAft>
-                <a:spcPts val="200"/>
-              </a:spcAft>
-              <a:buNone/>
-            </a:pPr>
-            <a:r>
-              <a:rPr lang="en-US" sz="1200" i="1" dirty="0">
-                <a:solidFill>
-                  <a:srgbClr val="C2410C"/>
-                </a:solidFill>
-              </a:rPr>
-              <a:t>【記入】</a:t>
+              <a:rPr lang="en-US" sz="1200" dirty="0">
+                <a:solidFill>
+                  <a:srgbClr val="1F2933"/>
+                </a:solidFill>
+              </a:rPr>
+              <a:t>仕様書、設計書をよく理解しること。</a:t>
             </a:r>
             <a:endParaRPr lang="en-US" sz="1200" dirty="0"/>
           </a:p>
@@ -5588,12 +5347,12 @@
               <a:buNone/>
             </a:pPr>
             <a:r>
-              <a:rPr lang="en-US" sz="1100" b="1" i="1" dirty="0">
+              <a:rPr lang="en-US" sz="1100" b="1" dirty="0">
                 <a:solidFill>
                   <a:srgbClr val="C2410C"/>
                 </a:solidFill>
               </a:rPr>
-              <a:t>【記入】</a:t>
+              <a:t>新井真佐斗</a:t>
             </a:r>
             <a:endParaRPr lang="en-US" sz="1100" dirty="0"/>
           </a:p>
@@ -5727,12 +5486,12 @@
               <a:buChar char="•"/>
             </a:pPr>
             <a:r>
-              <a:rPr lang="en-US" sz="1300" i="1" dirty="0">
-                <a:solidFill>
-                  <a:srgbClr val="C2410C"/>
-                </a:solidFill>
-              </a:rPr>
-              <a:t>【記入】例：今回の工程（設計〜テスト）を企業課題でも同じ流れで進めたい</a:t>
+              <a:rPr lang="en-US" sz="1300" dirty="0">
+                <a:solidFill>
+                  <a:srgbClr val="1F2933"/>
+                </a:solidFill>
+              </a:rPr>
+              <a:t>今回の工程（設計〜テスト）を企業課題でも同じ流れで進めたい</a:t>
             </a:r>
             <a:endParaRPr lang="en-US" sz="1300" dirty="0"/>
           </a:p>
@@ -5745,30 +5504,12 @@
               <a:buChar char="•"/>
             </a:pPr>
             <a:r>
-              <a:rPr lang="en-US" sz="1300" i="1" dirty="0">
-                <a:solidFill>
-                  <a:srgbClr val="C2410C"/>
-                </a:solidFill>
-              </a:rPr>
-              <a:t>【記入】例：レビューの観点を事前に共有してほしい</a:t>
-            </a:r>
-            <a:endParaRPr lang="en-US" sz="1300" dirty="0"/>
-          </a:p>
-          <a:p>
-            <a:pPr marL="342900" indent="-342900">
-              <a:spcAft>
-                <a:spcPts val="600"/>
-              </a:spcAft>
-              <a:buSzPct val="100000"/>
-              <a:buChar char="•"/>
-            </a:pPr>
-            <a:r>
-              <a:rPr lang="en-US" sz="1300" i="1" dirty="0">
-                <a:solidFill>
-                  <a:srgbClr val="C2410C"/>
-                </a:solidFill>
-              </a:rPr>
-              <a:t>【記入】</a:t>
+              <a:rPr lang="en-US" sz="1300" dirty="0">
+                <a:solidFill>
+                  <a:srgbClr val="1F2933"/>
+                </a:solidFill>
+              </a:rPr>
+              <a:t>各々で作業をするため要件定義書をもとにレビューをしてほしい</a:t>
             </a:r>
             <a:endParaRPr lang="en-US" sz="1300" dirty="0"/>
           </a:p>
@@ -5866,12 +5607,12 @@
               <a:buChar char="•"/>
             </a:pPr>
             <a:r>
-              <a:rPr lang="en-US" sz="1300" i="1" dirty="0">
-                <a:solidFill>
-                  <a:srgbClr val="C2410C"/>
-                </a:solidFill>
-              </a:rPr>
-              <a:t>【記入】例：配布資料のテーブル定義と画面の文字数上限をそろえてほしい</a:t>
+              <a:rPr lang="en-US" sz="1300" dirty="0">
+                <a:solidFill>
+                  <a:srgbClr val="1F2933"/>
+                </a:solidFill>
+              </a:rPr>
+              <a:t>配布資料のテーブル定義と画面の文字数上限をそろえてほしい</a:t>
             </a:r>
             <a:endParaRPr lang="en-US" sz="1300" dirty="0"/>
           </a:p>
@@ -5884,30 +5625,12 @@
               <a:buChar char="•"/>
             </a:pPr>
             <a:r>
-              <a:rPr lang="en-US" sz="1300" i="1" dirty="0">
-                <a:solidFill>
-                  <a:srgbClr val="C2410C"/>
-                </a:solidFill>
-              </a:rPr>
-              <a:t>【記入】画面ごとのUI部品（生年月日のカレンダー等）の仕様や実装が統一されていない箇所があったので、お手本の実装環境を用意してテストをしてもらいたい</a:t>
-            </a:r>
-            <a:endParaRPr lang="en-US" sz="1300" dirty="0"/>
-          </a:p>
-          <a:p>
-            <a:pPr marL="342900" indent="-342900">
-              <a:spcAft>
-                <a:spcPts val="600"/>
-              </a:spcAft>
-              <a:buSzPct val="100000"/>
-              <a:buChar char="•"/>
-            </a:pPr>
-            <a:r>
-              <a:rPr lang="en-US" sz="1300" i="1" dirty="0">
-                <a:solidFill>
-                  <a:srgbClr val="C2410C"/>
-                </a:solidFill>
-              </a:rPr>
-              <a:t>【記入】</a:t>
+              <a:rPr lang="en-US" sz="1300" dirty="0">
+                <a:solidFill>
+                  <a:srgbClr val="1F2933"/>
+                </a:solidFill>
+              </a:rPr>
+              <a:t>画面ごとのUI部品（生年月日のカレンダー等）の仕様や実装が統一されていない箇所があったので、お手本の実装環境を用意してテストをしてもらいたい</a:t>
             </a:r>
             <a:endParaRPr lang="en-US" sz="1300" dirty="0"/>
           </a:p>
@@ -6118,28 +5841,6 @@
                 </a:solidFill>
               </a:rPr>
               <a:t>川端はると</a:t>
-            </a:r>
-            <a:pPr indent="0" marL="0">
-              <a:buNone/>
-            </a:pPr>
-            <a:r>
-              <a:rPr lang="en-US" sz="1600" b="1" dirty="0">
-                <a:solidFill>
-                  <a:srgbClr val="FFFFFF"/>
-                </a:solidFill>
-              </a:rPr>
-              <a:t>／</a:t>
-            </a:r>
-            <a:pPr indent="0" marL="0">
-              <a:buNone/>
-            </a:pPr>
-            <a:r>
-              <a:rPr lang="en-US" sz="1600" b="1" i="1" dirty="0">
-                <a:solidFill>
-                  <a:srgbClr val="FDBA74"/>
-                </a:solidFill>
-              </a:rPr>
-              <a:t>【記入】氏名4</a:t>
             </a:r>
             <a:endParaRPr lang="en-US" sz="1600" dirty="0"/>
           </a:p>
@@ -6800,12 +6501,12 @@
                         <a:buNone/>
                       </a:pPr>
                       <a:r>
-                        <a:rPr lang="en-US" sz="1300" i="1" dirty="0">
+                        <a:rPr lang="en-US" sz="1300" dirty="0">
                           <a:solidFill>
-                            <a:srgbClr val="C2410C"/>
+                            <a:srgbClr val="1F2933"/>
                           </a:solidFill>
                         </a:rPr>
-                        <a:t>【記入】</a:t>
+                        <a:t>新井真佐斗</a:t>
                       </a:r>
                       <a:endParaRPr lang="en-US" sz="1300" dirty="0"/>
                     </a:p>
@@ -7092,12 +6793,12 @@
                         <a:buNone/>
                       </a:pPr>
                       <a:r>
-                        <a:rPr lang="en-US" sz="1300" i="1" dirty="0">
+                        <a:rPr lang="en-US" sz="1300" dirty="0">
                           <a:solidFill>
-                            <a:srgbClr val="C2410C"/>
+                            <a:srgbClr val="1F2933"/>
                           </a:solidFill>
                         </a:rPr>
-                        <a:t>【記入】</a:t>
+                        <a:t>栗原聡汰</a:t>
                       </a:r>
                       <a:endParaRPr lang="en-US" sz="1300" dirty="0"/>
                     </a:p>
@@ -7384,12 +7085,12 @@
                         <a:buNone/>
                       </a:pPr>
                       <a:r>
-                        <a:rPr lang="en-US" sz="1300" i="1" dirty="0">
+                        <a:rPr lang="en-US" sz="1300" dirty="0">
                           <a:solidFill>
-                            <a:srgbClr val="C2410C"/>
+                            <a:srgbClr val="1F2933"/>
                           </a:solidFill>
                         </a:rPr>
-                        <a:t>【記入】</a:t>
+                        <a:t>川端はると</a:t>
                       </a:r>
                       <a:endParaRPr lang="en-US" sz="1300" dirty="0"/>
                     </a:p>
@@ -7960,12 +7661,12 @@
                         <a:buNone/>
                       </a:pPr>
                       <a:r>
-                        <a:rPr lang="en-US" sz="1300" i="1" dirty="0">
+                        <a:rPr lang="en-US" sz="1300" dirty="0">
                           <a:solidFill>
-                            <a:srgbClr val="C2410C"/>
+                            <a:srgbClr val="1F2933"/>
                           </a:solidFill>
                         </a:rPr>
-                        <a:t>【記入】</a:t>
+                        <a:t>新井真佐斗</a:t>
                       </a:r>
                       <a:endParaRPr lang="en-US" sz="1300" dirty="0"/>
                     </a:p>
@@ -8492,12 +8193,12 @@
               <a:buNone/>
             </a:pPr>
             <a:r>
-              <a:rPr lang="en-US" sz="1100" b="1" i="1" dirty="0">
+              <a:rPr lang="en-US" sz="1100" b="1" dirty="0">
                 <a:solidFill>
                   <a:srgbClr val="C2410C"/>
                 </a:solidFill>
               </a:rPr>
-              <a:t>【記入】</a:t>
+              <a:t>新井真佐斗</a:t>
             </a:r>
             <a:endParaRPr lang="en-US" sz="1100" dirty="0"/>
           </a:p>
@@ -9468,12 +9169,12 @@
               <a:buNone/>
             </a:pPr>
             <a:r>
-              <a:rPr lang="en-US" sz="1100" b="1" i="1" dirty="0">
+              <a:rPr lang="en-US" sz="1100" b="1" dirty="0">
                 <a:solidFill>
                   <a:srgbClr val="C2410C"/>
                 </a:solidFill>
               </a:rPr>
-              <a:t>【記入】</a:t>
+              <a:t>新井真佐斗</a:t>
             </a:r>
             <a:endParaRPr lang="en-US" sz="1100" dirty="0"/>
           </a:p>
@@ -10717,12 +10418,12 @@
               <a:buNone/>
             </a:pPr>
             <a:r>
-              <a:rPr lang="en-US" sz="1100" b="1" i="1" dirty="0">
+              <a:rPr lang="en-US" sz="1100" b="1" dirty="0">
                 <a:solidFill>
                   <a:srgbClr val="C2410C"/>
                 </a:solidFill>
               </a:rPr>
-              <a:t>【記入】</a:t>
+              <a:t>新井真佐斗</a:t>
             </a:r>
             <a:endParaRPr lang="en-US" sz="1100" dirty="0"/>
           </a:p>
@@ -12103,12 +11804,12 @@
               <a:buNone/>
             </a:pPr>
             <a:r>
-              <a:rPr lang="en-US" sz="1100" b="1" i="1" dirty="0">
+              <a:rPr lang="en-US" sz="1100" b="1" dirty="0">
                 <a:solidFill>
                   <a:srgbClr val="C2410C"/>
                 </a:solidFill>
               </a:rPr>
-              <a:t>【記入】</a:t>
+              <a:t>新井真佐斗</a:t>
             </a:r>
             <a:endParaRPr lang="en-US" sz="1100" dirty="0"/>
           </a:p>
@@ -12926,57 +12627,12 @@
               <a:buNone/>
             </a:pPr>
             <a:r>
-              <a:rPr lang="en-US" sz="1300" i="1" dirty="0">
-                <a:solidFill>
-                  <a:srgbClr val="C2410C"/>
-                </a:solidFill>
-              </a:rPr>
-              <a:t>【記入】従業員登録</a:t>
-            </a:r>
-            <a:endParaRPr lang="en-US" sz="1300" dirty="0"/>
-          </a:p>
-          <a:p>
-            <a:pPr indent="0" marL="0">
-              <a:spcAft>
-                <a:spcPts val="400"/>
-              </a:spcAft>
-              <a:buNone/>
-            </a:pPr>
-            <a:r>
-              <a:rPr lang="en-US" sz="1300" b="1" i="1" dirty="0">
-                <a:solidFill>
-                  <a:srgbClr val="C2410C"/>
-                </a:solidFill>
-              </a:rPr>
-              <a:t>【記入】氏名4</a:t>
-            </a:r>
-            <a:pPr indent="0" marL="0">
-              <a:spcAft>
-                <a:spcPts val="400"/>
-              </a:spcAft>
-              <a:buNone/>
-            </a:pPr>
-            <a:r>
               <a:rPr lang="en-US" sz="1300" dirty="0">
                 <a:solidFill>
                   <a:srgbClr val="1F2933"/>
                 </a:solidFill>
               </a:rPr>
-              <a:t>：</a:t>
-            </a:r>
-            <a:pPr indent="0" marL="0">
-              <a:spcAft>
-                <a:spcPts val="400"/>
-              </a:spcAft>
-              <a:buNone/>
-            </a:pPr>
-            <a:r>
-              <a:rPr lang="en-US" sz="1300" i="1" dirty="0">
-                <a:solidFill>
-                  <a:srgbClr val="C2410C"/>
-                </a:solidFill>
-              </a:rPr>
-              <a:t>【記入】追加課題・テスト取りまとめ</a:t>
+              <a:t>従業員登録</a:t>
             </a:r>
             <a:endParaRPr lang="en-US" sz="1300" dirty="0"/>
           </a:p>
@@ -13134,12 +12790,12 @@
               <a:buNone/>
             </a:pPr>
             <a:r>
-              <a:rPr lang="en-US" sz="1100" b="1" i="1" dirty="0">
+              <a:rPr lang="en-US" sz="1100" b="1" dirty="0">
                 <a:solidFill>
                   <a:srgbClr val="C2410C"/>
                 </a:solidFill>
               </a:rPr>
-              <a:t>【記入】</a:t>
+              <a:t>栗原聡汰</a:t>
             </a:r>
             <a:endParaRPr lang="en-US" sz="1100" dirty="0"/>
           </a:p>
@@ -13789,12 +13445,12 @@
               <a:buNone/>
             </a:pPr>
             <a:r>
-              <a:rPr lang="en-US" sz="1200" i="1" dirty="0">
-                <a:solidFill>
-                  <a:srgbClr val="C2410C"/>
-                </a:solidFill>
-              </a:rPr>
-              <a:t>【記入】（例：metro）</a:t>
+              <a:rPr lang="en-US" sz="1200" dirty="0">
+                <a:solidFill>
+                  <a:srgbClr val="1F2933"/>
+                </a:solidFill>
+              </a:rPr>
+              <a:t>metro</a:t>
             </a:r>
             <a:endParaRPr lang="en-US" sz="1200" dirty="0"/>
           </a:p>
@@ -13952,12 +13608,12 @@
               <a:buNone/>
             </a:pPr>
             <a:r>
-              <a:rPr lang="en-US" sz="1100" b="1" i="1" dirty="0">
+              <a:rPr lang="en-US" sz="1100" b="1" dirty="0">
                 <a:solidFill>
                   <a:srgbClr val="C2410C"/>
                 </a:solidFill>
               </a:rPr>
-              <a:t>【記入】</a:t>
+              <a:t>栗原聡汰</a:t>
             </a:r>
             <a:endParaRPr lang="en-US" sz="1100" dirty="0"/>
           </a:p>
@@ -14364,13 +14020,12 @@
             <a:avLst/>
           </a:prstGeom>
           <a:solidFill>
-            <a:srgbClr val="FFFAF6"/>
+            <a:srgbClr val="EEF4F5"/>
           </a:solidFill>
-          <a:ln w="12700">
+          <a:ln>
             <a:solidFill>
-              <a:srgbClr val="C2410C"/>
+              <a:srgbClr val="EEF4F5"/>
             </a:solidFill>
-            <a:prstDash val="dash"/>
           </a:ln>
         </p:spPr>
         <p:txBody>
@@ -14381,12 +14036,12 @@
               <a:buNone/>
             </a:pPr>
             <a:r>
-              <a:rPr lang="en-US" sz="1400" i="1" dirty="0">
-                <a:solidFill>
-                  <a:srgbClr val="C2410C"/>
-                </a:solidFill>
-              </a:rPr>
-              <a:t>【記入】例：更新画面を開いた時点で現在の値が入っているので、変更したい項目だけ直せば済む</a:t>
+              <a:rPr lang="en-US" sz="1400" dirty="0">
+                <a:solidFill>
+                  <a:srgbClr val="1F2933"/>
+                </a:solidFill>
+              </a:rPr>
+              <a:t>更新画面を開いた時点で現在の値が入っているので、変更したい項目だけ直せば済む</a:t>
             </a:r>
             <a:endParaRPr lang="en-US" sz="1400" dirty="0"/>
           </a:p>
@@ -14544,12 +14199,12 @@
               <a:buNone/>
             </a:pPr>
             <a:r>
-              <a:rPr lang="en-US" sz="1100" b="1" i="1" dirty="0">
+              <a:rPr lang="en-US" sz="1100" b="1" dirty="0">
                 <a:solidFill>
                   <a:srgbClr val="C2410C"/>
                 </a:solidFill>
               </a:rPr>
-              <a:t>【記入】</a:t>
+              <a:t>川端はると</a:t>
             </a:r>
             <a:endParaRPr lang="en-US" sz="1100" dirty="0"/>
           </a:p>
@@ -14717,12 +14372,12 @@
               <a:buNone/>
             </a:pPr>
             <a:r>
-              <a:rPr lang="en-US" sz="1300" i="1" dirty="0">
-                <a:solidFill>
-                  <a:srgbClr val="C2410C"/>
-                </a:solidFill>
-              </a:rPr>
-              <a:t>【記入】例：設計書を先に固めると、分担して実装してもつなげやすい</a:t>
+              <a:rPr lang="en-US" sz="1300" dirty="0">
+                <a:solidFill>
+                  <a:srgbClr val="1F2933"/>
+                </a:solidFill>
+              </a:rPr>
+              <a:t>仕様書と実際の実装における差異を早期に見つけ、テスト仕様書や記録へ確実に反映させる工程管理の重要性を学んだ。</a:t>
             </a:r>
             <a:endParaRPr lang="en-US" sz="1300" dirty="0"/>
           </a:p>
@@ -14854,12 +14509,12 @@
               <a:buNone/>
             </a:pPr>
             <a:r>
-              <a:rPr lang="en-US" sz="1300" i="1" dirty="0">
-                <a:solidFill>
-                  <a:srgbClr val="C2410C"/>
-                </a:solidFill>
-              </a:rPr>
-              <a:t>【記入】例：Servlet・JSP・DAOに役割を分ける構成、JDBCでのDB操作</a:t>
+              <a:rPr lang="en-US" sz="1300" dirty="0">
+                <a:solidFill>
+                  <a:srgbClr val="1F2933"/>
+                </a:solidFill>
+              </a:rPr>
+              <a:t>Servlet・JSP・DAO・Modelによるデータ連携やJDBCでのDB操作に加え、想定外のエラーを防ぐための例外処理やnullチェックの重要性を学んだ。</a:t>
             </a:r>
             <a:endParaRPr lang="en-US" sz="1300" dirty="0"/>
           </a:p>
@@ -14991,12 +14646,12 @@
               <a:buNone/>
             </a:pPr>
             <a:r>
-              <a:rPr lang="en-US" sz="1300" i="1" dirty="0">
-                <a:solidFill>
-                  <a:srgbClr val="C2410C"/>
-                </a:solidFill>
-              </a:rPr>
-              <a:t>【記入】例：レビューやマージの進め方、進捗の共有</a:t>
+              <a:rPr lang="en-US" sz="1300" dirty="0">
+                <a:solidFill>
+                  <a:srgbClr val="1F2933"/>
+                </a:solidFill>
+              </a:rPr>
+              <a:t>メンバーで定期的にレビューを行い、一部の進行が大きく遅れないようにした</a:t>
             </a:r>
             <a:endParaRPr lang="en-US" sz="1300" dirty="0"/>
           </a:p>

--- a/成果発表会資料_テンプレート.pptx
+++ b/成果発表会資料_テンプレート.pptx
@@ -120,17 +120,17 @@
   <p:extLst>
     <p:ext uri="{521415D9-36F7-43E2-AB2F-B90AF26B5E84}">
       <p14:sectionLst xmlns:p14="http://schemas.microsoft.com/office/powerpoint/2010/main">
-        <p14:section name="表紙" id="{2b319e0f-de31-d6f4-67d5-c7d89e6d9af3}">
+        <p14:section name="表紙" id="{cee59e8b-1514-ffff-ae87-9c08448e4258}">
           <p14:sldIdLst>
             <p14:sldId id="256"/>
           </p14:sldIdLst>
         </p14:section>
-        <p14:section name="導入" id="{c1f9dd46-7f40-9100-dea6-e4def2da4c78}">
+        <p14:section name="導入" id="{87e77dfa-ade1-a111-49d9-43aa37ee292f}">
           <p14:sldIdLst>
             <p14:sldId id="257"/>
           </p14:sldIdLst>
         </p14:section>
-        <p14:section name="システム概要" id="{8a457c5f-d814-7464-e241-174e4b7d1469}">
+        <p14:section name="システム概要" id="{38efc61c-9cb5-9faa-9c76-3c23e6c49ed8}">
           <p14:sldIdLst>
             <p14:sldId id="258"/>
             <p14:sldId id="259"/>
@@ -138,13 +138,13 @@
             <p14:sldId id="261"/>
           </p14:sldIdLst>
         </p14:section>
-        <p14:section name="デモンストレーション" id="{78c08f1f-873b-21e8-c431-642cc13cd2da}">
+        <p14:section name="デモンストレーション" id="{ce4d1364-1f49-4397-0dd4-6bb42b6744eb}">
           <p14:sldIdLst>
             <p14:sldId id="262"/>
             <p14:sldId id="263"/>
           </p14:sldIdLst>
         </p14:section>
-        <p14:section name="振り返り" id="{6bf6fe0a-70b3-bc4f-d36e-fb851516fa36}">
+        <p14:section name="振り返り" id="{516c5599-63a0-56e8-2edf-0d61c237e088}">
           <p14:sldIdLst>
             <p14:sldId id="264"/>
             <p14:sldId id="265"/>
@@ -152,7 +152,7 @@
             <p14:sldId id="267"/>
           </p14:sldIdLst>
         </p14:section>
-        <p14:section name="要望・まとめ" id="{046912a6-d9ae-0867-7b91-88e25ebc5be6}">
+        <p14:section name="要望・まとめ" id="{50e200fc-1804-b06d-f9f4-81e8d380145c}">
           <p14:sldIdLst>
             <p14:sldId id="268"/>
             <p14:sldId id="269"/>

--- a/成果発表会資料_テンプレート.pptx
+++ b/成果発表会資料_テンプレート.pptx
@@ -119,12 +119,12 @@
   <p:extLst>
     <p:ext uri="{521415D9-36F7-43E2-AB2F-B90AF26B5E84}">
       <p14:sectionLst xmlns:p14="http://schemas.microsoft.com/office/powerpoint/2010/main">
-        <p14:section name="表紙" id="{b35b1b7d-30b9-48ac-e1cf-fd09a6064957}">
+        <p14:section name="表紙" id="{7be8d9da-0b9e-461d-4a77-82aed3e58e07}">
           <p14:sldIdLst>
             <p14:sldId id="256"/>
           </p14:sldIdLst>
         </p14:section>
-        <p14:section name="システム概要" id="{821de166-9bad-a7d6-1b48-408df5a0c651}">
+        <p14:section name="システム概要" id="{9b003a64-2da8-4c21-b7eb-3db95190f8b3}">
           <p14:sldIdLst>
             <p14:sldId id="257"/>
             <p14:sldId id="258"/>
@@ -132,13 +132,13 @@
             <p14:sldId id="260"/>
           </p14:sldIdLst>
         </p14:section>
-        <p14:section name="デモンストレーション" id="{0ba5bf99-9b77-f8a8-0330-a864a21b0560}">
+        <p14:section name="デモンストレーション" id="{294df66c-7663-6616-1d3f-02bf8ce9c9d2}">
           <p14:sldIdLst>
             <p14:sldId id="261"/>
             <p14:sldId id="262"/>
           </p14:sldIdLst>
         </p14:section>
-        <p14:section name="振り返り" id="{99416482-3a15-896e-5f0c-d3aaf592bcdb}">
+        <p14:section name="振り返り" id="{a1329f9a-b472-3750-99d1-0eadff70dd3d}">
           <p14:sldIdLst>
             <p14:sldId id="263"/>
             <p14:sldId id="264"/>
@@ -146,7 +146,7 @@
             <p14:sldId id="266"/>
           </p14:sldIdLst>
         </p14:section>
-        <p14:section name="要望・まとめ" id="{9112c311-0efb-4fc2-775f-488b887e29d9}">
+        <p14:section name="要望・まとめ" id="{526a2535-8aa0-ed43-f36e-479c3bd77686}">
           <p14:sldIdLst>
             <p14:sldId id="267"/>
             <p14:sldId id="268"/>
